--- a/report/PM25_presentation.pptx
+++ b/report/PM25_presentation.pptx
@@ -19,9 +19,10 @@
     <p:sldId id="267" r:id="rId13"/>
     <p:sldId id="268" r:id="rId14"/>
     <p:sldId id="269" r:id="rId15"/>
+    <p:sldId id="270" r:id="rId16"/>
   </p:sldIdLst>
   <p:notesMasterIdLst>
-    <p:notesMasterId r:id="rId16"/>
+    <p:notesMasterId r:id="rId17"/>
   </p:notesMasterIdLst>
   <p:sldSz cx="9144000" cy="5143500"/>
   <p:notesSz cx="5143500" cy="9144000"/>
@@ -515,7 +516,7 @@
           <a:p>
             <a:r>
               <a:rPr lang="en-US" dirty="0"/>
-              <a:t>[0:00-0:25]
+              <a:t>[0:00-0:20]
 สวัสดีครับ ผมธนา ธนันต์เศรษฐ์ รหัส 690631061 นี่คือการบ้านครั้งที่ 4 วิชา Data Science Programming
 หัวข้อ PM2.5 ในภาคเหนือ จากข้อมูลดิบสู่ข้อเสนอเชิงนโยบาย
 สิบนาทีนี้จะเล่าสี่เรื่อง คำถามที่ตั้งไว้ โค้ดทำงานยังไง ข้อมูลกลายเป็นอะไร และข้อเสนอสามข้อ
@@ -608,18 +609,26 @@
           <a:p>
             <a:r>
               <a:rPr lang="en-US" dirty="0"/>
-              <a:t>[6:20-7:10]
-กรอบที่สองคือ classification พรุ่งนี้จะเกิน 37.5 ไหม
-วันที่เกินมีราวสิบเปอร์เซ็นต์ accuracy จึงใช้ไม่ได้ ทายว่าปลอดภัยทุกวันก็ได้เก้าสิบแล้ว
-โมเดลไม่ได้ตอบใช่หรือไม่ใช่ มันตอบเป็นความน่าจะเป็น แล้วต้องมีคนตัดสินว่ามั่นใจเท่าไหร่ถึงจะเตือน
-ค่า default คือศูนย์จุดห้า ผมไม่ใช้ ผมตั้งเป้าเชิงนโยบายก่อนว่าต้องจับวันอันตรายให้ได้เก้าสิบเปอร์เซ็นต์
-แล้วเลือกเส้นที่สูงที่สุดที่ยังผ่านเกณฑ์นั้น ได้ศูนย์จุดสามสี่สี่
-ความผิดพลาดสองแบบไม่สมมาตร เตือนผิดหนึ่งครั้งเสียแค่เปิดห้องหนึ่งวันกับแจกหน้ากาก
-ย้อนกลับได้ และอยู่ในงบแล้ว แต่การพลาดหนึ่งวันคือคนกลุ่มเปราะบางหนึ่งจุดหกล้านคนไม่ได้รับการป้องกัน
-โมเดลพลาดสี่วัน เตือนผิดยี่สิบหกครั้งใน 454 วัน baseline พลาดแปด เตือนผิดแปด
-ลดการพลาดลงครึ่งหนึ่ง แลกกับเตือนผิดราวสามเท่า
-และผมจงใจไม่ไล่ล่าให้พลาดเป็นศูนย์ เพราะจับให้ครบต้องยอมเตือนผิดเก้าสิบเก้าครั้ง
-คือเตือนทุกสี่วันครึ่ง ซึ่งสอนให้คนเลิกฟัง</a:t>
+              <a:t>[5:25-6:10]
+การเปรียบเทียบ บนชุดทดสอบสี่ร้อยห้าสิบสี่วันที่โมเดลไม่เคยเห็น แบ่งด้วยเวลาไม่ใช่สุ่ม
+และในโค้ด baseline ถูกให้คะแนนก่อนบรรทัดที่เทรนโมเดล เพื่อไม่ให้ผมมีโอกาสเลือก baseline ที่ทำให้ตัวเองชนะ
+คอลัมน์แรก gradient boosting ได้สามจุดเก้าห้า เทียบกับ baseline สี่จุดหนึ่งสอง ชนะสี่เปอร์เซ็นต์
+ฟังดูดี แต่ผมไม่เอามาเคลม เพราะชนะได้แค่ศูนย์จุดหนึ่งเจ็ด
+ในขณะที่ผมวัด bias ของข้อมูลตัวเองไว้ที่ห้าจุดสามแปด ชัยชนะเล็กกว่าความผิดพลาดของข้อมูลสามสิบเท่า
+มันอยู่ในระดับ noise
+คอลัมน์สุดท้าย วันที่อากาศเปลี่ยน baseline พลาดสิบสี่จุดหนึ่ง ridge พลาดสิบเอ็ดจุดแปด
+ลดลงสิบหกเปอร์เซ็นต์ ชนะสองจุดสองเก้า ซึ่งอยู่ในระดับเดียวกับ bias แล้ว พอมีน้ำหนัก
+และที่สำคัญคือทั้งสองโมเดลชนะในคอลัมน์นี้ ไม่ใช่ตัวเดียว
+ถ้าตัวเดียวอาจเป็นความบังเอิญ แต่สองวิธีที่ทำงานคนละแบบชนะเหมือนกัน แปลว่ามีอะไรจริงอยู่
+สังเกตด้วยว่า ridge แพ้ baseline ในคอลัมน์แรก แต่ชนะขาดที่สุดในคอลัมน์สุดท้าย
+ถ้าดูแค่ค่าเฉลี่ยรวม ridge คือตัวที่ควรทิ้ง แต่พอดูเกณฑ์ที่ตรงกับการใช้งานจริง มันคือตัวที่ดีที่สุด
+สรุปคือ persistence ไม่มีใครชนะได้บนวันเงียบๆ ที่ครองค่าเฉลี่ยอยู่
+โมเดลผมพิสูจน์ตัวเองได้เฉพาะบนวันที่ข้ามเกณฑ์ นั่นแคบกว่าคำว่าโมเดลผมดีกว่า
+และเป็นสิ่งที่หลักฐานรองรับ
+และนี่คือจุดที่เปลี่ยนทิศทางของงาน ถ้าโมเดลมีค่าเฉพาะวันที่อากาศเปลี่ยน
+สิ่งที่ควรเผยแพร่ก็ไม่ใช่ตัวเลขของพรุ่งนี้ เพราะตัวเลขนั้นเดาเองก็เกือบได้แล้ว
+สิ่งที่ควรเผยแพร่คือคำเตือนว่าพรุ่งนี้กำลังจะเปลี่ยน
+ซึ่งเป็นคนละคำถาม และเป็นคำถามที่สไลด์ถัดไปตอบ รวมถึงเป็นสิ่งที่ข้อเสนอข้อแรกขอให้จังหวัดทำ</a:t>
             </a:r>
             <a:endParaRPr lang="en-US" dirty="0"/>
           </a:p>
@@ -707,17 +716,18 @@
           <a:p>
             <a:r>
               <a:rPr lang="en-US" dirty="0"/>
-              <a:t>[7:10-8:00]  สไลด์สำคัญ
-ผลที่ผมไม่ได้คาดไว้ และข้อเสนอของผมยืนอยู่บนมัน
-ผมเพิ่มจุดความร้อนจากดาวเทียม NASA เข้าไป คาดว่าจะอธิบายได้ทั้งรายวันและรายปี
-รายวันอธิบายได้จริง แผงซ้าย ความสัมพันธ์ศูนย์จุดหกเก้า แรงกว่าตัวแปรสภาพอากาศทุกตัวที่ทดสอบ
-แต่รายปีความสัมพันธ์หายไป ดูตาราง ปี 2567 มีจุดไฟมากที่สุด สองหมื่นหนึ่งพันจุด
-แต่มีวันเกินมาตรฐานน้อยที่สุด แค่สิบเอ็ดวัน
-ปี 2568 มีไฟไม่ถึงครึ่ง แต่มีวันแย่มากกว่าเกือบสามเท่า
-สองอย่างนี้ไม่ขัดกัน รายวันถามว่าควันมาจากไหน รายปีถามว่ามีกี่วันที่สะสมจนข้ามเส้น
-ซึ่งขึ้นกับจังหวะ ไม่ใช่ปริมาณรวม
-สรุปคือ จำนวนวันเกินมาตรฐานรายปี ไม่ได้วัดว่าปีนั้นเผามากแค่ไหนเป็นหลัก
-ผมบอกไม่ได้ว่ามันวัดอะไร ตัวเลือกที่ชัดที่สุดคือการระบายอากาศ แต่ข้อมูลของผมเองไม่รองรับ</a:t>
+              <a:t>[6:10-6:55]
+กรอบที่สองคือ classification พรุ่งนี้จะเกิน 37.5 ไหม
+วันที่เกินมีราวสิบเปอร์เซ็นต์ accuracy จึงใช้ไม่ได้ ทายว่าปลอดภัยทุกวันก็ได้เก้าสิบแล้ว
+โมเดลไม่ได้ตอบใช่หรือไม่ใช่ มันตอบเป็นความน่าจะเป็น แล้วต้องมีคนตัดสินว่ามั่นใจเท่าไหร่ถึงจะเตือน
+ค่า default คือศูนย์จุดห้า ผมไม่ใช้ ผมตั้งเป้าเชิงนโยบายก่อนว่าต้องจับวันอันตรายให้ได้เก้าสิบเปอร์เซ็นต์
+แล้วเลือกเส้นที่สูงที่สุดที่ยังผ่านเกณฑ์นั้น ได้ศูนย์จุดสามสี่สี่
+ความผิดพลาดสองแบบไม่สมมาตร เตือนผิดหนึ่งครั้งเสียแค่เปิดห้องหนึ่งวันกับแจกหน้ากาก
+ย้อนกลับได้ และอยู่ในงบแล้ว แต่การพลาดหนึ่งวันคือคนกลุ่มเปราะบางหนึ่งจุดหกล้านคนไม่ได้รับการป้องกัน
+โมเดลพลาดสี่วัน เตือนผิดยี่สิบหกครั้งใน 454 วัน baseline พลาดแปด เตือนผิดแปด
+ลดการพลาดลงครึ่งหนึ่ง แลกกับเตือนผิดราวสามเท่า
+และผมจงใจไม่ไล่ล่าให้พลาดเป็นศูนย์ เพราะจับให้ครบต้องยอมเตือนผิดเก้าสิบเก้าครั้ง
+คือเตือนทุกสี่วันครึ่ง ซึ่งสอนให้คนเลิกฟัง</a:t>
             </a:r>
             <a:endParaRPr lang="en-US" dirty="0"/>
           </a:p>
@@ -805,22 +815,17 @@
           <a:p>
             <a:r>
               <a:rPr lang="en-US" dirty="0"/>
-              <a:t>[8:00-8:50]
-ข้อเสนอสามข้อ ผมจัดเป็นสี่ช่องเหมือนกันทุกข้อ คือ ใครทำ ทำอะไร คาดว่าจะได้อะไร และติดอะไร
-เป็นรูปแบบเดียวกับที่ผมใช้เขียน roadmap ในงานประจำ ผมไม่เสนออะไรที่ไม่มีเจ้าของ
-และไม่เสนออะไรโดยไม่บอกข้อจำกัดของมันไปพร้อมกัน
-ข้อแรก เสนอต่อศูนย์อนามัยที่ 1 เชียงใหม่ ซึ่งดูแลห้องปลอดฝุ่นสองพันสองร้อยเจ็ดสิบห้าห้อง
-ให้เผยแพร่ความน่าจะเป็นที่พรุ่งนี้จะเกินมาตรฐาน ควบคู่กับค่าปัจจุบันที่เผยแพร่อยู่แล้ว
-แล้วเผยแพร่อัตราการพลาดด้วย ระบบที่ปิดบังความผิดพลาดของตัวเอง
-คือระบบที่ขอความไว้วางใจที่ยังไม่ได้พิสูจน์
-ข้อสอง เสนอต่อคณะทำงาน PM2.5 จังหวัด ให้รายงานตัวเลขการเผาคู่กับตัวเลขวันเกินมาตรฐาน
-เพราะจังหวัดที่ถูกวัดด้วยวันเกินมาตรฐานอย่างเดียว กำลังถูกวัดด้วยดินฟ้าอากาศเป็นส่วนใหญ่
-ทั้งในทางบวกและทางลบ
-ข้อสาม เสนอต่อ ปภ. บัญชีเงินเยียวยาภัยพิบัติมีหมวดบ้านพัง มีหมวดเครื่องมือทำกินเสียหาย
-แต่ไม่มีหมวดสำหรับครัวเรือนที่ทำงานไม่ได้หกสัปดาห์ และเกณฑ์ปัจจุบันคือรอให้เกิน 125 ครบห้าวันก่อน
-คือจ่ายหลังจากเกิดหายนะแล้ว ไม่ใช่จ่ายตามการรับสัมผัส
-เงื่อนไขที่ใช้กับทั้งสามข้อ ระบบที่ผมสาธิตทำนายค่าของแบบจำลอง ไม่ใช่ของอากาศจริง
-ต้องเทรนใหม่ด้วยข้อมูลสถานีตรวจวัดก่อนเปิดใช้จริง</a:t>
+              <a:t>[6:55-7:40]  สไลด์สำคัญ
+ผลที่ผมไม่ได้คาดไว้ และข้อเสนอของผมยืนอยู่บนมัน
+ผมเพิ่มจุดความร้อนจากดาวเทียม NASA เข้าไป คาดว่าจะอธิบายได้ทั้งรายวันและรายปี
+รายวันอธิบายได้จริง แผงซ้าย ความสัมพันธ์ศูนย์จุดหกเก้า แรงกว่าตัวแปรสภาพอากาศทุกตัวที่ทดสอบ
+แต่รายปีความสัมพันธ์หายไป ดูตาราง ปี 2567 มีจุดไฟมากที่สุด สองหมื่นหนึ่งพันจุด
+แต่มีวันเกินมาตรฐานน้อยที่สุด แค่สิบเอ็ดวัน
+ปี 2568 มีไฟไม่ถึงครึ่ง แต่มีวันแย่มากกว่าเกือบสามเท่า
+สองอย่างนี้ไม่ขัดกัน รายวันถามว่าควันมาจากไหน รายปีถามว่ามีกี่วันที่สะสมจนข้ามเส้น
+ซึ่งขึ้นกับจังหวะ ไม่ใช่ปริมาณรวม
+สรุปคือ จำนวนวันเกินมาตรฐานรายปี ไม่ได้วัดว่าปีนั้นเผามากแค่ไหนเป็นหลัก
+ผมบอกไม่ได้ว่ามันวัดอะไร ตัวเลือกที่ชัดที่สุดคือการระบายอากาศ แต่ข้อมูลของผมเองไม่รองรับ</a:t>
             </a:r>
             <a:endParaRPr lang="en-US" dirty="0"/>
           </a:p>
@@ -908,12 +913,29 @@
           <a:p>
             <a:r>
               <a:rPr lang="en-US" dirty="0"/>
-              <a:t>[8:50-9:20]
-ขอพูดสั้นๆ ถึงสิ่งที่การวิเคราะห์นี้ไม่รองรับ ผมอยากพูดเองมากกว่าโดนถาม
-ตัวเลขทั้งหมดเป็นของแบบจำลอง สี่ปีไม่ใช่แนวโน้ม สี่ฤดูเผาไม่พอจะ validate การพยากรณ์ฤดูกาล
-กริดหยาบเกินกว่าจะเทียบเมืองกับชนบท จำนวนไฟใกล้พื้นที่หนึ่งไม่ได้พิสูจน์ว่าไฟนั้นทำให้เกิดฝุ่นตรงนั้น
-และผมบอกไม่ได้ว่ามาตรการห้ามเผาได้ผลหรือไม่
-สิ่งเดียวที่แก้ได้มากที่สุดคือ ข้อมูลสถานีตรวจวัดจริงย้อนหลังห้าปี จากเครือข่าย DustBoy ของ มช.</a:t>
+              <a:t>[7:40-8:50]
+ข้อเสนอสี่ข้อ ผมจัดเป็นสี่ช่องเหมือนกันทุกข้อ คือ ใครทำ ทำอะไร คาดว่าจะได้อะไร และติดอะไร
+เป็นรูปแบบเดียวกับที่ผมใช้เขียน roadmap ในงานประจำ ผมไม่เสนออะไรที่ไม่มีเจ้าของ
+และไม่เสนออะไรโดยไม่บอกข้อจำกัดของมันไปพร้อมกัน
+ขอเริ่มที่ข้อแรก เพราะมันคือข้อที่หลักฐานในงานนี้รองรับหนักที่สุด
+สามในหกเช็คพอยต์ชี้ไปที่เรื่องเดียวกันหมด C3 บอกว่าข้อมูลเป็นแบบจำลอง
+C4 บอกว่ากริดหยาบเกินจะแยกอำเภอ C6 บอกว่ามันต่ำไปห้าจุดสามแปดทุกสถานี
+ข้อมูลเครื่องวัดจริงระดับอำเภอย้อนหลังห้าปีมีอยู่แล้วที่เครือข่าย DustBoy ของ มช.
+แต่ต้องขออนุมัติ ซึ่งยังไม่มีใครขอ
+อุปสรรคของระบบเตือนภัยฝุ่นในเชียงใหม่จึงไม่ใช่เรื่องวิธีการ แต่เป็นเรื่องสิทธิ์เข้าถึงข้อมูล
+และข้อเสนออีกสามข้อรออยู่บนข้อนี้
+ข้อแรก เสนอต่อศูนย์อนามัยที่ 1 เชียงใหม่ ซึ่งดูแลห้องปลอดฝุ่นสองพันสองร้อยเจ็ดสิบห้าห้อง
+ให้เผยแพร่ความน่าจะเป็นที่พรุ่งนี้จะเกินมาตรฐาน ควบคู่กับค่าปัจจุบันที่เผยแพร่อยู่แล้ว
+แล้วเผยแพร่อัตราการพลาดด้วย ระบบที่ปิดบังความผิดพลาดของตัวเอง
+คือระบบที่ขอความไว้วางใจที่ยังไม่ได้พิสูจน์
+ข้อสอง เสนอต่อคณะทำงาน PM2.5 จังหวัด ให้รายงานตัวเลขการเผาคู่กับตัวเลขวันเกินมาตรฐาน
+เพราะจังหวัดที่ถูกวัดด้วยวันเกินมาตรฐานอย่างเดียว กำลังถูกวัดด้วยดินฟ้าอากาศเป็นส่วนใหญ่
+ทั้งในทางบวกและทางลบ
+ข้อสาม เสนอต่อ ปภ. บัญชีเงินเยียวยาภัยพิบัติมีหมวดบ้านพัง มีหมวดเครื่องมือทำกินเสียหาย
+แต่ไม่มีหมวดสำหรับครัวเรือนที่ทำงานไม่ได้หกสัปดาห์ และเกณฑ์ปัจจุบันคือรอให้เกิน 125 ครบห้าวันก่อน
+คือจ่ายหลังจากเกิดหายนะแล้ว ไม่ใช่จ่ายตามการรับสัมผัส
+เงื่อนไขที่ใช้กับทั้งสามข้อ ระบบที่ผมสาธิตทำนายค่าของแบบจำลอง ไม่ใช่ของอากาศจริง
+ต้องเทรนใหม่ด้วยข้อมูลสถานีตรวจวัดก่อนเปิดใช้จริง</a:t>
             </a:r>
             <a:endParaRPr lang="en-US" dirty="0"/>
           </a:p>
@@ -1001,7 +1023,100 @@
           <a:p>
             <a:r>
               <a:rPr lang="en-US" dirty="0"/>
-              <a:t>[9:20-9:40]
+              <a:t>[8:50-9:15]
+ขอพูดสั้นๆ ถึงสิ่งที่การวิเคราะห์นี้ไม่รองรับ ผมอยากพูดเองมากกว่าโดนถาม
+ตัวเลขทั้งหมดเป็นของแบบจำลอง สี่ปีไม่ใช่แนวโน้ม สี่ฤดูเผาไม่พอจะ validate การพยากรณ์ฤดูกาล
+กริดหยาบเกินกว่าจะเทียบเมืองกับชนบท จำนวนไฟใกล้พื้นที่หนึ่งไม่ได้พิสูจน์ว่าไฟนั้นทำให้เกิดฝุ่นตรงนั้น
+และผมบอกไม่ได้ว่ามาตรการห้ามเผาได้ผลหรือไม่
+สิ่งเดียวที่แก้ได้มากที่สุดคือ ข้อมูลสถานีตรวจวัดจริงย้อนหลังห้าปี จากเครือข่าย DustBoy ของ มช.</a:t>
+            </a:r>
+            <a:endParaRPr lang="en-US" dirty="0"/>
+          </a:p>
+        </p:txBody>
+      </p:sp>
+      <p:sp>
+        <p:nvSpPr>
+          <p:cNvPr id="4" name="Slide Number Placeholder 3"/>
+          <p:cNvSpPr>
+            <a:spLocks noGrp="1"/>
+          </p:cNvSpPr>
+          <p:nvPr>
+            <p:ph type="sldNum" sz="quarter" idx="10"/>
+          </p:nvPr>
+        </p:nvSpPr>
+        <p:spPr/>
+        <p:txBody>
+          <a:bodyPr/>
+          <a:lstStyle/>
+          <a:p>
+            <a:fld id="{F7021451-1387-4CA6-816F-3879F97B5CBC}" type="slidenum">
+              <a:rPr lang="en-US"/>
+              <a:t>14</a:t>
+            </a:fld>
+            <a:endParaRPr lang="en-US"/>
+          </a:p>
+        </p:txBody>
+      </p:sp>
+    </p:spTree>
+    <p:extLst>
+      <p:ext uri="{BB962C8B-B14F-4D97-AF65-F5344CB8AC3E}">
+        <p14:creationId xmlns:p14="http://schemas.microsoft.com/office/powerpoint/2010/main" val="1024086991"/>
+      </p:ext>
+    </p:extLst>
+  </p:cSld>
+  <p:clrMapOvr>
+    <a:masterClrMapping/>
+  </p:clrMapOvr>
+</p:notes>
+</file>
+
+<file path=ppt/notesSlides/notesSlide15.xml><?xml version="1.0" encoding="utf-8"?>
+<p:notes xmlns:a="http://schemas.openxmlformats.org/drawingml/2006/main" xmlns:r="http://schemas.openxmlformats.org/officeDocument/2006/relationships" xmlns:p="http://schemas.openxmlformats.org/presentationml/2006/main">
+  <p:cSld>
+    <p:spTree>
+      <p:nvGrpSpPr>
+        <p:cNvPr id="1" name=""/>
+        <p:cNvGrpSpPr/>
+        <p:nvPr/>
+      </p:nvGrpSpPr>
+      <p:grpSpPr>
+        <a:xfrm>
+          <a:off x="0" y="0"/>
+          <a:ext cx="0" cy="0"/>
+          <a:chOff x="0" y="0"/>
+          <a:chExt cx="0" cy="0"/>
+        </a:xfrm>
+      </p:grpSpPr>
+      <p:sp>
+        <p:nvSpPr>
+          <p:cNvPr id="2" name="Slide Image Placeholder 1"/>
+          <p:cNvSpPr>
+            <a:spLocks noGrp="1" noRot="1" noChangeAspect="1"/>
+          </p:cNvSpPr>
+          <p:nvPr>
+            <p:ph type="sldImg"/>
+          </p:nvPr>
+        </p:nvSpPr>
+        <p:spPr/>
+      </p:sp>
+      <p:sp>
+        <p:nvSpPr>
+          <p:cNvPr id="3" name="Notes Placeholder 2"/>
+          <p:cNvSpPr>
+            <a:spLocks noGrp="1"/>
+          </p:cNvSpPr>
+          <p:nvPr>
+            <p:ph type="body" idx="1"/>
+          </p:nvPr>
+        </p:nvSpPr>
+        <p:spPr/>
+        <p:txBody>
+          <a:bodyPr/>
+          <a:lstStyle/>
+          <a:p>
+            <a:r>
+              <a:rPr lang="en-US" dirty="0"/>
+              <a:t>[9:15-9:40]
 สี่อย่างที่อยากให้จำ
 ข้อมูลกลายเป็นแบบจำลอง ผมเลยไปวัดว่ามันผิดไปเท่าไหร่
 สองจุดที่ห่างกันสิบสองกิโลเมตรเป็นข้อมูลชุดเดียวกัน
@@ -1030,7 +1145,7 @@
           <a:p>
             <a:fld id="{F7021451-1387-4CA6-816F-3879F97B5CBC}" type="slidenum">
               <a:rPr lang="en-US"/>
-              <a:t>14</a:t>
+              <a:t>15</a:t>
             </a:fld>
             <a:endParaRPr lang="en-US"/>
           </a:p>
@@ -1095,14 +1210,15 @@
           <a:p>
             <a:r>
               <a:rPr lang="en-US" dirty="0"/>
-              <a:t>[0:25-1:05]
-คนเชียงใหม่รู้อยู่แล้วว่าเดือนมีนาอากาศแย่ นั่นไม่ใช่การวิเคราะห์
-ผมเลยเลือกคำถามที่ถ้าตอบได้แล้วเปลี่ยนอะไรได้จริง
-เหตุผลข้อแรก เกณฑ์มันมีอยู่แล้ว และเป็นเชิงตั้งรับ ค่าเฉลี่ยรายวันเกิน 37.5
-กฎหมายบังคับให้แจกหน้ากากและเปิดห้องปลอดฝุ่นอยู่แล้ว แต่สั่งการจากค่าที่วัดไปแล้ว
-พยากรณ์จึงมีค่าเท่ากับเวลาล่วงหน้าหนึ่งวัน ของสิ่งที่สั่งไว้แล้วและมีงบแล้ว แคบ ชัด ทดสอบได้
-ข้อสอง ปี 2569 เชียงใหม่ห้ามเผายาวที่สุดเท่าที่เคยมี แต่เป็นปีที่ไฟหนักที่สุด
-ถ้าความพยายามกับตัวเลขที่ใช้วัดผลไปคนละทาง ตัวเลขนั้นก็ควรถูกตรวจสอบ</a:t>
+              <a:t>[0:20-0:45]
+ก่อนเข้าเนื้อหา ขอวางภาพใหญ่ก่อนหนึ่งหน้า
+ฤดูฝุ่นภาคเหนือทำอะไรได้สามอย่าง หนึ่ง Predict รู้ล่วงหน้าว่าพรุ่งนี้จะแย่
+สอง Prevent เปิดห้องปลอดฝุ่นทัน และวัดผลนโยบายเผาให้ถูกต้อง
+สาม Recovery ชดเชยครัวเรือนที่เสียรายได้ไปแล้ว
+สิ่งที่ผมสร้างจากข้อมูลตัวเองคือกล่องแรก ส่วนอีกสองกล่องผมอ้างงานวิจัยกับระเบียบที่มีอยู่แล้ว
+ผมแยกไว้ในตารางเลยว่าข้อไหนยืนบนอะไร จะได้ไม่เคลมเกินกว่าที่ข้อมูลรองรับ
+และทั้งสามกล่องรออยู่บนเรื่องเดียวกัน คือจะเข้าถึงข้อมูลเครื่องวัดจริงได้หรือไม่
+ซึ่งเป็นข้อเสนอข้อแรกของผม และเป็นเรื่องที่ผมจะเล่าให้ฟังว่าทำไม</a:t>
             </a:r>
             <a:endParaRPr lang="en-US" dirty="0"/>
           </a:p>
@@ -1190,15 +1306,14 @@
           <a:p>
             <a:r>
               <a:rPr lang="en-US" dirty="0"/>
-              <a:t>[1:05-1:55]
-ใบงานกำหนดว่าคลิปต้องครอบคลุมว่าโค้ดทำงานยังไง ผมขอเล่าตรงนี้ก่อนผลลัพธ์
-repository เป็นไปตาม layout ที่กำหนด config.py เก็บ path URL และค่าคงที่ไว้ที่เดียว
-ไม่มี hard-code กระจายที่อื่น fetch_data เซฟ raw response ทุกไฟล์ก่อนที่อะไรจะไป parse
-prepare_data ทำความสะอาด join สร้าง feature checks.py คือ checkpoint ทั้งหกข้อ
-analyse.py วาดกราฟ model.py ทำ baseline กับโมเดล
-ผมเพิ่ม run_all.py ให้รันทั้งหมดตามลำดับ แต่ละขั้นครอบด้วย try except
-ถ้าเน็ตพังจุดเดียว ที่เหลือยังรันต่อ แล้วสรุปท้ายบอกว่าขั้นไหนพัง
-ผลคือได้ raw 49 ไฟล์ และข้อมูลรายชั่วโมง 128,352 แถว จากทั้งสามแหล่ง</a:t>
+              <a:t>[0:45-1:20]
+คนเชียงใหม่รู้อยู่แล้วว่าเดือนมีนาอากาศแย่ นั่นไม่ใช่การวิเคราะห์
+ผมเลยเลือกคำถามที่ถ้าตอบได้แล้วเปลี่ยนอะไรได้จริง
+เหตุผลข้อแรก เกณฑ์มันมีอยู่แล้ว และเป็นเชิงตั้งรับ ค่าเฉลี่ยรายวันเกิน 37.5
+กฎหมายบังคับให้แจกหน้ากากและเปิดห้องปลอดฝุ่นอยู่แล้ว แต่สั่งการจากค่าที่วัดไปแล้ว
+พยากรณ์จึงมีค่าเท่ากับเวลาล่วงหน้าหนึ่งวัน ของสิ่งที่สั่งไว้แล้วและมีงบแล้ว แคบ ชัด ทดสอบได้
+ข้อสอง ปี 2569 เชียงใหม่ห้ามเผายาวที่สุดเท่าที่เคยมี แต่เป็นปีที่ไฟหนักที่สุด
+ถ้าความพยายามกับตัวเลขที่ใช้วัดผลไปคนละทาง ตัวเลขนั้นก็ควรถูกตรวจสอบ</a:t>
             </a:r>
             <a:endParaRPr lang="en-US" dirty="0"/>
           </a:p>
@@ -1286,23 +1401,15 @@
           <a:p>
             <a:r>
               <a:rPr lang="en-US" dirty="0"/>
-              <a:t>[1:55-2:40]
-สี่จุดในไปป์ไลน์ที่โค้ดจะรันผ่านสวยงาม แต่ให้คำตอบผิด และไม่มี error เตือนเลย
-หนึ่ง วันที่มีข้อมูลแค่หกชั่วโมง กับวันที่มีครบยี่สิบสี่ชั่วโมง ถ้าเอามาเฉลี่ยเหมือนกัน
-ค่าเฉลี่ยสองตัวนั้นไม่ใช่ของชนิดเดียวกัน ผมเลยตั้งกฎว่าวันไหนไม่ครบสิบแปดชั่วโมง ตัดทิ้ง ไม่เฉลี่ย
-สอง ทิศลม ลองนึกว่าวัดได้สองชั่วโมง ชั่วโมงแรก 350 องศา ชั่วโมงสอง 10 องศา
-ทั้งสองครั้งลมมาจากทิศเหนือแทบจะเป๊ะ แต่ถ้าเอามาบวกหารสอง จะได้ 180 องศา ซึ่งคือทิศใต้
-ตรงข้ามกับความจริงพอดี เพราะองศาเป็นวงกลม ไม่ใช่เส้นตรง ผมเลยแปลงเป็นเวกเตอร์ก่อนแล้วค่อยเฉลี่ย
-สาม Air4Thai เขียนค่าที่หายไปเป็นข้อความว่า ลบหนึ่ง ไม่ใช่ค่าว่าง
-สมมติวันหนึ่งวัดได้ห้าค่า สี่สิบสอง สามสิบแปด ลบหนึ่ง สี่สิบห้า ลบหนึ่ง
-ถ้าไม่กรอง เฉลี่ยได้ยี่สิบสี่จุดหก แต่ความจริงคือสี่สิบเอ็ดจุดเจ็ด
-ยี่สิบสี่จุดหกดูเป็นตัวเลขปกติมาก และมันจะทำให้วันนั้นถูกนับว่าไม่เกินมาตรฐาน ทั้งที่เกิน
-สี่ เรื่อง data leakage ผมใส่ guard ที่หยุดโปรแกรมทันที
-ถ้ามีคอลัมน์ที่รู้ไม่ได้ ณ เวลาทำนายหลุดเข้าโมเดล เขียนเป็น allow-list
-คือคอลัมน์สภาพอากาศต้องลงท้ายด้วย lag หรือ roll เท่านั้น อย่างอื่นไม่ผ่าน
-ขอพูดตรงๆ ว่า guard นี้ไม่เคยทำงานเลยในรอบสุดท้าย และยังไม่ครอบคลุมคอลัมน์ fc_
-ซึ่งเป็นค่าพยากรณ์ที่อาจไม่มีจริง ณ เวลานั้น ผมเขียนไว้ในตารางข้อจำกัดของรายงานแล้ว
-วิธีแก้คือใช้ Previous Runs API ของ Open-Meteo ซึ่งผมไม่ได้ทำในรอบนี้</a:t>
+              <a:t>[1:20-2:05]
+ใบงานกำหนดว่าคลิปต้องครอบคลุมว่าโค้ดทำงานยังไง ผมขอเล่าตรงนี้ก่อนผลลัพธ์
+repository เป็นไปตาม layout ที่กำหนด config.py เก็บ path URL และค่าคงที่ไว้ที่เดียว
+ไม่มี hard-code กระจายที่อื่น fetch_data เซฟ raw response ทุกไฟล์ก่อนที่อะไรจะไป parse
+prepare_data ทำความสะอาด join สร้าง feature checks.py คือ checkpoint ทั้งหกข้อ
+analyse.py วาดกราฟ model.py ทำ baseline กับโมเดล
+ผมเพิ่ม run_all.py ให้รันทั้งหมดตามลำดับ แต่ละขั้นครอบด้วย try except
+ถ้าเน็ตพังจุดเดียว ที่เหลือยังรันต่อ แล้วสรุปท้ายบอกว่าขั้นไหนพัง
+ผลคือได้ raw 49 ไฟล์ และข้อมูลรายชั่วโมง 128,352 แถว จากทั้งสามแหล่ง</a:t>
             </a:r>
             <a:endParaRPr lang="en-US" dirty="0"/>
           </a:p>
@@ -1390,21 +1497,23 @@
           <a:p>
             <a:r>
               <a:rPr lang="en-US" dirty="0"/>
-              <a:t>[2:40-3:20]
-มาที่ผลลัพธ์ เริ่มจาก checkpoint เพราะมันเปลี่ยนสิ่งที่ส่วนที่เหลือเคลมได้
-C3 สั่งให้รายงานเปอร์เซ็นต์ข้อมูลที่หายไปของทุกคอลัมน์
-ของผมมีสามสิบแปดคอลัมน์ที่หายไปศูนย์จุดศูนย์ศูนย์ศูนย์ศูนย์เปอร์เซ็นต์พอดี ตลอดสามปีครึ่ง
-ตรงนี้แหละที่ผมไม่หยุด เพราะข้อมูลที่สมบูรณ์เกินไปคือสัญญาณเตือน ไม่ใช่ข่าวดี
-เครื่องวัดจริงมันหยุดส่งข้อมูลเสมอ ตอนสอบเทียบ ตอนไฟดับ ตอนสัญญาณขาด ตอนซ่อมบำรุง
-Air4Thai ซึ่งเป็นเครื่องวัดจริง ก็เข้ารหัสช่องว่างพวกนั้นไว้เป็นลบหนึ่ง
-ถ้าเครื่องวัดจริงยังมีรู แล้วข้อมูลที่ไม่มีรูเลยมาจากไหน
-คำตอบคือมันไม่ใช่เครื่องวัด แหล่งจริงคือ Copernicus CAMS
-ซึ่งเป็นแบบจำลองบรรยากาศระดับโลก ที่ผลิตตัวเลขให้ทุกกริดทุกชั่วโมง
-ไม่ว่าตรงนั้นจะเคยมีใครไปวัดหรือไม่ แบบจำลองไม่มีวันไฟดับ
-สามอย่างที่ตามมา หนึ่ง ความคลาดเคลื่อนเป็นอคติเชิงระบบ ไม่ใช่ noise เก็บข้อมูลเพิ่มไม่ช่วย
-สอง โมเดลที่เทรนด้วยข้อมูลนี้ เก่งเรื่องทำนาย CAMS ไม่ใช่ทำนายอากาศจริง
-สาม ทุกตัวเลขวันเกินมาตรฐานในงานนี้ คือตัวเลขของ CAMS
-ซึ่งบังคับให้คำถามถัดไปคือ แล้ว CAMS ผิดไปเท่าไหร่</a:t>
+              <a:t>[2:05-2:45]
+สี่จุดในไปป์ไลน์ที่โค้ดจะรันผ่านสวยงาม แต่ให้คำตอบผิด และไม่มี error เตือนเลย
+หนึ่ง วันที่มีข้อมูลแค่หกชั่วโมง กับวันที่มีครบยี่สิบสี่ชั่วโมง ถ้าเอามาเฉลี่ยเหมือนกัน
+ค่าเฉลี่ยสองตัวนั้นไม่ใช่ของชนิดเดียวกัน ผมเลยตั้งกฎว่าวันไหนไม่ครบสิบแปดชั่วโมง ตัดทิ้ง ไม่เฉลี่ย
+สอง ทิศลม ลองนึกว่าวัดได้สองชั่วโมง ชั่วโมงแรก 350 องศา ชั่วโมงสอง 10 องศา
+ทั้งสองครั้งลมมาจากทิศเหนือแทบจะเป๊ะ แต่ถ้าเอามาบวกหารสอง จะได้ 180 องศา ซึ่งคือทิศใต้
+ตรงข้ามกับความจริงพอดี เพราะองศาเป็นวงกลม ไม่ใช่เส้นตรง ผมเลยแปลงเป็นเวกเตอร์ก่อนแล้วค่อยเฉลี่ย
+สาม Air4Thai เขียนค่าที่หายไปเป็นข้อความว่า ลบหนึ่ง ไม่ใช่ค่าว่าง
+สมมติวันหนึ่งวัดได้ห้าค่า สี่สิบสอง สามสิบแปด ลบหนึ่ง สี่สิบห้า ลบหนึ่ง
+ถ้าไม่กรอง เฉลี่ยได้ยี่สิบสี่จุดหก แต่ความจริงคือสี่สิบเอ็ดจุดเจ็ด
+ยี่สิบสี่จุดหกดูเป็นตัวเลขปกติมาก และมันจะทำให้วันนั้นถูกนับว่าไม่เกินมาตรฐาน ทั้งที่เกิน
+สี่ เรื่อง data leakage ผมใส่ guard ที่หยุดโปรแกรมทันที
+ถ้ามีคอลัมน์ที่รู้ไม่ได้ ณ เวลาทำนายหลุดเข้าโมเดล เขียนเป็น allow-list
+คือคอลัมน์สภาพอากาศต้องลงท้ายด้วย lag หรือ roll เท่านั้น อย่างอื่นไม่ผ่าน
+ขอพูดตรงๆ ว่า guard นี้ไม่เคยทำงานเลยในรอบสุดท้าย และยังไม่ครอบคลุมคอลัมน์ fc_
+ซึ่งเป็นค่าพยากรณ์ที่อาจไม่มีจริง ณ เวลานั้น ผมเขียนไว้ในตารางข้อจำกัดของรายงานแล้ว
+วิธีแก้คือใช้ Previous Runs API ของ Open-Meteo ซึ่งผมไม่ได้ทำในรอบนี้</a:t>
             </a:r>
             <a:endParaRPr lang="en-US" dirty="0"/>
           </a:p>
@@ -1492,23 +1601,21 @@
           <a:p>
             <a:r>
               <a:rPr lang="en-US" dirty="0"/>
-              <a:t>[3:20-4:00]
-C6 ให้เทียบกับ Air4Thai ซึ่งเป็นเครื่องวัดจริง
-Air4Thai ไม่มี endpoint ย้อนหลัง ยิงได้แค่ค่าปัจจุบัน ผมเลยรันหลายวันแล้วเก็บสะสม ได้เจ็ดสิบคู่
-ผลคือ CAMS อ่านต่ำกว่าเครื่องวัดเฉลี่ยห้าจุดสามแปด และต่ำทั้งสิบสี่จากสิบสี่สถานี
-ไม่ใช่ส่วนใหญ่ แต่ทั้งหมด การไปทางเดียวกันหมดแบบนี้คืออคติเชิงระบบ ไม่ใช่ความบังเอิญ
-ที่สำคัญคือทิศทางของมันสวนทางกับตัวเลขของผมเอง
-สมมติวันหนึ่ง CAMS รายงานสามสิบห้าจุดสอง ผมนับเป็นวันปกติเพราะไม่ถึงสามสิบเจ็ดจุดห้า
-แต่ถ้าบวกกลับห้าจุดสามแปด ค่าจริงน่าจะราวสี่สิบจุดหก ซึ่งเกินมาตรฐาน
-แปลว่าจำนวนวันเกินมาตรฐานทุกตัวในรายงานผม น่าจะนับขาด ไม่ใช่นับเกิน
-ข้อจำกัดสองข้อที่ผมขอพูดเอง
-ข้อแรก เจ็ดสิบคู่นั้นเก็บในหน้าฝนทั้งหมด ค่าอยู่แค่หกจุดเก้าถึงสิบแปดจุดสี่
-ผมวัด bias ในอากาศสะอาด แล้วเอาไปพูดถึงเส้นสามสิบเจ็ดจุดห้าซึ่งอยู่นอกช่วงที่วัด
-มันอาจจะเท่าเดิม อาจจะมากกว่า ผมพิสูจน์ไม่ได้
-ข้อสอง bias ไม่เท่ากันทุกที่ ที่ยุพราชวิทยาลัยในเมืองเชียงใหม่ต่ำแค่ศูนย์จุดเจ็ด
-แต่ที่แม่เมาะลำปางต่ำถึงเก้าจุดหนึ่ง เพราะแม่เมาะมีโรงไฟฟ้าถ่านหิน
-ซึ่งเป็นแหล่งกำเนิดเฉพาะจุดที่กริดสี่สิบห้ากิโลเมตรมองไม่เห็น
-แปลว่าการจัดอันดับระหว่างจังหวัดในงานผม อาจปนความผิดพลาดของแบบจำลองที่ไม่เท่ากันอยู่</a:t>
+              <a:t>[2:45-3:20]
+มาที่ผลลัพธ์ เริ่มจาก checkpoint เพราะมันเปลี่ยนสิ่งที่ส่วนที่เหลือเคลมได้
+C3 สั่งให้รายงานเปอร์เซ็นต์ข้อมูลที่หายไปของทุกคอลัมน์
+ของผมมีสามสิบแปดคอลัมน์ที่หายไปศูนย์จุดศูนย์ศูนย์ศูนย์ศูนย์เปอร์เซ็นต์พอดี ตลอดสามปีครึ่ง
+ตรงนี้แหละที่ผมไม่หยุด เพราะข้อมูลที่สมบูรณ์เกินไปคือสัญญาณเตือน ไม่ใช่ข่าวดี
+เครื่องวัดจริงมันหยุดส่งข้อมูลเสมอ ตอนสอบเทียบ ตอนไฟดับ ตอนสัญญาณขาด ตอนซ่อมบำรุง
+Air4Thai ซึ่งเป็นเครื่องวัดจริง ก็เข้ารหัสช่องว่างพวกนั้นไว้เป็นลบหนึ่ง
+ถ้าเครื่องวัดจริงยังมีรู แล้วข้อมูลที่ไม่มีรูเลยมาจากไหน
+คำตอบคือมันไม่ใช่เครื่องวัด แหล่งจริงคือ Copernicus CAMS
+ซึ่งเป็นแบบจำลองบรรยากาศระดับโลก ที่ผลิตตัวเลขให้ทุกกริดทุกชั่วโมง
+ไม่ว่าตรงนั้นจะเคยมีใครไปวัดหรือไม่ แบบจำลองไม่มีวันไฟดับ
+สามอย่างที่ตามมา หนึ่ง ความคลาดเคลื่อนเป็นอคติเชิงระบบ ไม่ใช่ noise เก็บข้อมูลเพิ่มไม่ช่วย
+สอง โมเดลที่เทรนด้วยข้อมูลนี้ เก่งเรื่องทำนาย CAMS ไม่ใช่ทำนายอากาศจริง
+สาม ทุกตัวเลขวันเกินมาตรฐานในงานนี้ คือตัวเลขของ CAMS
+ซึ่งบังคับให้คำถามถัดไปคือ แล้ว CAMS ผิดไปเท่าไหร่</a:t>
             </a:r>
             <a:endParaRPr lang="en-US" dirty="0"/>
           </a:p>
@@ -1596,18 +1703,23 @@
           <a:p>
             <a:r>
               <a:rPr lang="en-US" dirty="0"/>
-              <a:t>[4:00-4:55]  สไลด์สำคัญ อย่ารีบ
-นี่คือ C4 สิ่งที่ผมภูมิใจที่สุด เพราะเกือบพลาดไป
-C4 บอกว่าถ้าจะเทียบสองพื้นที่ ต้องพิสูจน์ก่อนว่ามันคืนข้อมูลต่างกันจริง
-เวอร์ชันแรกของผมเทียบพิกัดที่ API คืนกลับมา หกจุด หกพิกัดต่างกัน มันผ่าน
-แล้วผมมาดูตัวเลขจริง เมืองกับหางดง ห่างกันสิบสองกิโลเมตร
-คืนค่า PM2.5 เหมือนกันทุกตัวเลข ตลอดหนึ่งร้อยหกสิบแปดชั่วโมง ผลต่างสูงสุดเป็นศูนย์
-ทั้งที่ API รายงานพิกัดคนละค่าให้สองจุดนั้น
-เหตุผลคือ Open-Meteo รายงานบนกริดศูนย์จุดหนึ่งองศา แต่ CAMS ละเอียดแค่ศูนย์จุดสี่องศา
-ราวสี่สิบห้ากิโลเมตร สองคำขอจึงมาจากกริดหยาบเดียวกันได้ แล้วยังรายงานพิกัดต่างกัน
-มีแต่การเทียบค่าเท่านั้นที่จับได้
-ผมเลยเขียน check ใหม่ให้เทียบชุดข้อมูลจริง ตัดการวิเคราะห์ระดับอำเภอทิ้ง
-แล้วจำกัดการเทียบเชิงพื้นที่ไว้ที่สี่จังหวัดที่ตรวจแล้วว่าต่างกันจริง</a:t>
+              <a:t>[3:20-4:00]
+C6 ให้เทียบกับ Air4Thai ซึ่งเป็นเครื่องวัดจริง
+Air4Thai ไม่มี endpoint ย้อนหลัง ยิงได้แค่ค่าปัจจุบัน ผมเลยรันหลายวันแล้วเก็บสะสม ได้เจ็ดสิบคู่
+ผลคือ CAMS อ่านต่ำกว่าเครื่องวัดเฉลี่ยห้าจุดสามแปด และต่ำทั้งสิบสี่จากสิบสี่สถานี
+ไม่ใช่ส่วนใหญ่ แต่ทั้งหมด การไปทางเดียวกันหมดแบบนี้คืออคติเชิงระบบ ไม่ใช่ความบังเอิญ
+ที่สำคัญคือทิศทางของมันสวนทางกับตัวเลขของผมเอง
+สมมติวันหนึ่ง CAMS รายงานสามสิบห้าจุดสอง ผมนับเป็นวันปกติเพราะไม่ถึงสามสิบเจ็ดจุดห้า
+แต่ถ้าบวกกลับห้าจุดสามแปด ค่าจริงน่าจะราวสี่สิบจุดหก ซึ่งเกินมาตรฐาน
+แปลว่าจำนวนวันเกินมาตรฐานทุกตัวในรายงานผม น่าจะนับขาด ไม่ใช่นับเกิน
+ข้อจำกัดสองข้อที่ผมขอพูดเอง
+ข้อแรก เจ็ดสิบคู่นั้นเก็บในหน้าฝนทั้งหมด ค่าอยู่แค่หกจุดเก้าถึงสิบแปดจุดสี่
+ผมวัด bias ในอากาศสะอาด แล้วเอาไปพูดถึงเส้นสามสิบเจ็ดจุดห้าซึ่งอยู่นอกช่วงที่วัด
+มันอาจจะเท่าเดิม อาจจะมากกว่า ผมพิสูจน์ไม่ได้
+ข้อสอง bias ไม่เท่ากันทุกที่ ที่ยุพราชวิทยาลัยในเมืองเชียงใหม่ต่ำแค่ศูนย์จุดเจ็ด
+แต่ที่แม่เมาะลำปางต่ำถึงเก้าจุดหนึ่ง เพราะแม่เมาะมีโรงไฟฟ้าถ่านหิน
+ซึ่งเป็นแหล่งกำเนิดเฉพาะจุดที่กริดสี่สิบห้ากิโลเมตรมองไม่เห็น
+แปลว่าการจัดอันดับระหว่างจังหวัดในงานผม อาจปนความผิดพลาดของแบบจำลองที่ไม่เท่ากันอยู่</a:t>
             </a:r>
             <a:endParaRPr lang="en-US" dirty="0"/>
           </a:p>
@@ -1695,22 +1807,18 @@
           <a:p>
             <a:r>
               <a:rPr lang="en-US" dirty="0"/>
-              <a:t>[4:55-5:35]
-ทีนี้มาที่โมเดล คำถามแรกคือ ต้องมีโมเดลไหม
-เพราะมีวิธีเดาที่ง่ายที่สุดอยู่แล้ว คือทายว่าพรุ่งนี้เท่ากับวันนี้ ไม่ต้องเทรน ไม่ต้องใช้อะไรเลย
-และมันแข็งแรงมาก เพราะค่าวันนี้กับค่าเมื่อวานสัมพันธ์กันที่ศูนย์จุดแปดเก้าสี่
-ยกกำลังสองได้ศูนย์จุดแปด แปลว่าเมื่อวานอย่างเดียวอธิบายวันนี้ได้แปดสิบเปอร์เซ็นต์
-เหลือช่องให้โมเดลแค่ยี่สิบเปอร์เซ็นต์ นั่นคือแผงซ้าย
-แต่พอผมถามต่อว่า มันพลาดเท่ากันทุกวันจริงหรือ คำตอบคือไม่
-ผมเลยแบ่งวันเป็นสองกอง กองแรกคือวันที่เมื่อวานกับวันนี้อยู่ฝั่งเดียวกันของเส้นสามสิบเจ็ดจุดห้า
-กองที่สองคือวันที่ข้ามเส้น
-กองแรกมีเก้าสิบสี่จุดห้าเปอร์เซ็นต์ พลาดแค่สามจุดห้าเก้า
-กองที่สองมีห้าจุดห้าเปอร์เซ็นต์ พลาดถึงสิบจุดหกศูนย์ แย่กว่าเกือบสามเท่า
-ค่าเฉลี่ยรวมออกมาสามจุดเก้าแปด เพราะวันเงียบครองสัดส่วนเกือบทั้งหมด มันกลบส่วนที่สำคัญที่สุดไว้
-และความต่างนี้ไม่ใช่แค่ตัวเลข พลาดสามจุดห้าเก้าคือทายสี่สิบสี่แล้วจริงสี่สิบเจ็ด คำตอบยังเกินมาตรฐานเหมือนเดิม
-แต่พลาดสิบจุดหกคือทายสามสิบเอ็ดแล้วจริงห้าสิบสอง คำตอบพลิกจากปลอดภัยเป็นอันตราย
-อันแรกทำให้ตัวเลขเพี้ยน อันหลังทำให้การตัดสินใจเพี้ยน
-และวันที่ข้ามเส้นพวกนั้น คือวันเดียวที่ระบบเตือนภัยมีอยู่เพื่อสิ่งนั้น ผมจึงวัดโมเดลตรงนั้น</a:t>
+              <a:t>[4:00-4:50]  สไลด์สำคัญ อย่ารีบ
+นี่คือ C4 สิ่งที่ผมภูมิใจที่สุด เพราะเกือบพลาดไป
+C4 บอกว่าถ้าจะเทียบสองพื้นที่ ต้องพิสูจน์ก่อนว่ามันคืนข้อมูลต่างกันจริง
+เวอร์ชันแรกของผมเทียบพิกัดที่ API คืนกลับมา หกจุด หกพิกัดต่างกัน มันผ่าน
+แล้วผมมาดูตัวเลขจริง เมืองกับหางดง ห่างกันสิบสองกิโลเมตร
+คืนค่า PM2.5 เหมือนกันทุกตัวเลข ตลอดหนึ่งร้อยหกสิบแปดชั่วโมง ผลต่างสูงสุดเป็นศูนย์
+ทั้งที่ API รายงานพิกัดคนละค่าให้สองจุดนั้น
+เหตุผลคือ Open-Meteo รายงานบนกริดศูนย์จุดหนึ่งองศา แต่ CAMS ละเอียดแค่ศูนย์จุดสี่องศา
+ราวสี่สิบห้ากิโลเมตร สองคำขอจึงมาจากกริดหยาบเดียวกันได้ แล้วยังรายงานพิกัดต่างกัน
+มีแต่การเทียบค่าเท่านั้นที่จับได้
+ผมเลยเขียน check ใหม่ให้เทียบชุดข้อมูลจริง ตัดการวิเคราะห์ระดับอำเภอทิ้ง
+แล้วจำกัดการเทียบเชิงพื้นที่ไว้ที่สี่จังหวัดที่ตรวจแล้วว่าต่างกันจริง</a:t>
             </a:r>
             <a:endParaRPr lang="en-US" dirty="0"/>
           </a:p>
@@ -1798,26 +1906,22 @@
           <a:p>
             <a:r>
               <a:rPr lang="en-US" dirty="0"/>
-              <a:t>[5:35-6:20]
-การเปรียบเทียบ บนชุดทดสอบสี่ร้อยห้าสิบสี่วันที่โมเดลไม่เคยเห็น แบ่งด้วยเวลาไม่ใช่สุ่ม
-และในโค้ด baseline ถูกให้คะแนนก่อนบรรทัดที่เทรนโมเดล เพื่อไม่ให้ผมมีโอกาสเลือก baseline ที่ทำให้ตัวเองชนะ
-คอลัมน์แรก gradient boosting ได้สามจุดเก้าห้า เทียบกับ baseline สี่จุดหนึ่งสอง ชนะสี่เปอร์เซ็นต์
-ฟังดูดี แต่ผมไม่เอามาเคลม เพราะชนะได้แค่ศูนย์จุดหนึ่งเจ็ด
-ในขณะที่ผมวัด bias ของข้อมูลตัวเองไว้ที่ห้าจุดสามแปด ชัยชนะเล็กกว่าความผิดพลาดของข้อมูลสามสิบเท่า
-มันอยู่ในระดับ noise
-คอลัมน์สุดท้าย วันที่อากาศเปลี่ยน baseline พลาดสิบสี่จุดหนึ่ง ridge พลาดสิบเอ็ดจุดแปด
-ลดลงสิบหกเปอร์เซ็นต์ ชนะสองจุดสองเก้า ซึ่งอยู่ในระดับเดียวกับ bias แล้ว พอมีน้ำหนัก
-และที่สำคัญคือทั้งสองโมเดลชนะในคอลัมน์นี้ ไม่ใช่ตัวเดียว
-ถ้าตัวเดียวอาจเป็นความบังเอิญ แต่สองวิธีที่ทำงานคนละแบบชนะเหมือนกัน แปลว่ามีอะไรจริงอยู่
-สังเกตด้วยว่า ridge แพ้ baseline ในคอลัมน์แรก แต่ชนะขาดที่สุดในคอลัมน์สุดท้าย
-ถ้าดูแค่ค่าเฉลี่ยรวม ridge คือตัวที่ควรทิ้ง แต่พอดูเกณฑ์ที่ตรงกับการใช้งานจริง มันคือตัวที่ดีที่สุด
-สรุปคือ persistence ไม่มีใครชนะได้บนวันเงียบๆ ที่ครองค่าเฉลี่ยอยู่
-โมเดลผมพิสูจน์ตัวเองได้เฉพาะบนวันที่ข้ามเกณฑ์ นั่นแคบกว่าคำว่าโมเดลผมดีกว่า
-และเป็นสิ่งที่หลักฐานรองรับ
-และนี่คือจุดที่เปลี่ยนทิศทางของงาน ถ้าโมเดลมีค่าเฉพาะวันที่อากาศเปลี่ยน
-สิ่งที่ควรเผยแพร่ก็ไม่ใช่ตัวเลขของพรุ่งนี้ เพราะตัวเลขนั้นเดาเองก็เกือบได้แล้ว
-สิ่งที่ควรเผยแพร่คือคำเตือนว่าพรุ่งนี้กำลังจะเปลี่ยน
-ซึ่งเป็นคนละคำถาม และเป็นคำถามที่สไลด์ถัดไปตอบ รวมถึงเป็นสิ่งที่ข้อเสนอข้อแรกขอให้จังหวัดทำ</a:t>
+              <a:t>[4:50-5:25]
+ทีนี้มาที่โมเดล คำถามแรกคือ ต้องมีโมเดลไหม
+เพราะมีวิธีเดาที่ง่ายที่สุดอยู่แล้ว คือทายว่าพรุ่งนี้เท่ากับวันนี้ ไม่ต้องเทรน ไม่ต้องใช้อะไรเลย
+และมันแข็งแรงมาก เพราะค่าวันนี้กับค่าเมื่อวานสัมพันธ์กันที่ศูนย์จุดแปดเก้าสี่
+ยกกำลังสองได้ศูนย์จุดแปด แปลว่าเมื่อวานอย่างเดียวอธิบายวันนี้ได้แปดสิบเปอร์เซ็นต์
+เหลือช่องให้โมเดลแค่ยี่สิบเปอร์เซ็นต์ นั่นคือแผงซ้าย
+แต่พอผมถามต่อว่า มันพลาดเท่ากันทุกวันจริงหรือ คำตอบคือไม่
+ผมเลยแบ่งวันเป็นสองกอง กองแรกคือวันที่เมื่อวานกับวันนี้อยู่ฝั่งเดียวกันของเส้นสามสิบเจ็ดจุดห้า
+กองที่สองคือวันที่ข้ามเส้น
+กองแรกมีเก้าสิบสี่จุดห้าเปอร์เซ็นต์ พลาดแค่สามจุดห้าเก้า
+กองที่สองมีห้าจุดห้าเปอร์เซ็นต์ พลาดถึงสิบจุดหกศูนย์ แย่กว่าเกือบสามเท่า
+ค่าเฉลี่ยรวมออกมาสามจุดเก้าแปด เพราะวันเงียบครองสัดส่วนเกือบทั้งหมด มันกลบส่วนที่สำคัญที่สุดไว้
+และความต่างนี้ไม่ใช่แค่ตัวเลข พลาดสามจุดห้าเก้าคือทายสี่สิบสี่แล้วจริงสี่สิบเจ็ด คำตอบยังเกินมาตรฐานเหมือนเดิม
+แต่พลาดสิบจุดหกคือทายสามสิบเอ็ดแล้วจริงห้าสิบสอง คำตอบพลิกจากปลอดภัยเป็นอันตราย
+อันแรกทำให้ตัวเลขเพี้ยน อันหลังทำให้การตัดสินใจเพี้ยน
+และวันที่ข้ามเส้นพวกนั้น คือวันเดียวที่ระบบเตือนภัยมีอยู่เพื่อสิ่งนั้น ผมจึงวัดโมเดลตรงนั้น</a:t>
             </a:r>
             <a:endParaRPr lang="en-US" dirty="0"/>
           </a:p>
@@ -2411,6 +2515,1683 @@
                 <a:ea typeface="Sarabun" pitchFamily="34" charset="-122"/>
                 <a:cs typeface="Sarabun" pitchFamily="34" charset="-120"/>
               </a:rPr>
+              <a:t>MACHINE LEARNING  ·  2 OF 3</a:t>
+            </a:r>
+            <a:endParaRPr lang="en-US" sz="1050" dirty="0"/>
+          </a:p>
+        </p:txBody>
+      </p:sp>
+      <p:sp>
+        <p:nvSpPr>
+          <p:cNvPr id="3" name="Text 1"/>
+          <p:cNvSpPr txBox="1"/>
+          <p:nvPr/>
+        </p:nvSpPr>
+        <p:spPr>
+          <a:xfrm>
+            <a:off x="502920" y="493776"/>
+            <a:ext cx="8138160" cy="512064"/>
+          </a:xfrm>
+          <a:prstGeom prst="rect">
+            <a:avLst/>
+          </a:prstGeom>
+          <a:noFill/>
+          <a:ln/>
+        </p:spPr>
+        <p:txBody>
+          <a:bodyPr wrap="square" lIns="0" tIns="0" rIns="0" bIns="0" rtlCol="0" anchor="t"/>
+          <a:lstStyle/>
+          <a:p>
+            <a:pPr indent="0" marL="0">
+              <a:buNone/>
+            </a:pPr>
+            <a:r>
+              <a:rPr lang="en-US" sz="2500" b="1" dirty="0">
+                <a:solidFill>
+                  <a:srgbClr val="2C231C"/>
+                </a:solidFill>
+                <a:latin typeface="Sarabun" pitchFamily="34" charset="0"/>
+                <a:ea typeface="Sarabun" pitchFamily="34" charset="-122"/>
+                <a:cs typeface="Sarabun" pitchFamily="34" charset="-120"/>
+              </a:rPr>
+              <a:t>My model loses on average, and that is the finding</a:t>
+            </a:r>
+            <a:endParaRPr lang="en-US" sz="2500" dirty="0"/>
+          </a:p>
+        </p:txBody>
+      </p:sp>
+      <p:sp>
+        <p:nvSpPr>
+          <p:cNvPr id="4" name="Text 2"/>
+          <p:cNvSpPr txBox="1"/>
+          <p:nvPr/>
+        </p:nvSpPr>
+        <p:spPr>
+          <a:xfrm>
+            <a:off x="502920" y="1060704"/>
+            <a:ext cx="8138160" cy="310896"/>
+          </a:xfrm>
+          <a:prstGeom prst="rect">
+            <a:avLst/>
+          </a:prstGeom>
+          <a:noFill/>
+          <a:ln/>
+        </p:spPr>
+        <p:txBody>
+          <a:bodyPr wrap="square" lIns="0" tIns="0" rIns="0" bIns="0" rtlCol="0" anchor="t"/>
+          <a:lstStyle/>
+          <a:p>
+            <a:pPr indent="0" marL="0">
+              <a:buNone/>
+            </a:pPr>
+            <a:r>
+              <a:rPr lang="en-US" sz="1350" b="1" dirty="0">
+                <a:solidFill>
+                  <a:srgbClr val="2C231C"/>
+                </a:solidFill>
+                <a:latin typeface="Sarabun" pitchFamily="34" charset="0"/>
+                <a:ea typeface="Sarabun" pitchFamily="34" charset="-122"/>
+                <a:cs typeface="Sarabun" pitchFamily="34" charset="-120"/>
+              </a:rPr>
+              <a:t>The numbers are the average size of the miss, in µg/m³. Lower is better. Read the last column.</a:t>
+            </a:r>
+            <a:endParaRPr lang="en-US" sz="1350" dirty="0"/>
+          </a:p>
+        </p:txBody>
+      </p:sp>
+      <p:graphicFrame>
+        <p:nvGraphicFramePr>
+          <p:cNvPr id="11" name="Table 0"/>
+          <p:cNvGraphicFramePr>
+            <a:graphicFrameLocks noGrp="1"/>
+          </p:cNvGraphicFramePr>
+          <p:nvPr>
+            <p:extLst>
+              <p:ext uri="{D42A27DB-BD31-4B8C-83A1-F6EECF244321}">
+                <p14:modId xmlns:p14="http://schemas.microsoft.com/office/powerpoint/2010/main" val="1579011935"/>
+              </p:ext>
+            </p:extLst>
+          </p:nvPr>
+        </p:nvGraphicFramePr>
+        <p:xfrm>
+          <a:off x="502920" y="1536192"/>
+          <a:ext cx="8138160" cy="914400"/>
+        </p:xfrm>
+        <a:graphic>
+          <a:graphicData uri="http://schemas.openxmlformats.org/drawingml/2006/table">
+            <a:tbl>
+              <a:tblPr/>
+              <a:tblGrid>
+                <a:gridCol w="3017520"/>
+                <a:gridCol w="1554480"/>
+                <a:gridCol w="1737360"/>
+                <a:gridCol w="1828800"/>
+              </a:tblGrid>
+              <a:tr h="402336">
+                <a:tc>
+                  <a:txBody>
+                    <a:bodyPr/>
+                    <a:lstStyle/>
+                    <a:p>
+                      <a:pPr algn="l" indent="0" marL="0">
+                        <a:buNone/>
+                      </a:pPr>
+                      <a:endParaRPr lang="en-US" sz="1250" dirty="0">
+                        <a:latin typeface="Sarabun" charset="0"/>
+                        <a:ea typeface="Sarabun" charset="0"/>
+                        <a:cs typeface="Sarabun" charset="0"/>
+                      </a:endParaRPr>
+                    </a:p>
+                  </a:txBody>
+                  <a:tcPr marL="101600" marR="101600" marT="50800" marB="50800" anchor="ctr">
+                    <a:lnL w="12700" cap="flat" cmpd="sng" algn="ctr">
+                      <a:solidFill>
+                        <a:srgbClr val="E3D8C8"/>
+                      </a:solidFill>
+                      <a:prstDash val="solid"/>
+                      <a:round/>
+                      <a:headEnd type="none" w="med" len="med"/>
+                      <a:tailEnd type="none" w="med" len="med"/>
+                    </a:lnL>
+                    <a:lnR w="12700" cap="flat" cmpd="sng" algn="ctr">
+                      <a:solidFill>
+                        <a:srgbClr val="E3D8C8"/>
+                      </a:solidFill>
+                      <a:prstDash val="solid"/>
+                      <a:round/>
+                      <a:headEnd type="none" w="med" len="med"/>
+                      <a:tailEnd type="none" w="med" len="med"/>
+                    </a:lnR>
+                    <a:lnT w="12700" cap="flat" cmpd="sng" algn="ctr">
+                      <a:solidFill>
+                        <a:srgbClr val="E3D8C8"/>
+                      </a:solidFill>
+                      <a:prstDash val="solid"/>
+                      <a:round/>
+                      <a:headEnd type="none" w="med" len="med"/>
+                      <a:tailEnd type="none" w="med" len="med"/>
+                    </a:lnT>
+                    <a:lnB w="12700" cap="flat" cmpd="sng" algn="ctr">
+                      <a:solidFill>
+                        <a:srgbClr val="E3D8C8"/>
+                      </a:solidFill>
+                      <a:prstDash val="solid"/>
+                      <a:round/>
+                      <a:headEnd type="none" w="med" len="med"/>
+                      <a:tailEnd type="none" w="med" len="med"/>
+                    </a:lnB>
+                    <a:solidFill>
+                      <a:srgbClr val="F5EDE1"/>
+                    </a:solidFill>
+                  </a:tcPr>
+                </a:tc>
+                <a:tc>
+                  <a:txBody>
+                    <a:bodyPr/>
+                    <a:lstStyle/>
+                    <a:p>
+                      <a:pPr algn="r" indent="0" marL="0">
+                        <a:buNone/>
+                      </a:pPr>
+                      <a:r>
+                        <a:rPr lang="en-US" sz="1250" b="1" dirty="0">
+                          <a:solidFill>
+                            <a:srgbClr val="7C6B5B"/>
+                          </a:solidFill>
+                          <a:latin typeface="Sarabun" pitchFamily="34" charset="0"/>
+                          <a:ea typeface="Sarabun" pitchFamily="34" charset="-122"/>
+                          <a:cs typeface="Sarabun" pitchFamily="34" charset="-120"/>
+                        </a:rPr>
+                        <a:t>Ordinary days</a:t>
+                      </a:r>
+                      <a:endParaRPr lang="en-US" sz="1250" dirty="0">
+                        <a:latin typeface="Sarabun" charset="0"/>
+                        <a:ea typeface="Sarabun" charset="0"/>
+                        <a:cs typeface="Sarabun" charset="0"/>
+                      </a:endParaRPr>
+                    </a:p>
+                  </a:txBody>
+                  <a:tcPr marL="101600" marR="101600" marT="50800" marB="50800" anchor="ctr">
+                    <a:lnL w="12700" cap="flat" cmpd="sng" algn="ctr">
+                      <a:solidFill>
+                        <a:srgbClr val="E3D8C8"/>
+                      </a:solidFill>
+                      <a:prstDash val="solid"/>
+                      <a:round/>
+                      <a:headEnd type="none" w="med" len="med"/>
+                      <a:tailEnd type="none" w="med" len="med"/>
+                    </a:lnL>
+                    <a:lnR w="12700" cap="flat" cmpd="sng" algn="ctr">
+                      <a:solidFill>
+                        <a:srgbClr val="E3D8C8"/>
+                      </a:solidFill>
+                      <a:prstDash val="solid"/>
+                      <a:round/>
+                      <a:headEnd type="none" w="med" len="med"/>
+                      <a:tailEnd type="none" w="med" len="med"/>
+                    </a:lnR>
+                    <a:lnT w="12700" cap="flat" cmpd="sng" algn="ctr">
+                      <a:solidFill>
+                        <a:srgbClr val="E3D8C8"/>
+                      </a:solidFill>
+                      <a:prstDash val="solid"/>
+                      <a:round/>
+                      <a:headEnd type="none" w="med" len="med"/>
+                      <a:tailEnd type="none" w="med" len="med"/>
+                    </a:lnT>
+                    <a:lnB w="12700" cap="flat" cmpd="sng" algn="ctr">
+                      <a:solidFill>
+                        <a:srgbClr val="E3D8C8"/>
+                      </a:solidFill>
+                      <a:prstDash val="solid"/>
+                      <a:round/>
+                      <a:headEnd type="none" w="med" len="med"/>
+                      <a:tailEnd type="none" w="med" len="med"/>
+                    </a:lnB>
+                    <a:solidFill>
+                      <a:srgbClr val="F5EDE1"/>
+                    </a:solidFill>
+                  </a:tcPr>
+                </a:tc>
+                <a:tc>
+                  <a:txBody>
+                    <a:bodyPr/>
+                    <a:lstStyle/>
+                    <a:p>
+                      <a:pPr algn="r" indent="0" marL="0">
+                        <a:buNone/>
+                      </a:pPr>
+                      <a:r>
+                        <a:rPr lang="en-US" sz="1250" b="1" dirty="0">
+                          <a:solidFill>
+                            <a:srgbClr val="7C6B5B"/>
+                          </a:solidFill>
+                          <a:latin typeface="Sarabun" pitchFamily="34" charset="0"/>
+                          <a:ea typeface="Sarabun" pitchFamily="34" charset="-122"/>
+                          <a:cs typeface="Sarabun" pitchFamily="34" charset="-120"/>
+                        </a:rPr>
+                        <a:t>Burning season</a:t>
+                      </a:r>
+                      <a:endParaRPr lang="en-US" sz="1250" dirty="0">
+                        <a:latin typeface="Sarabun" charset="0"/>
+                        <a:ea typeface="Sarabun" charset="0"/>
+                        <a:cs typeface="Sarabun" charset="0"/>
+                      </a:endParaRPr>
+                    </a:p>
+                  </a:txBody>
+                  <a:tcPr marL="101600" marR="101600" marT="50800" marB="50800" anchor="ctr">
+                    <a:lnL w="12700" cap="flat" cmpd="sng" algn="ctr">
+                      <a:solidFill>
+                        <a:srgbClr val="E3D8C8"/>
+                      </a:solidFill>
+                      <a:prstDash val="solid"/>
+                      <a:round/>
+                      <a:headEnd type="none" w="med" len="med"/>
+                      <a:tailEnd type="none" w="med" len="med"/>
+                    </a:lnL>
+                    <a:lnR w="12700" cap="flat" cmpd="sng" algn="ctr">
+                      <a:solidFill>
+                        <a:srgbClr val="E3D8C8"/>
+                      </a:solidFill>
+                      <a:prstDash val="solid"/>
+                      <a:round/>
+                      <a:headEnd type="none" w="med" len="med"/>
+                      <a:tailEnd type="none" w="med" len="med"/>
+                    </a:lnR>
+                    <a:lnT w="12700" cap="flat" cmpd="sng" algn="ctr">
+                      <a:solidFill>
+                        <a:srgbClr val="E3D8C8"/>
+                      </a:solidFill>
+                      <a:prstDash val="solid"/>
+                      <a:round/>
+                      <a:headEnd type="none" w="med" len="med"/>
+                      <a:tailEnd type="none" w="med" len="med"/>
+                    </a:lnT>
+                    <a:lnB w="12700" cap="flat" cmpd="sng" algn="ctr">
+                      <a:solidFill>
+                        <a:srgbClr val="E3D8C8"/>
+                      </a:solidFill>
+                      <a:prstDash val="solid"/>
+                      <a:round/>
+                      <a:headEnd type="none" w="med" len="med"/>
+                      <a:tailEnd type="none" w="med" len="med"/>
+                    </a:lnB>
+                    <a:solidFill>
+                      <a:srgbClr val="F5EDE1"/>
+                    </a:solidFill>
+                  </a:tcPr>
+                </a:tc>
+                <a:tc>
+                  <a:txBody>
+                    <a:bodyPr/>
+                    <a:lstStyle/>
+                    <a:p>
+                      <a:pPr algn="r" indent="0" marL="0">
+                        <a:buNone/>
+                      </a:pPr>
+                      <a:r>
+                        <a:rPr lang="en-US" sz="1250" b="1" dirty="0">
+                          <a:solidFill>
+                            <a:srgbClr val="7C6B5B"/>
+                          </a:solidFill>
+                          <a:latin typeface="Sarabun" pitchFamily="34" charset="0"/>
+                          <a:ea typeface="Sarabun" pitchFamily="34" charset="-122"/>
+                          <a:cs typeface="Sarabun" pitchFamily="34" charset="-120"/>
+                        </a:rPr>
+                        <a:t>Days the air changes</a:t>
+                      </a:r>
+                      <a:endParaRPr lang="en-US" sz="1250" dirty="0">
+                        <a:latin typeface="Sarabun" charset="0"/>
+                        <a:ea typeface="Sarabun" charset="0"/>
+                        <a:cs typeface="Sarabun" charset="0"/>
+                      </a:endParaRPr>
+                    </a:p>
+                  </a:txBody>
+                  <a:tcPr marL="101600" marR="101600" marT="50800" marB="50800" anchor="ctr">
+                    <a:lnL w="12700" cap="flat" cmpd="sng" algn="ctr">
+                      <a:solidFill>
+                        <a:srgbClr val="E3D8C8"/>
+                      </a:solidFill>
+                      <a:prstDash val="solid"/>
+                      <a:round/>
+                      <a:headEnd type="none" w="med" len="med"/>
+                      <a:tailEnd type="none" w="med" len="med"/>
+                    </a:lnL>
+                    <a:lnR w="12700" cap="flat" cmpd="sng" algn="ctr">
+                      <a:solidFill>
+                        <a:srgbClr val="E3D8C8"/>
+                      </a:solidFill>
+                      <a:prstDash val="solid"/>
+                      <a:round/>
+                      <a:headEnd type="none" w="med" len="med"/>
+                      <a:tailEnd type="none" w="med" len="med"/>
+                    </a:lnR>
+                    <a:lnT w="12700" cap="flat" cmpd="sng" algn="ctr">
+                      <a:solidFill>
+                        <a:srgbClr val="E3D8C8"/>
+                      </a:solidFill>
+                      <a:prstDash val="solid"/>
+                      <a:round/>
+                      <a:headEnd type="none" w="med" len="med"/>
+                      <a:tailEnd type="none" w="med" len="med"/>
+                    </a:lnT>
+                    <a:lnB w="12700" cap="flat" cmpd="sng" algn="ctr">
+                      <a:solidFill>
+                        <a:srgbClr val="E3D8C8"/>
+                      </a:solidFill>
+                      <a:prstDash val="solid"/>
+                      <a:round/>
+                      <a:headEnd type="none" w="med" len="med"/>
+                      <a:tailEnd type="none" w="med" len="med"/>
+                    </a:lnB>
+                    <a:solidFill>
+                      <a:srgbClr val="F5EDE1"/>
+                    </a:solidFill>
+                  </a:tcPr>
+                </a:tc>
+              </a:tr>
+              <a:tr h="402336">
+                <a:tc>
+                  <a:txBody>
+                    <a:bodyPr/>
+                    <a:lstStyle/>
+                    <a:p>
+                      <a:pPr algn="l" indent="0" marL="0">
+                        <a:buNone/>
+                      </a:pPr>
+                      <a:r>
+                        <a:rPr lang="en-US" sz="1250" b="1" dirty="0">
+                          <a:solidFill>
+                            <a:srgbClr val="2C231C"/>
+                          </a:solidFill>
+                          <a:latin typeface="Sarabun" pitchFamily="34" charset="0"/>
+                          <a:ea typeface="Sarabun" pitchFamily="34" charset="-122"/>
+                          <a:cs typeface="Sarabun" pitchFamily="34" charset="-120"/>
+                        </a:rPr>
+                        <a:t>Guessing "tomorrow = today"</a:t>
+                      </a:r>
+                      <a:endParaRPr lang="en-US" sz="1250" dirty="0">
+                        <a:latin typeface="Sarabun" charset="0"/>
+                        <a:ea typeface="Sarabun" charset="0"/>
+                        <a:cs typeface="Sarabun" charset="0"/>
+                      </a:endParaRPr>
+                    </a:p>
+                  </a:txBody>
+                  <a:tcPr marL="101600" marR="101600" marT="50800" marB="50800" anchor="ctr">
+                    <a:lnL w="12700" cap="flat" cmpd="sng" algn="ctr">
+                      <a:solidFill>
+                        <a:srgbClr val="E3D8C8"/>
+                      </a:solidFill>
+                      <a:prstDash val="solid"/>
+                      <a:round/>
+                      <a:headEnd type="none" w="med" len="med"/>
+                      <a:tailEnd type="none" w="med" len="med"/>
+                    </a:lnL>
+                    <a:lnR w="12700" cap="flat" cmpd="sng" algn="ctr">
+                      <a:solidFill>
+                        <a:srgbClr val="E3D8C8"/>
+                      </a:solidFill>
+                      <a:prstDash val="solid"/>
+                      <a:round/>
+                      <a:headEnd type="none" w="med" len="med"/>
+                      <a:tailEnd type="none" w="med" len="med"/>
+                    </a:lnR>
+                    <a:lnT w="12700" cap="flat" cmpd="sng" algn="ctr">
+                      <a:solidFill>
+                        <a:srgbClr val="E3D8C8"/>
+                      </a:solidFill>
+                      <a:prstDash val="solid"/>
+                      <a:round/>
+                      <a:headEnd type="none" w="med" len="med"/>
+                      <a:tailEnd type="none" w="med" len="med"/>
+                    </a:lnT>
+                    <a:lnB w="12700" cap="flat" cmpd="sng" algn="ctr">
+                      <a:solidFill>
+                        <a:srgbClr val="E3D8C8"/>
+                      </a:solidFill>
+                      <a:prstDash val="solid"/>
+                      <a:round/>
+                      <a:headEnd type="none" w="med" len="med"/>
+                      <a:tailEnd type="none" w="med" len="med"/>
+                    </a:lnB>
+                    <a:solidFill>
+                      <a:srgbClr val="FFFDFA"/>
+                    </a:solidFill>
+                  </a:tcPr>
+                </a:tc>
+                <a:tc>
+                  <a:txBody>
+                    <a:bodyPr/>
+                    <a:lstStyle/>
+                    <a:p>
+                      <a:pPr algn="r" indent="0" marL="0">
+                        <a:buNone/>
+                      </a:pPr>
+                      <a:r>
+                        <a:rPr lang="en-US" sz="1250" dirty="0">
+                          <a:solidFill>
+                            <a:srgbClr val="2C231C"/>
+                          </a:solidFill>
+                          <a:latin typeface="Sarabun" pitchFamily="34" charset="0"/>
+                          <a:ea typeface="Sarabun" pitchFamily="34" charset="-122"/>
+                          <a:cs typeface="Sarabun" pitchFamily="34" charset="-120"/>
+                        </a:rPr>
+                        <a:t>4.118</a:t>
+                      </a:r>
+                      <a:endParaRPr lang="en-US" sz="1250" dirty="0">
+                        <a:latin typeface="Sarabun" charset="0"/>
+                        <a:ea typeface="Sarabun" charset="0"/>
+                        <a:cs typeface="Sarabun" charset="0"/>
+                      </a:endParaRPr>
+                    </a:p>
+                  </a:txBody>
+                  <a:tcPr marL="101600" marR="101600" marT="50800" marB="50800" anchor="ctr">
+                    <a:lnL w="12700" cap="flat" cmpd="sng" algn="ctr">
+                      <a:solidFill>
+                        <a:srgbClr val="E3D8C8"/>
+                      </a:solidFill>
+                      <a:prstDash val="solid"/>
+                      <a:round/>
+                      <a:headEnd type="none" w="med" len="med"/>
+                      <a:tailEnd type="none" w="med" len="med"/>
+                    </a:lnL>
+                    <a:lnR w="12700" cap="flat" cmpd="sng" algn="ctr">
+                      <a:solidFill>
+                        <a:srgbClr val="E3D8C8"/>
+                      </a:solidFill>
+                      <a:prstDash val="solid"/>
+                      <a:round/>
+                      <a:headEnd type="none" w="med" len="med"/>
+                      <a:tailEnd type="none" w="med" len="med"/>
+                    </a:lnR>
+                    <a:lnT w="12700" cap="flat" cmpd="sng" algn="ctr">
+                      <a:solidFill>
+                        <a:srgbClr val="E3D8C8"/>
+                      </a:solidFill>
+                      <a:prstDash val="solid"/>
+                      <a:round/>
+                      <a:headEnd type="none" w="med" len="med"/>
+                      <a:tailEnd type="none" w="med" len="med"/>
+                    </a:lnT>
+                    <a:lnB w="12700" cap="flat" cmpd="sng" algn="ctr">
+                      <a:solidFill>
+                        <a:srgbClr val="E3D8C8"/>
+                      </a:solidFill>
+                      <a:prstDash val="solid"/>
+                      <a:round/>
+                      <a:headEnd type="none" w="med" len="med"/>
+                      <a:tailEnd type="none" w="med" len="med"/>
+                    </a:lnB>
+                    <a:solidFill>
+                      <a:srgbClr val="FFFDFA"/>
+                    </a:solidFill>
+                  </a:tcPr>
+                </a:tc>
+                <a:tc>
+                  <a:txBody>
+                    <a:bodyPr/>
+                    <a:lstStyle/>
+                    <a:p>
+                      <a:pPr algn="r" indent="0" marL="0">
+                        <a:buNone/>
+                      </a:pPr>
+                      <a:r>
+                        <a:rPr lang="en-US" sz="1250" dirty="0">
+                          <a:solidFill>
+                            <a:srgbClr val="2C231C"/>
+                          </a:solidFill>
+                          <a:latin typeface="Sarabun" pitchFamily="34" charset="0"/>
+                          <a:ea typeface="Sarabun" pitchFamily="34" charset="-122"/>
+                          <a:cs typeface="Sarabun" pitchFamily="34" charset="-120"/>
+                        </a:rPr>
+                        <a:t>6.846</a:t>
+                      </a:r>
+                      <a:endParaRPr lang="en-US" sz="1250" dirty="0">
+                        <a:latin typeface="Sarabun" charset="0"/>
+                        <a:ea typeface="Sarabun" charset="0"/>
+                        <a:cs typeface="Sarabun" charset="0"/>
+                      </a:endParaRPr>
+                    </a:p>
+                  </a:txBody>
+                  <a:tcPr marL="101600" marR="101600" marT="50800" marB="50800" anchor="ctr">
+                    <a:lnL w="12700" cap="flat" cmpd="sng" algn="ctr">
+                      <a:solidFill>
+                        <a:srgbClr val="E3D8C8"/>
+                      </a:solidFill>
+                      <a:prstDash val="solid"/>
+                      <a:round/>
+                      <a:headEnd type="none" w="med" len="med"/>
+                      <a:tailEnd type="none" w="med" len="med"/>
+                    </a:lnL>
+                    <a:lnR w="12700" cap="flat" cmpd="sng" algn="ctr">
+                      <a:solidFill>
+                        <a:srgbClr val="E3D8C8"/>
+                      </a:solidFill>
+                      <a:prstDash val="solid"/>
+                      <a:round/>
+                      <a:headEnd type="none" w="med" len="med"/>
+                      <a:tailEnd type="none" w="med" len="med"/>
+                    </a:lnR>
+                    <a:lnT w="12700" cap="flat" cmpd="sng" algn="ctr">
+                      <a:solidFill>
+                        <a:srgbClr val="E3D8C8"/>
+                      </a:solidFill>
+                      <a:prstDash val="solid"/>
+                      <a:round/>
+                      <a:headEnd type="none" w="med" len="med"/>
+                      <a:tailEnd type="none" w="med" len="med"/>
+                    </a:lnT>
+                    <a:lnB w="12700" cap="flat" cmpd="sng" algn="ctr">
+                      <a:solidFill>
+                        <a:srgbClr val="E3D8C8"/>
+                      </a:solidFill>
+                      <a:prstDash val="solid"/>
+                      <a:round/>
+                      <a:headEnd type="none" w="med" len="med"/>
+                      <a:tailEnd type="none" w="med" len="med"/>
+                    </a:lnB>
+                    <a:solidFill>
+                      <a:srgbClr val="FFFDFA"/>
+                    </a:solidFill>
+                  </a:tcPr>
+                </a:tc>
+                <a:tc>
+                  <a:txBody>
+                    <a:bodyPr/>
+                    <a:lstStyle/>
+                    <a:p>
+                      <a:pPr algn="r" indent="0" marL="0">
+                        <a:buNone/>
+                      </a:pPr>
+                      <a:r>
+                        <a:rPr lang="en-US" sz="1250" dirty="0">
+                          <a:solidFill>
+                            <a:srgbClr val="BF5722"/>
+                          </a:solidFill>
+                          <a:latin typeface="Sarabun" pitchFamily="34" charset="0"/>
+                          <a:ea typeface="Sarabun" pitchFamily="34" charset="-122"/>
+                          <a:cs typeface="Sarabun" pitchFamily="34" charset="-120"/>
+                        </a:rPr>
+                        <a:t>14.079</a:t>
+                      </a:r>
+                      <a:endParaRPr lang="en-US" sz="1250" dirty="0">
+                        <a:latin typeface="Sarabun" charset="0"/>
+                        <a:ea typeface="Sarabun" charset="0"/>
+                        <a:cs typeface="Sarabun" charset="0"/>
+                      </a:endParaRPr>
+                    </a:p>
+                  </a:txBody>
+                  <a:tcPr marL="101600" marR="101600" marT="50800" marB="50800" anchor="ctr">
+                    <a:lnL w="12700" cap="flat" cmpd="sng" algn="ctr">
+                      <a:solidFill>
+                        <a:srgbClr val="E3D8C8"/>
+                      </a:solidFill>
+                      <a:prstDash val="solid"/>
+                      <a:round/>
+                      <a:headEnd type="none" w="med" len="med"/>
+                      <a:tailEnd type="none" w="med" len="med"/>
+                    </a:lnL>
+                    <a:lnR w="12700" cap="flat" cmpd="sng" algn="ctr">
+                      <a:solidFill>
+                        <a:srgbClr val="E3D8C8"/>
+                      </a:solidFill>
+                      <a:prstDash val="solid"/>
+                      <a:round/>
+                      <a:headEnd type="none" w="med" len="med"/>
+                      <a:tailEnd type="none" w="med" len="med"/>
+                    </a:lnR>
+                    <a:lnT w="12700" cap="flat" cmpd="sng" algn="ctr">
+                      <a:solidFill>
+                        <a:srgbClr val="E3D8C8"/>
+                      </a:solidFill>
+                      <a:prstDash val="solid"/>
+                      <a:round/>
+                      <a:headEnd type="none" w="med" len="med"/>
+                      <a:tailEnd type="none" w="med" len="med"/>
+                    </a:lnT>
+                    <a:lnB w="12700" cap="flat" cmpd="sng" algn="ctr">
+                      <a:solidFill>
+                        <a:srgbClr val="E3D8C8"/>
+                      </a:solidFill>
+                      <a:prstDash val="solid"/>
+                      <a:round/>
+                      <a:headEnd type="none" w="med" len="med"/>
+                      <a:tailEnd type="none" w="med" len="med"/>
+                    </a:lnB>
+                    <a:solidFill>
+                      <a:srgbClr val="FFFDFA"/>
+                    </a:solidFill>
+                  </a:tcPr>
+                </a:tc>
+              </a:tr>
+              <a:tr h="402336">
+                <a:tc>
+                  <a:txBody>
+                    <a:bodyPr/>
+                    <a:lstStyle/>
+                    <a:p>
+                      <a:pPr algn="l" indent="0" marL="0">
+                        <a:buNone/>
+                      </a:pPr>
+                      <a:r>
+                        <a:rPr lang="en-US" sz="1250" b="1" dirty="0">
+                          <a:solidFill>
+                            <a:srgbClr val="2C231C"/>
+                          </a:solidFill>
+                          <a:latin typeface="Sarabun" pitchFamily="34" charset="0"/>
+                          <a:ea typeface="Sarabun" pitchFamily="34" charset="-122"/>
+                          <a:cs typeface="Sarabun" pitchFamily="34" charset="-120"/>
+                        </a:rPr>
+                        <a:t>Ridge regression</a:t>
+                      </a:r>
+                      <a:endParaRPr lang="en-US" sz="1250" dirty="0">
+                        <a:latin typeface="Sarabun" charset="0"/>
+                        <a:ea typeface="Sarabun" charset="0"/>
+                        <a:cs typeface="Sarabun" charset="0"/>
+                      </a:endParaRPr>
+                    </a:p>
+                  </a:txBody>
+                  <a:tcPr marL="101600" marR="101600" marT="50800" marB="50800" anchor="ctr">
+                    <a:lnL w="12700" cap="flat" cmpd="sng" algn="ctr">
+                      <a:solidFill>
+                        <a:srgbClr val="E3D8C8"/>
+                      </a:solidFill>
+                      <a:prstDash val="solid"/>
+                      <a:round/>
+                      <a:headEnd type="none" w="med" len="med"/>
+                      <a:tailEnd type="none" w="med" len="med"/>
+                    </a:lnL>
+                    <a:lnR w="12700" cap="flat" cmpd="sng" algn="ctr">
+                      <a:solidFill>
+                        <a:srgbClr val="E3D8C8"/>
+                      </a:solidFill>
+                      <a:prstDash val="solid"/>
+                      <a:round/>
+                      <a:headEnd type="none" w="med" len="med"/>
+                      <a:tailEnd type="none" w="med" len="med"/>
+                    </a:lnR>
+                    <a:lnT w="12700" cap="flat" cmpd="sng" algn="ctr">
+                      <a:solidFill>
+                        <a:srgbClr val="E3D8C8"/>
+                      </a:solidFill>
+                      <a:prstDash val="solid"/>
+                      <a:round/>
+                      <a:headEnd type="none" w="med" len="med"/>
+                      <a:tailEnd type="none" w="med" len="med"/>
+                    </a:lnT>
+                    <a:lnB w="12700" cap="flat" cmpd="sng" algn="ctr">
+                      <a:solidFill>
+                        <a:srgbClr val="E3D8C8"/>
+                      </a:solidFill>
+                      <a:prstDash val="solid"/>
+                      <a:round/>
+                      <a:headEnd type="none" w="med" len="med"/>
+                      <a:tailEnd type="none" w="med" len="med"/>
+                    </a:lnB>
+                    <a:solidFill>
+                      <a:srgbClr val="FFFDFA"/>
+                    </a:solidFill>
+                  </a:tcPr>
+                </a:tc>
+                <a:tc>
+                  <a:txBody>
+                    <a:bodyPr/>
+                    <a:lstStyle/>
+                    <a:p>
+                      <a:pPr algn="r" indent="0" marL="0">
+                        <a:buNone/>
+                      </a:pPr>
+                      <a:r>
+                        <a:rPr lang="en-US" sz="1250" dirty="0">
+                          <a:solidFill>
+                            <a:srgbClr val="2C231C"/>
+                          </a:solidFill>
+                          <a:latin typeface="Sarabun" pitchFamily="34" charset="0"/>
+                          <a:ea typeface="Sarabun" pitchFamily="34" charset="-122"/>
+                          <a:cs typeface="Sarabun" pitchFamily="34" charset="-120"/>
+                        </a:rPr>
+                        <a:t>4.303</a:t>
+                      </a:r>
+                      <a:endParaRPr lang="en-US" sz="1250" dirty="0">
+                        <a:latin typeface="Sarabun" charset="0"/>
+                        <a:ea typeface="Sarabun" charset="0"/>
+                        <a:cs typeface="Sarabun" charset="0"/>
+                      </a:endParaRPr>
+                    </a:p>
+                  </a:txBody>
+                  <a:tcPr marL="101600" marR="101600" marT="50800" marB="50800" anchor="ctr">
+                    <a:lnL w="12700" cap="flat" cmpd="sng" algn="ctr">
+                      <a:solidFill>
+                        <a:srgbClr val="E3D8C8"/>
+                      </a:solidFill>
+                      <a:prstDash val="solid"/>
+                      <a:round/>
+                      <a:headEnd type="none" w="med" len="med"/>
+                      <a:tailEnd type="none" w="med" len="med"/>
+                    </a:lnL>
+                    <a:lnR w="12700" cap="flat" cmpd="sng" algn="ctr">
+                      <a:solidFill>
+                        <a:srgbClr val="E3D8C8"/>
+                      </a:solidFill>
+                      <a:prstDash val="solid"/>
+                      <a:round/>
+                      <a:headEnd type="none" w="med" len="med"/>
+                      <a:tailEnd type="none" w="med" len="med"/>
+                    </a:lnR>
+                    <a:lnT w="12700" cap="flat" cmpd="sng" algn="ctr">
+                      <a:solidFill>
+                        <a:srgbClr val="E3D8C8"/>
+                      </a:solidFill>
+                      <a:prstDash val="solid"/>
+                      <a:round/>
+                      <a:headEnd type="none" w="med" len="med"/>
+                      <a:tailEnd type="none" w="med" len="med"/>
+                    </a:lnT>
+                    <a:lnB w="12700" cap="flat" cmpd="sng" algn="ctr">
+                      <a:solidFill>
+                        <a:srgbClr val="E3D8C8"/>
+                      </a:solidFill>
+                      <a:prstDash val="solid"/>
+                      <a:round/>
+                      <a:headEnd type="none" w="med" len="med"/>
+                      <a:tailEnd type="none" w="med" len="med"/>
+                    </a:lnB>
+                    <a:solidFill>
+                      <a:srgbClr val="FFFDFA"/>
+                    </a:solidFill>
+                  </a:tcPr>
+                </a:tc>
+                <a:tc>
+                  <a:txBody>
+                    <a:bodyPr/>
+                    <a:lstStyle/>
+                    <a:p>
+                      <a:pPr algn="r" indent="0" marL="0">
+                        <a:buNone/>
+                      </a:pPr>
+                      <a:r>
+                        <a:rPr lang="en-US" sz="1250" dirty="0">
+                          <a:solidFill>
+                            <a:srgbClr val="2C231C"/>
+                          </a:solidFill>
+                          <a:latin typeface="Sarabun" pitchFamily="34" charset="0"/>
+                          <a:ea typeface="Sarabun" pitchFamily="34" charset="-122"/>
+                          <a:cs typeface="Sarabun" pitchFamily="34" charset="-120"/>
+                        </a:rPr>
+                        <a:t>6.529</a:t>
+                      </a:r>
+                      <a:endParaRPr lang="en-US" sz="1250" dirty="0">
+                        <a:latin typeface="Sarabun" charset="0"/>
+                        <a:ea typeface="Sarabun" charset="0"/>
+                        <a:cs typeface="Sarabun" charset="0"/>
+                      </a:endParaRPr>
+                    </a:p>
+                  </a:txBody>
+                  <a:tcPr marL="101600" marR="101600" marT="50800" marB="50800" anchor="ctr">
+                    <a:lnL w="12700" cap="flat" cmpd="sng" algn="ctr">
+                      <a:solidFill>
+                        <a:srgbClr val="E3D8C8"/>
+                      </a:solidFill>
+                      <a:prstDash val="solid"/>
+                      <a:round/>
+                      <a:headEnd type="none" w="med" len="med"/>
+                      <a:tailEnd type="none" w="med" len="med"/>
+                    </a:lnL>
+                    <a:lnR w="12700" cap="flat" cmpd="sng" algn="ctr">
+                      <a:solidFill>
+                        <a:srgbClr val="E3D8C8"/>
+                      </a:solidFill>
+                      <a:prstDash val="solid"/>
+                      <a:round/>
+                      <a:headEnd type="none" w="med" len="med"/>
+                      <a:tailEnd type="none" w="med" len="med"/>
+                    </a:lnR>
+                    <a:lnT w="12700" cap="flat" cmpd="sng" algn="ctr">
+                      <a:solidFill>
+                        <a:srgbClr val="E3D8C8"/>
+                      </a:solidFill>
+                      <a:prstDash val="solid"/>
+                      <a:round/>
+                      <a:headEnd type="none" w="med" len="med"/>
+                      <a:tailEnd type="none" w="med" len="med"/>
+                    </a:lnT>
+                    <a:lnB w="12700" cap="flat" cmpd="sng" algn="ctr">
+                      <a:solidFill>
+                        <a:srgbClr val="E3D8C8"/>
+                      </a:solidFill>
+                      <a:prstDash val="solid"/>
+                      <a:round/>
+                      <a:headEnd type="none" w="med" len="med"/>
+                      <a:tailEnd type="none" w="med" len="med"/>
+                    </a:lnB>
+                    <a:solidFill>
+                      <a:srgbClr val="FFFDFA"/>
+                    </a:solidFill>
+                  </a:tcPr>
+                </a:tc>
+                <a:tc>
+                  <a:txBody>
+                    <a:bodyPr/>
+                    <a:lstStyle/>
+                    <a:p>
+                      <a:pPr algn="r" indent="0" marL="0">
+                        <a:buNone/>
+                      </a:pPr>
+                      <a:r>
+                        <a:rPr lang="en-US" sz="1250" dirty="0">
+                          <a:solidFill>
+                            <a:srgbClr val="BF5722"/>
+                          </a:solidFill>
+                          <a:latin typeface="Sarabun" pitchFamily="34" charset="0"/>
+                          <a:ea typeface="Sarabun" pitchFamily="34" charset="-122"/>
+                          <a:cs typeface="Sarabun" pitchFamily="34" charset="-120"/>
+                        </a:rPr>
+                        <a:t>11.791</a:t>
+                      </a:r>
+                      <a:endParaRPr lang="en-US" sz="1250" dirty="0">
+                        <a:latin typeface="Sarabun" charset="0"/>
+                        <a:ea typeface="Sarabun" charset="0"/>
+                        <a:cs typeface="Sarabun" charset="0"/>
+                      </a:endParaRPr>
+                    </a:p>
+                  </a:txBody>
+                  <a:tcPr marL="101600" marR="101600" marT="50800" marB="50800" anchor="ctr">
+                    <a:lnL w="12700" cap="flat" cmpd="sng" algn="ctr">
+                      <a:solidFill>
+                        <a:srgbClr val="E3D8C8"/>
+                      </a:solidFill>
+                      <a:prstDash val="solid"/>
+                      <a:round/>
+                      <a:headEnd type="none" w="med" len="med"/>
+                      <a:tailEnd type="none" w="med" len="med"/>
+                    </a:lnL>
+                    <a:lnR w="12700" cap="flat" cmpd="sng" algn="ctr">
+                      <a:solidFill>
+                        <a:srgbClr val="E3D8C8"/>
+                      </a:solidFill>
+                      <a:prstDash val="solid"/>
+                      <a:round/>
+                      <a:headEnd type="none" w="med" len="med"/>
+                      <a:tailEnd type="none" w="med" len="med"/>
+                    </a:lnR>
+                    <a:lnT w="12700" cap="flat" cmpd="sng" algn="ctr">
+                      <a:solidFill>
+                        <a:srgbClr val="E3D8C8"/>
+                      </a:solidFill>
+                      <a:prstDash val="solid"/>
+                      <a:round/>
+                      <a:headEnd type="none" w="med" len="med"/>
+                      <a:tailEnd type="none" w="med" len="med"/>
+                    </a:lnT>
+                    <a:lnB w="12700" cap="flat" cmpd="sng" algn="ctr">
+                      <a:solidFill>
+                        <a:srgbClr val="E3D8C8"/>
+                      </a:solidFill>
+                      <a:prstDash val="solid"/>
+                      <a:round/>
+                      <a:headEnd type="none" w="med" len="med"/>
+                      <a:tailEnd type="none" w="med" len="med"/>
+                    </a:lnB>
+                    <a:solidFill>
+                      <a:srgbClr val="FFFDFA"/>
+                    </a:solidFill>
+                  </a:tcPr>
+                </a:tc>
+              </a:tr>
+              <a:tr h="402336">
+                <a:tc>
+                  <a:txBody>
+                    <a:bodyPr/>
+                    <a:lstStyle/>
+                    <a:p>
+                      <a:pPr algn="l" indent="0" marL="0">
+                        <a:buNone/>
+                      </a:pPr>
+                      <a:r>
+                        <a:rPr lang="en-US" sz="1250" b="1" dirty="0">
+                          <a:solidFill>
+                            <a:srgbClr val="2C231C"/>
+                          </a:solidFill>
+                          <a:latin typeface="Sarabun" pitchFamily="34" charset="0"/>
+                          <a:ea typeface="Sarabun" pitchFamily="34" charset="-122"/>
+                          <a:cs typeface="Sarabun" pitchFamily="34" charset="-120"/>
+                        </a:rPr>
+                        <a:t>Gradient boosting</a:t>
+                      </a:r>
+                      <a:endParaRPr lang="en-US" sz="1250" dirty="0">
+                        <a:latin typeface="Sarabun" charset="0"/>
+                        <a:ea typeface="Sarabun" charset="0"/>
+                        <a:cs typeface="Sarabun" charset="0"/>
+                      </a:endParaRPr>
+                    </a:p>
+                  </a:txBody>
+                  <a:tcPr marL="101600" marR="101600" marT="50800" marB="50800" anchor="ctr">
+                    <a:lnL w="12700" cap="flat" cmpd="sng" algn="ctr">
+                      <a:solidFill>
+                        <a:srgbClr val="E3D8C8"/>
+                      </a:solidFill>
+                      <a:prstDash val="solid"/>
+                      <a:round/>
+                      <a:headEnd type="none" w="med" len="med"/>
+                      <a:tailEnd type="none" w="med" len="med"/>
+                    </a:lnL>
+                    <a:lnR w="12700" cap="flat" cmpd="sng" algn="ctr">
+                      <a:solidFill>
+                        <a:srgbClr val="E3D8C8"/>
+                      </a:solidFill>
+                      <a:prstDash val="solid"/>
+                      <a:round/>
+                      <a:headEnd type="none" w="med" len="med"/>
+                      <a:tailEnd type="none" w="med" len="med"/>
+                    </a:lnR>
+                    <a:lnT w="12700" cap="flat" cmpd="sng" algn="ctr">
+                      <a:solidFill>
+                        <a:srgbClr val="E3D8C8"/>
+                      </a:solidFill>
+                      <a:prstDash val="solid"/>
+                      <a:round/>
+                      <a:headEnd type="none" w="med" len="med"/>
+                      <a:tailEnd type="none" w="med" len="med"/>
+                    </a:lnT>
+                    <a:lnB w="12700" cap="flat" cmpd="sng" algn="ctr">
+                      <a:solidFill>
+                        <a:srgbClr val="E3D8C8"/>
+                      </a:solidFill>
+                      <a:prstDash val="solid"/>
+                      <a:round/>
+                      <a:headEnd type="none" w="med" len="med"/>
+                      <a:tailEnd type="none" w="med" len="med"/>
+                    </a:lnB>
+                    <a:solidFill>
+                      <a:srgbClr val="FFFDFA"/>
+                    </a:solidFill>
+                  </a:tcPr>
+                </a:tc>
+                <a:tc>
+                  <a:txBody>
+                    <a:bodyPr/>
+                    <a:lstStyle/>
+                    <a:p>
+                      <a:pPr algn="r" indent="0" marL="0">
+                        <a:buNone/>
+                      </a:pPr>
+                      <a:r>
+                        <a:rPr lang="en-US" sz="1250" dirty="0">
+                          <a:solidFill>
+                            <a:srgbClr val="2C231C"/>
+                          </a:solidFill>
+                          <a:latin typeface="Sarabun" pitchFamily="34" charset="0"/>
+                          <a:ea typeface="Sarabun" pitchFamily="34" charset="-122"/>
+                          <a:cs typeface="Sarabun" pitchFamily="34" charset="-120"/>
+                        </a:rPr>
+                        <a:t>3.946</a:t>
+                      </a:r>
+                      <a:endParaRPr lang="en-US" sz="1250" dirty="0">
+                        <a:latin typeface="Sarabun" charset="0"/>
+                        <a:ea typeface="Sarabun" charset="0"/>
+                        <a:cs typeface="Sarabun" charset="0"/>
+                      </a:endParaRPr>
+                    </a:p>
+                  </a:txBody>
+                  <a:tcPr marL="101600" marR="101600" marT="50800" marB="50800" anchor="ctr">
+                    <a:lnL w="12700" cap="flat" cmpd="sng" algn="ctr">
+                      <a:solidFill>
+                        <a:srgbClr val="E3D8C8"/>
+                      </a:solidFill>
+                      <a:prstDash val="solid"/>
+                      <a:round/>
+                      <a:headEnd type="none" w="med" len="med"/>
+                      <a:tailEnd type="none" w="med" len="med"/>
+                    </a:lnL>
+                    <a:lnR w="12700" cap="flat" cmpd="sng" algn="ctr">
+                      <a:solidFill>
+                        <a:srgbClr val="E3D8C8"/>
+                      </a:solidFill>
+                      <a:prstDash val="solid"/>
+                      <a:round/>
+                      <a:headEnd type="none" w="med" len="med"/>
+                      <a:tailEnd type="none" w="med" len="med"/>
+                    </a:lnR>
+                    <a:lnT w="12700" cap="flat" cmpd="sng" algn="ctr">
+                      <a:solidFill>
+                        <a:srgbClr val="E3D8C8"/>
+                      </a:solidFill>
+                      <a:prstDash val="solid"/>
+                      <a:round/>
+                      <a:headEnd type="none" w="med" len="med"/>
+                      <a:tailEnd type="none" w="med" len="med"/>
+                    </a:lnT>
+                    <a:lnB w="12700" cap="flat" cmpd="sng" algn="ctr">
+                      <a:solidFill>
+                        <a:srgbClr val="E3D8C8"/>
+                      </a:solidFill>
+                      <a:prstDash val="solid"/>
+                      <a:round/>
+                      <a:headEnd type="none" w="med" len="med"/>
+                      <a:tailEnd type="none" w="med" len="med"/>
+                    </a:lnB>
+                    <a:solidFill>
+                      <a:srgbClr val="FFFDFA"/>
+                    </a:solidFill>
+                  </a:tcPr>
+                </a:tc>
+                <a:tc>
+                  <a:txBody>
+                    <a:bodyPr/>
+                    <a:lstStyle/>
+                    <a:p>
+                      <a:pPr algn="r" indent="0" marL="0">
+                        <a:buNone/>
+                      </a:pPr>
+                      <a:r>
+                        <a:rPr lang="en-US" sz="1250" dirty="0">
+                          <a:solidFill>
+                            <a:srgbClr val="2C231C"/>
+                          </a:solidFill>
+                          <a:latin typeface="Sarabun" pitchFamily="34" charset="0"/>
+                          <a:ea typeface="Sarabun" pitchFamily="34" charset="-122"/>
+                          <a:cs typeface="Sarabun" pitchFamily="34" charset="-120"/>
+                        </a:rPr>
+                        <a:t>6.424</a:t>
+                      </a:r>
+                      <a:endParaRPr lang="en-US" sz="1250" dirty="0">
+                        <a:latin typeface="Sarabun" charset="0"/>
+                        <a:ea typeface="Sarabun" charset="0"/>
+                        <a:cs typeface="Sarabun" charset="0"/>
+                      </a:endParaRPr>
+                    </a:p>
+                  </a:txBody>
+                  <a:tcPr marL="101600" marR="101600" marT="50800" marB="50800" anchor="ctr">
+                    <a:lnL w="12700" cap="flat" cmpd="sng" algn="ctr">
+                      <a:solidFill>
+                        <a:srgbClr val="E3D8C8"/>
+                      </a:solidFill>
+                      <a:prstDash val="solid"/>
+                      <a:round/>
+                      <a:headEnd type="none" w="med" len="med"/>
+                      <a:tailEnd type="none" w="med" len="med"/>
+                    </a:lnL>
+                    <a:lnR w="12700" cap="flat" cmpd="sng" algn="ctr">
+                      <a:solidFill>
+                        <a:srgbClr val="E3D8C8"/>
+                      </a:solidFill>
+                      <a:prstDash val="solid"/>
+                      <a:round/>
+                      <a:headEnd type="none" w="med" len="med"/>
+                      <a:tailEnd type="none" w="med" len="med"/>
+                    </a:lnR>
+                    <a:lnT w="12700" cap="flat" cmpd="sng" algn="ctr">
+                      <a:solidFill>
+                        <a:srgbClr val="E3D8C8"/>
+                      </a:solidFill>
+                      <a:prstDash val="solid"/>
+                      <a:round/>
+                      <a:headEnd type="none" w="med" len="med"/>
+                      <a:tailEnd type="none" w="med" len="med"/>
+                    </a:lnT>
+                    <a:lnB w="12700" cap="flat" cmpd="sng" algn="ctr">
+                      <a:solidFill>
+                        <a:srgbClr val="E3D8C8"/>
+                      </a:solidFill>
+                      <a:prstDash val="solid"/>
+                      <a:round/>
+                      <a:headEnd type="none" w="med" len="med"/>
+                      <a:tailEnd type="none" w="med" len="med"/>
+                    </a:lnB>
+                    <a:solidFill>
+                      <a:srgbClr val="FFFDFA"/>
+                    </a:solidFill>
+                  </a:tcPr>
+                </a:tc>
+                <a:tc>
+                  <a:txBody>
+                    <a:bodyPr/>
+                    <a:lstStyle/>
+                    <a:p>
+                      <a:pPr algn="r" indent="0" marL="0">
+                        <a:buNone/>
+                      </a:pPr>
+                      <a:r>
+                        <a:rPr lang="en-US" sz="1250" dirty="0">
+                          <a:solidFill>
+                            <a:srgbClr val="BF5722"/>
+                          </a:solidFill>
+                          <a:latin typeface="Sarabun" pitchFamily="34" charset="0"/>
+                          <a:ea typeface="Sarabun" pitchFamily="34" charset="-122"/>
+                          <a:cs typeface="Sarabun" pitchFamily="34" charset="-120"/>
+                        </a:rPr>
+                        <a:t>12.098</a:t>
+                      </a:r>
+                      <a:endParaRPr lang="en-US" sz="1250" dirty="0">
+                        <a:latin typeface="Sarabun" charset="0"/>
+                        <a:ea typeface="Sarabun" charset="0"/>
+                        <a:cs typeface="Sarabun" charset="0"/>
+                      </a:endParaRPr>
+                    </a:p>
+                  </a:txBody>
+                  <a:tcPr marL="101600" marR="101600" marT="50800" marB="50800" anchor="ctr">
+                    <a:lnL w="12700" cap="flat" cmpd="sng" algn="ctr">
+                      <a:solidFill>
+                        <a:srgbClr val="E3D8C8"/>
+                      </a:solidFill>
+                      <a:prstDash val="solid"/>
+                      <a:round/>
+                      <a:headEnd type="none" w="med" len="med"/>
+                      <a:tailEnd type="none" w="med" len="med"/>
+                    </a:lnL>
+                    <a:lnR w="12700" cap="flat" cmpd="sng" algn="ctr">
+                      <a:solidFill>
+                        <a:srgbClr val="E3D8C8"/>
+                      </a:solidFill>
+                      <a:prstDash val="solid"/>
+                      <a:round/>
+                      <a:headEnd type="none" w="med" len="med"/>
+                      <a:tailEnd type="none" w="med" len="med"/>
+                    </a:lnR>
+                    <a:lnT w="12700" cap="flat" cmpd="sng" algn="ctr">
+                      <a:solidFill>
+                        <a:srgbClr val="E3D8C8"/>
+                      </a:solidFill>
+                      <a:prstDash val="solid"/>
+                      <a:round/>
+                      <a:headEnd type="none" w="med" len="med"/>
+                      <a:tailEnd type="none" w="med" len="med"/>
+                    </a:lnT>
+                    <a:lnB w="12700" cap="flat" cmpd="sng" algn="ctr">
+                      <a:solidFill>
+                        <a:srgbClr val="E3D8C8"/>
+                      </a:solidFill>
+                      <a:prstDash val="solid"/>
+                      <a:round/>
+                      <a:headEnd type="none" w="med" len="med"/>
+                      <a:tailEnd type="none" w="med" len="med"/>
+                    </a:lnB>
+                    <a:solidFill>
+                      <a:srgbClr val="FFFDFA"/>
+                    </a:solidFill>
+                  </a:tcPr>
+                </a:tc>
+              </a:tr>
+            </a:tbl>
+          </a:graphicData>
+        </a:graphic>
+      </p:graphicFrame>
+      <p:graphicFrame>
+        <p:nvGraphicFramePr>
+          <p:cNvPr id="21" name="Table 1"/>
+          <p:cNvGraphicFramePr>
+            <a:graphicFrameLocks noGrp="1"/>
+          </p:cNvGraphicFramePr>
+          <p:nvPr>
+            <p:extLst>
+              <p:ext uri="{D42A27DB-BD31-4B8C-83A1-F6EECF244321}">
+                <p14:modId xmlns:p14="http://schemas.microsoft.com/office/powerpoint/2010/main" val="1579011935"/>
+              </p:ext>
+            </p:extLst>
+          </p:nvPr>
+        </p:nvGraphicFramePr>
+        <p:xfrm>
+          <a:off x="502920" y="3163824"/>
+          <a:ext cx="8138160" cy="914400"/>
+        </p:xfrm>
+        <a:graphic>
+          <a:graphicData uri="http://schemas.openxmlformats.org/drawingml/2006/table">
+            <a:tbl>
+              <a:tblPr/>
+              <a:tblGrid>
+                <a:gridCol w="3017520"/>
+                <a:gridCol w="5120640"/>
+              </a:tblGrid>
+              <a:tr h="365760">
+                <a:tc>
+                  <a:txBody>
+                    <a:bodyPr/>
+                    <a:lstStyle/>
+                    <a:p>
+                      <a:pPr algn="l" indent="0" marL="0">
+                        <a:buNone/>
+                      </a:pPr>
+                      <a:r>
+                        <a:rPr lang="en-US" sz="1100" b="1" dirty="0">
+                          <a:solidFill>
+                            <a:srgbClr val="2C231C"/>
+                          </a:solidFill>
+                          <a:latin typeface="Sarabun" pitchFamily="34" charset="0"/>
+                          <a:ea typeface="Sarabun" pitchFamily="34" charset="-122"/>
+                          <a:cs typeface="Sarabun" pitchFamily="34" charset="-120"/>
+                        </a:rPr>
+                        <a:t>On ordinary days it barely wins</a:t>
+                      </a:r>
+                      <a:endParaRPr lang="en-US" sz="1100" dirty="0">
+                        <a:latin typeface="Sarabun" charset="0"/>
+                        <a:ea typeface="Sarabun" charset="0"/>
+                        <a:cs typeface="Sarabun" charset="0"/>
+                      </a:endParaRPr>
+                    </a:p>
+                  </a:txBody>
+                  <a:tcPr marL="101600" marR="101600" marT="50800" marB="50800" anchor="ctr">
+                    <a:lnL w="12700" cap="flat" cmpd="sng" algn="ctr">
+                      <a:solidFill>
+                        <a:srgbClr val="E3D8C8"/>
+                      </a:solidFill>
+                      <a:prstDash val="solid"/>
+                      <a:round/>
+                      <a:headEnd type="none" w="med" len="med"/>
+                      <a:tailEnd type="none" w="med" len="med"/>
+                    </a:lnL>
+                    <a:lnR w="12700" cap="flat" cmpd="sng" algn="ctr">
+                      <a:solidFill>
+                        <a:srgbClr val="E3D8C8"/>
+                      </a:solidFill>
+                      <a:prstDash val="solid"/>
+                      <a:round/>
+                      <a:headEnd type="none" w="med" len="med"/>
+                      <a:tailEnd type="none" w="med" len="med"/>
+                    </a:lnR>
+                    <a:lnT w="12700" cap="flat" cmpd="sng" algn="ctr">
+                      <a:solidFill>
+                        <a:srgbClr val="E3D8C8"/>
+                      </a:solidFill>
+                      <a:prstDash val="solid"/>
+                      <a:round/>
+                      <a:headEnd type="none" w="med" len="med"/>
+                      <a:tailEnd type="none" w="med" len="med"/>
+                    </a:lnT>
+                    <a:lnB w="12700" cap="flat" cmpd="sng" algn="ctr">
+                      <a:solidFill>
+                        <a:srgbClr val="E3D8C8"/>
+                      </a:solidFill>
+                      <a:prstDash val="solid"/>
+                      <a:round/>
+                      <a:headEnd type="none" w="med" len="med"/>
+                      <a:tailEnd type="none" w="med" len="med"/>
+                    </a:lnB>
+                    <a:solidFill>
+                      <a:srgbClr val="FFFDFA"/>
+                    </a:solidFill>
+                  </a:tcPr>
+                </a:tc>
+                <a:tc>
+                  <a:txBody>
+                    <a:bodyPr/>
+                    <a:lstStyle/>
+                    <a:p>
+                      <a:pPr algn="l" indent="0" marL="0">
+                        <a:buNone/>
+                      </a:pPr>
+                      <a:r>
+                        <a:rPr lang="en-US" sz="1100" dirty="0">
+                          <a:solidFill>
+                            <a:srgbClr val="2C231C"/>
+                          </a:solidFill>
+                          <a:latin typeface="Sarabun" pitchFamily="34" charset="0"/>
+                          <a:ea typeface="Sarabun" pitchFamily="34" charset="-122"/>
+                          <a:cs typeface="Sarabun" pitchFamily="34" charset="-120"/>
+                        </a:rPr>
+                        <a:t>3.95 against 3.98, which is smaller than the 5.38 gap the data itself carries. Not worth claiming</a:t>
+                      </a:r>
+                      <a:endParaRPr lang="en-US" sz="1100" dirty="0">
+                        <a:latin typeface="Sarabun" charset="0"/>
+                        <a:ea typeface="Sarabun" charset="0"/>
+                        <a:cs typeface="Sarabun" charset="0"/>
+                      </a:endParaRPr>
+                    </a:p>
+                  </a:txBody>
+                  <a:tcPr marL="101600" marR="101600" marT="50800" marB="50800" anchor="ctr">
+                    <a:lnL w="12700" cap="flat" cmpd="sng" algn="ctr">
+                      <a:solidFill>
+                        <a:srgbClr val="E3D8C8"/>
+                      </a:solidFill>
+                      <a:prstDash val="solid"/>
+                      <a:round/>
+                      <a:headEnd type="none" w="med" len="med"/>
+                      <a:tailEnd type="none" w="med" len="med"/>
+                    </a:lnL>
+                    <a:lnR w="12700" cap="flat" cmpd="sng" algn="ctr">
+                      <a:solidFill>
+                        <a:srgbClr val="E3D8C8"/>
+                      </a:solidFill>
+                      <a:prstDash val="solid"/>
+                      <a:round/>
+                      <a:headEnd type="none" w="med" len="med"/>
+                      <a:tailEnd type="none" w="med" len="med"/>
+                    </a:lnR>
+                    <a:lnT w="12700" cap="flat" cmpd="sng" algn="ctr">
+                      <a:solidFill>
+                        <a:srgbClr val="E3D8C8"/>
+                      </a:solidFill>
+                      <a:prstDash val="solid"/>
+                      <a:round/>
+                      <a:headEnd type="none" w="med" len="med"/>
+                      <a:tailEnd type="none" w="med" len="med"/>
+                    </a:lnT>
+                    <a:lnB w="12700" cap="flat" cmpd="sng" algn="ctr">
+                      <a:solidFill>
+                        <a:srgbClr val="E3D8C8"/>
+                      </a:solidFill>
+                      <a:prstDash val="solid"/>
+                      <a:round/>
+                      <a:headEnd type="none" w="med" len="med"/>
+                      <a:tailEnd type="none" w="med" len="med"/>
+                    </a:lnB>
+                    <a:solidFill>
+                      <a:srgbClr val="FFFDFA"/>
+                    </a:solidFill>
+                  </a:tcPr>
+                </a:tc>
+              </a:tr>
+              <a:tr h="365760">
+                <a:tc>
+                  <a:txBody>
+                    <a:bodyPr/>
+                    <a:lstStyle/>
+                    <a:p>
+                      <a:pPr algn="l" indent="0" marL="0">
+                        <a:buNone/>
+                      </a:pPr>
+                      <a:r>
+                        <a:rPr lang="en-US" sz="1100" b="1" dirty="0">
+                          <a:solidFill>
+                            <a:srgbClr val="2C231C"/>
+                          </a:solidFill>
+                          <a:latin typeface="Sarabun" pitchFamily="34" charset="0"/>
+                          <a:ea typeface="Sarabun" pitchFamily="34" charset="-122"/>
+                          <a:cs typeface="Sarabun" pitchFamily="34" charset="-120"/>
+                        </a:rPr>
+                        <a:t>On the days that matter it wins clearly</a:t>
+                      </a:r>
+                      <a:endParaRPr lang="en-US" sz="1100" dirty="0">
+                        <a:latin typeface="Sarabun" charset="0"/>
+                        <a:ea typeface="Sarabun" charset="0"/>
+                        <a:cs typeface="Sarabun" charset="0"/>
+                      </a:endParaRPr>
+                    </a:p>
+                  </a:txBody>
+                  <a:tcPr marL="101600" marR="101600" marT="50800" marB="50800" anchor="ctr">
+                    <a:lnL w="12700" cap="flat" cmpd="sng" algn="ctr">
+                      <a:solidFill>
+                        <a:srgbClr val="E3D8C8"/>
+                      </a:solidFill>
+                      <a:prstDash val="solid"/>
+                      <a:round/>
+                      <a:headEnd type="none" w="med" len="med"/>
+                      <a:tailEnd type="none" w="med" len="med"/>
+                    </a:lnL>
+                    <a:lnR w="12700" cap="flat" cmpd="sng" algn="ctr">
+                      <a:solidFill>
+                        <a:srgbClr val="E3D8C8"/>
+                      </a:solidFill>
+                      <a:prstDash val="solid"/>
+                      <a:round/>
+                      <a:headEnd type="none" w="med" len="med"/>
+                      <a:tailEnd type="none" w="med" len="med"/>
+                    </a:lnR>
+                    <a:lnT w="12700" cap="flat" cmpd="sng" algn="ctr">
+                      <a:solidFill>
+                        <a:srgbClr val="E3D8C8"/>
+                      </a:solidFill>
+                      <a:prstDash val="solid"/>
+                      <a:round/>
+                      <a:headEnd type="none" w="med" len="med"/>
+                      <a:tailEnd type="none" w="med" len="med"/>
+                    </a:lnT>
+                    <a:lnB w="12700" cap="flat" cmpd="sng" algn="ctr">
+                      <a:solidFill>
+                        <a:srgbClr val="E3D8C8"/>
+                      </a:solidFill>
+                      <a:prstDash val="solid"/>
+                      <a:round/>
+                      <a:headEnd type="none" w="med" len="med"/>
+                      <a:tailEnd type="none" w="med" len="med"/>
+                    </a:lnB>
+                    <a:solidFill>
+                      <a:srgbClr val="FFFDFA"/>
+                    </a:solidFill>
+                  </a:tcPr>
+                </a:tc>
+                <a:tc>
+                  <a:txBody>
+                    <a:bodyPr/>
+                    <a:lstStyle/>
+                    <a:p>
+                      <a:pPr algn="l" indent="0" marL="0">
+                        <a:buNone/>
+                      </a:pPr>
+                      <a:r>
+                        <a:rPr lang="en-US" sz="1100" dirty="0">
+                          <a:solidFill>
+                            <a:srgbClr val="2C231C"/>
+                          </a:solidFill>
+                          <a:latin typeface="Sarabun" pitchFamily="34" charset="0"/>
+                          <a:ea typeface="Sarabun" pitchFamily="34" charset="-122"/>
+                          <a:cs typeface="Sarabun" pitchFamily="34" charset="-120"/>
+                        </a:rPr>
+                        <a:t>14.1 down to 11.8, a 16% cut, and both models manage it</a:t>
+                      </a:r>
+                      <a:endParaRPr lang="en-US" sz="1100" dirty="0">
+                        <a:latin typeface="Sarabun" charset="0"/>
+                        <a:ea typeface="Sarabun" charset="0"/>
+                        <a:cs typeface="Sarabun" charset="0"/>
+                      </a:endParaRPr>
+                    </a:p>
+                  </a:txBody>
+                  <a:tcPr marL="101600" marR="101600" marT="50800" marB="50800" anchor="ctr">
+                    <a:lnL w="12700" cap="flat" cmpd="sng" algn="ctr">
+                      <a:solidFill>
+                        <a:srgbClr val="E3D8C8"/>
+                      </a:solidFill>
+                      <a:prstDash val="solid"/>
+                      <a:round/>
+                      <a:headEnd type="none" w="med" len="med"/>
+                      <a:tailEnd type="none" w="med" len="med"/>
+                    </a:lnL>
+                    <a:lnR w="12700" cap="flat" cmpd="sng" algn="ctr">
+                      <a:solidFill>
+                        <a:srgbClr val="E3D8C8"/>
+                      </a:solidFill>
+                      <a:prstDash val="solid"/>
+                      <a:round/>
+                      <a:headEnd type="none" w="med" len="med"/>
+                      <a:tailEnd type="none" w="med" len="med"/>
+                    </a:lnR>
+                    <a:lnT w="12700" cap="flat" cmpd="sng" algn="ctr">
+                      <a:solidFill>
+                        <a:srgbClr val="E3D8C8"/>
+                      </a:solidFill>
+                      <a:prstDash val="solid"/>
+                      <a:round/>
+                      <a:headEnd type="none" w="med" len="med"/>
+                      <a:tailEnd type="none" w="med" len="med"/>
+                    </a:lnT>
+                    <a:lnB w="12700" cap="flat" cmpd="sng" algn="ctr">
+                      <a:solidFill>
+                        <a:srgbClr val="E3D8C8"/>
+                      </a:solidFill>
+                      <a:prstDash val="solid"/>
+                      <a:round/>
+                      <a:headEnd type="none" w="med" len="med"/>
+                      <a:tailEnd type="none" w="med" len="med"/>
+                    </a:lnB>
+                    <a:solidFill>
+                      <a:srgbClr val="FFFDFA"/>
+                    </a:solidFill>
+                  </a:tcPr>
+                </a:tc>
+              </a:tr>
+            </a:tbl>
+          </a:graphicData>
+        </a:graphic>
+      </p:graphicFrame>
+      <p:sp>
+        <p:nvSpPr>
+          <p:cNvPr id="7" name="Shape 3"/>
+          <p:cNvSpPr/>
+          <p:nvPr/>
+        </p:nvSpPr>
+        <p:spPr>
+          <a:xfrm>
+            <a:off x="502920" y="4114800"/>
+            <a:ext cx="8138160" cy="932688"/>
+          </a:xfrm>
+          <a:prstGeom prst="roundRect">
+            <a:avLst>
+              <a:gd name="adj" fmla="val 7843"/>
+            </a:avLst>
+          </a:prstGeom>
+          <a:solidFill>
+            <a:srgbClr val="2A2018"/>
+          </a:solidFill>
+          <a:ln w="12700">
+            <a:solidFill>
+              <a:srgbClr val="2A2018"/>
+            </a:solidFill>
+            <a:prstDash val="solid"/>
+          </a:ln>
+        </p:spPr>
+      </p:sp>
+      <p:sp>
+        <p:nvSpPr>
+          <p:cNvPr id="8" name="Text 4"/>
+          <p:cNvSpPr txBox="1"/>
+          <p:nvPr/>
+        </p:nvSpPr>
+        <p:spPr>
+          <a:xfrm>
+            <a:off x="758952" y="4242816"/>
+            <a:ext cx="7626096" cy="347472"/>
+          </a:xfrm>
+          <a:prstGeom prst="rect">
+            <a:avLst/>
+          </a:prstGeom>
+          <a:noFill/>
+          <a:ln/>
+        </p:spPr>
+        <p:txBody>
+          <a:bodyPr wrap="square" lIns="0" tIns="0" rIns="0" bIns="0" rtlCol="0" anchor="ctr"/>
+          <a:lstStyle/>
+          <a:p>
+            <a:pPr indent="0" marL="0">
+              <a:buNone/>
+            </a:pPr>
+            <a:r>
+              <a:rPr lang="en-US" sz="1500" b="1" dirty="0">
+                <a:solidFill>
+                  <a:srgbClr val="FFFDFA"/>
+                </a:solidFill>
+                <a:latin typeface="Sarabun" pitchFamily="34" charset="0"/>
+                <a:ea typeface="Sarabun" pitchFamily="34" charset="-122"/>
+                <a:cs typeface="Sarabun" pitchFamily="34" charset="-120"/>
+              </a:rPr>
+              <a:t>The useful output is a warning that tomorrow changes, not tomorrow's number.</a:t>
+            </a:r>
+            <a:endParaRPr lang="en-US" sz="1500" dirty="0"/>
+          </a:p>
+        </p:txBody>
+      </p:sp>
+      <p:sp>
+        <p:nvSpPr>
+          <p:cNvPr id="9" name="Text 5"/>
+          <p:cNvSpPr txBox="1"/>
+          <p:nvPr/>
+        </p:nvSpPr>
+        <p:spPr>
+          <a:xfrm>
+            <a:off x="758952" y="4626864"/>
+            <a:ext cx="7626096" cy="329184"/>
+          </a:xfrm>
+          <a:prstGeom prst="rect">
+            <a:avLst/>
+          </a:prstGeom>
+          <a:noFill/>
+          <a:ln/>
+        </p:spPr>
+        <p:txBody>
+          <a:bodyPr wrap="square" lIns="0" tIns="0" rIns="0" bIns="0" rtlCol="0" anchor="ctr"/>
+          <a:lstStyle/>
+          <a:p>
+            <a:pPr indent="0" marL="0">
+              <a:buNone/>
+            </a:pPr>
+            <a:r>
+              <a:rPr lang="en-US" sz="1150" dirty="0">
+                <a:solidFill>
+                  <a:srgbClr val="E9A56B"/>
+                </a:solidFill>
+                <a:latin typeface="Sarabun" pitchFamily="34" charset="0"/>
+                <a:ea typeface="Sarabun" pitchFamily="34" charset="-122"/>
+                <a:cs typeface="Sarabun" pitchFamily="34" charset="-120"/>
+              </a:rPr>
+              <a:t>That is what the next slide predicts, and what the first recommendation asks the province to publish.</a:t>
+            </a:r>
+            <a:endParaRPr lang="en-US" sz="1150" dirty="0"/>
+          </a:p>
+        </p:txBody>
+      </p:sp>
+    </p:spTree>
+  </p:cSld>
+  <p:clrMapOvr>
+    <a:masterClrMapping/>
+  </p:clrMapOvr>
+</p:sld>
+</file>
+
+<file path=ppt/slides/slide11.xml><?xml version="1.0" encoding="utf-8"?>
+<p:sld xmlns:a="http://schemas.openxmlformats.org/drawingml/2006/main" xmlns:r="http://schemas.openxmlformats.org/officeDocument/2006/relationships" xmlns:p="http://schemas.openxmlformats.org/presentationml/2006/main">
+  <p:cSld name="Slide 11">
+    <p:bg>
+      <p:bgPr>
+        <a:solidFill>
+          <a:srgbClr val="FFFDFA"/>
+        </a:solidFill>
+      </p:bgPr>
+    </p:bg>
+    <p:spTree>
+      <p:nvGrpSpPr>
+        <p:cNvPr id="1" name=""/>
+        <p:cNvGrpSpPr/>
+        <p:nvPr/>
+      </p:nvGrpSpPr>
+      <p:grpSpPr>
+        <a:xfrm>
+          <a:off x="0" y="0"/>
+          <a:ext cx="0" cy="0"/>
+          <a:chOff x="0" y="0"/>
+          <a:chExt cx="0" cy="0"/>
+        </a:xfrm>
+      </p:grpSpPr>
+      <p:sp>
+        <p:nvSpPr>
+          <p:cNvPr id="2" name="Text 0"/>
+          <p:cNvSpPr txBox="1"/>
+          <p:nvPr/>
+        </p:nvSpPr>
+        <p:spPr>
+          <a:xfrm>
+            <a:off x="502920" y="274320"/>
+            <a:ext cx="8138160" cy="201168"/>
+          </a:xfrm>
+          <a:prstGeom prst="rect">
+            <a:avLst/>
+          </a:prstGeom>
+          <a:noFill/>
+          <a:ln/>
+        </p:spPr>
+        <p:txBody>
+          <a:bodyPr wrap="square" lIns="0" tIns="0" rIns="0" bIns="0" rtlCol="0" anchor="ctr"/>
+          <a:lstStyle/>
+          <a:p>
+            <a:pPr indent="0" marL="0">
+              <a:buNone/>
+            </a:pPr>
+            <a:r>
+              <a:rPr lang="en-US" sz="1050" b="1" spc="160" kern="0" dirty="0">
+                <a:solidFill>
+                  <a:srgbClr val="BF5722"/>
+                </a:solidFill>
+                <a:latin typeface="Sarabun" pitchFamily="34" charset="0"/>
+                <a:ea typeface="Sarabun" pitchFamily="34" charset="-122"/>
+                <a:cs typeface="Sarabun" pitchFamily="34" charset="-120"/>
+              </a:rPr>
               <a:t>MACHINE LEARNING  ·  3 OF 3</a:t>
             </a:r>
             <a:endParaRPr lang="en-US" sz="1050" dirty="0"/>
@@ -2521,7 +4302,7 @@
       </p:pic>
       <p:graphicFrame>
         <p:nvGraphicFramePr>
-          <p:cNvPr id="11" name="Table 0"/>
+          <p:cNvPr id="12" name="Table 0"/>
           <p:cNvGraphicFramePr>
             <a:graphicFrameLocks noGrp="1"/>
           </p:cNvGraphicFramePr>
@@ -3968,9 +5749,9 @@
 </p:sld>
 </file>
 
-<file path=ppt/slides/slide11.xml><?xml version="1.0" encoding="utf-8"?>
+<file path=ppt/slides/slide12.xml><?xml version="1.0" encoding="utf-8"?>
 <p:sld xmlns:a="http://schemas.openxmlformats.org/drawingml/2006/main" xmlns:r="http://schemas.openxmlformats.org/officeDocument/2006/relationships" xmlns:p="http://schemas.openxmlformats.org/presentationml/2006/main">
-  <p:cSld name="Slide 11">
+  <p:cSld name="Slide 12">
     <p:bg>
       <p:bgPr>
         <a:solidFill>
@@ -4135,7 +5916,7 @@
       </p:pic>
       <p:graphicFrame>
         <p:nvGraphicFramePr>
-          <p:cNvPr id="12" name="Table 0"/>
+          <p:cNvPr id="13" name="Table 0"/>
           <p:cNvGraphicFramePr>
             <a:graphicFrameLocks noGrp="1"/>
           </p:cNvGraphicFramePr>
@@ -5521,9 +7302,9 @@
 </p:sld>
 </file>
 
-<file path=ppt/slides/slide12.xml><?xml version="1.0" encoding="utf-8"?>
+<file path=ppt/slides/slide13.xml><?xml version="1.0" encoding="utf-8"?>
 <p:sld xmlns:a="http://schemas.openxmlformats.org/drawingml/2006/main" xmlns:r="http://schemas.openxmlformats.org/officeDocument/2006/relationships" xmlns:p="http://schemas.openxmlformats.org/presentationml/2006/main">
-  <p:cSld name="Slide 12">
+  <p:cSld name="Slide 13">
     <p:bg>
       <p:bgPr>
         <a:solidFill>
@@ -5617,7 +7398,7 @@
                 <a:ea typeface="Sarabun" pitchFamily="34" charset="-122"/>
                 <a:cs typeface="Sarabun" pitchFamily="34" charset="-120"/>
               </a:rPr>
-              <a:t>Three, each addressed to a body that can act</a:t>
+              <a:t>Four, each addressed to a body that can act</a:t>
             </a:r>
             <a:endParaRPr lang="en-US" sz="2500" dirty="0"/>
           </a:p>
@@ -5664,7 +7445,7 @@
       </p:sp>
       <p:graphicFrame>
         <p:nvGraphicFramePr>
-          <p:cNvPr id="13" name="Table 0"/>
+          <p:cNvPr id="14" name="Table 0"/>
           <p:cNvGraphicFramePr>
             <a:graphicFrameLocks noGrp="1"/>
           </p:cNvGraphicFramePr>
@@ -5677,7 +7458,7 @@
           </p:nvPr>
         </p:nvGraphicFramePr>
         <p:xfrm>
-          <a:off x="502920" y="1463040"/>
+          <a:off x="502920" y="1408176"/>
           <a:ext cx="8138160" cy="914400"/>
         </p:xfrm>
         <a:graphic>
@@ -5686,11 +7467,11 @@
               <a:tblPr/>
               <a:tblGrid>
                 <a:gridCol w="1554480"/>
-                <a:gridCol w="2743200"/>
+                <a:gridCol w="2651760"/>
                 <a:gridCol w="2011680"/>
-                <a:gridCol w="1828800"/>
+                <a:gridCol w="1920240"/>
               </a:tblGrid>
-              <a:tr h="274320">
+              <a:tr h="237744">
                 <a:tc>
                   <a:txBody>
                     <a:bodyPr/>
@@ -5700,7 +7481,7 @@
                         <a:buNone/>
                       </a:pPr>
                       <a:r>
-                        <a:rPr lang="en-US" sz="1000" b="1" dirty="0">
+                        <a:rPr lang="en-US" sz="950" b="1" dirty="0">
                           <a:solidFill>
                             <a:srgbClr val="7C6B5B"/>
                           </a:solidFill>
@@ -5710,7 +7491,7 @@
                         </a:rPr>
                         <a:t>PIC</a:t>
                       </a:r>
-                      <a:endParaRPr lang="en-US" sz="1000" dirty="0">
+                      <a:endParaRPr lang="en-US" sz="950" dirty="0">
                         <a:latin typeface="Sarabun" charset="0"/>
                         <a:ea typeface="Sarabun" charset="0"/>
                         <a:cs typeface="Sarabun" charset="0"/>
@@ -5768,7 +7549,7 @@
                         <a:buNone/>
                       </a:pPr>
                       <a:r>
-                        <a:rPr lang="en-US" sz="1000" b="1" dirty="0">
+                        <a:rPr lang="en-US" sz="950" b="1" dirty="0">
                           <a:solidFill>
                             <a:srgbClr val="7C6B5B"/>
                           </a:solidFill>
@@ -5778,7 +7559,7 @@
                         </a:rPr>
                         <a:t>What to do</a:t>
                       </a:r>
-                      <a:endParaRPr lang="en-US" sz="1000" dirty="0">
+                      <a:endParaRPr lang="en-US" sz="950" dirty="0">
                         <a:latin typeface="Sarabun" charset="0"/>
                         <a:ea typeface="Sarabun" charset="0"/>
                         <a:cs typeface="Sarabun" charset="0"/>
@@ -5836,7 +7617,7 @@
                         <a:buNone/>
                       </a:pPr>
                       <a:r>
-                        <a:rPr lang="en-US" sz="1000" b="1" dirty="0">
+                        <a:rPr lang="en-US" sz="950" b="1" dirty="0">
                           <a:solidFill>
                             <a:srgbClr val="7C6B5B"/>
                           </a:solidFill>
@@ -5846,7 +7627,7 @@
                         </a:rPr>
                         <a:t>Expected outcome</a:t>
                       </a:r>
-                      <a:endParaRPr lang="en-US" sz="1000" dirty="0">
+                      <a:endParaRPr lang="en-US" sz="950" dirty="0">
                         <a:latin typeface="Sarabun" charset="0"/>
                         <a:ea typeface="Sarabun" charset="0"/>
                         <a:cs typeface="Sarabun" charset="0"/>
@@ -5904,7 +7685,7 @@
                         <a:buNone/>
                       </a:pPr>
                       <a:r>
-                        <a:rPr lang="en-US" sz="1000" b="1" dirty="0">
+                        <a:rPr lang="en-US" sz="950" b="1" dirty="0">
                           <a:solidFill>
                             <a:srgbClr val="7C6B5B"/>
                           </a:solidFill>
@@ -5914,7 +7695,7 @@
                         </a:rPr>
                         <a:t>Challenge</a:t>
                       </a:r>
-                      <a:endParaRPr lang="en-US" sz="1000" dirty="0">
+                      <a:endParaRPr lang="en-US" sz="950" dirty="0">
                         <a:latin typeface="Sarabun" charset="0"/>
                         <a:ea typeface="Sarabun" charset="0"/>
                         <a:cs typeface="Sarabun" charset="0"/>
@@ -5964,7 +7745,7 @@
                   </a:tcPr>
                 </a:tc>
               </a:tr>
-              <a:tr h="932688">
+              <a:tr h="731520">
                 <a:tc>
                   <a:txBody>
                     <a:bodyPr/>
@@ -5974,7 +7755,7 @@
                         <a:buNone/>
                       </a:pPr>
                       <a:r>
-                        <a:rPr lang="en-US" sz="1000" b="1" dirty="0">
+                        <a:rPr lang="en-US" sz="950" b="1" dirty="0">
                           <a:solidFill>
                             <a:srgbClr val="2C231C"/>
                           </a:solidFill>
@@ -5982,9 +7763,9 @@
                           <a:ea typeface="Sarabun" pitchFamily="34" charset="-122"/>
                           <a:cs typeface="Sarabun" pitchFamily="34" charset="-120"/>
                         </a:rPr>
-                        <a:t>Health Center 1</a:t>
+                        <a:t>CMU CCDC</a:t>
                       </a:r>
-                      <a:endParaRPr lang="en-US" sz="1000" dirty="0">
+                      <a:endParaRPr lang="en-US" sz="950" dirty="0">
                         <a:latin typeface="Sarabun" charset="0"/>
                         <a:ea typeface="Sarabun" charset="0"/>
                         <a:cs typeface="Sarabun" charset="0"/>
@@ -5995,7 +7776,7 @@
                         <a:buNone/>
                       </a:pPr>
                       <a:r>
-                        <a:rPr lang="en-US" sz="1000" b="1" dirty="0">
+                        <a:rPr lang="en-US" sz="950" b="1" dirty="0">
                           <a:solidFill>
                             <a:srgbClr val="2C231C"/>
                           </a:solidFill>
@@ -6003,9 +7784,9 @@
                           <a:ea typeface="Sarabun" pitchFamily="34" charset="-122"/>
                           <a:cs typeface="Sarabun" pitchFamily="34" charset="-120"/>
                         </a:rPr>
-                        <a:t>Chiang Mai</a:t>
+                        <a:t>and the working group</a:t>
                       </a:r>
-                      <a:endParaRPr lang="en-US" sz="1000" dirty="0">
+                      <a:endParaRPr lang="en-US" sz="950" dirty="0">
                         <a:latin typeface="Sarabun" charset="0"/>
                         <a:ea typeface="Sarabun" charset="0"/>
                         <a:cs typeface="Sarabun" charset="0"/>
@@ -6063,7 +7844,7 @@
                         <a:buNone/>
                       </a:pPr>
                       <a:r>
-                        <a:rPr lang="en-US" sz="1000" dirty="0">
+                        <a:rPr lang="en-US" sz="950" dirty="0">
                           <a:solidFill>
                             <a:srgbClr val="2C231C"/>
                           </a:solidFill>
@@ -6071,9 +7852,9 @@
                           <a:ea typeface="Sarabun" pitchFamily="34" charset="-122"/>
                           <a:cs typeface="Sarabun" pitchFamily="34" charset="-120"/>
                         </a:rPr>
-                        <a:t>Publish each evening the probability that tomorrow goes over 37.5, with the miss rate</a:t>
+                        <a:t>Obtain the measured district-level station data that already exists</a:t>
                       </a:r>
-                      <a:endParaRPr lang="en-US" sz="1000" dirty="0">
+                      <a:endParaRPr lang="en-US" sz="950" dirty="0">
                         <a:latin typeface="Sarabun" charset="0"/>
                         <a:ea typeface="Sarabun" charset="0"/>
                         <a:cs typeface="Sarabun" charset="0"/>
@@ -6131,7 +7912,7 @@
                         <a:buNone/>
                       </a:pPr>
                       <a:r>
-                        <a:rPr lang="en-US" sz="1000" dirty="0">
+                        <a:rPr lang="en-US" sz="950" dirty="0">
                           <a:solidFill>
                             <a:srgbClr val="BF5722"/>
                           </a:solidFill>
@@ -6139,9 +7920,9 @@
                           <a:ea typeface="Sarabun" pitchFamily="34" charset="-122"/>
                           <a:cs typeface="Sarabun" pitchFamily="34" charset="-120"/>
                         </a:rPr>
-                        <a:t>Days arriving unwarned fall from 8 to 4 in 454</a:t>
+                        <a:t>Removes the 5.38 bias and the 45 km limit at once</a:t>
                       </a:r>
-                      <a:endParaRPr lang="en-US" sz="1000" dirty="0">
+                      <a:endParaRPr lang="en-US" sz="950" dirty="0">
                         <a:latin typeface="Sarabun" charset="0"/>
                         <a:ea typeface="Sarabun" charset="0"/>
                         <a:cs typeface="Sarabun" charset="0"/>
@@ -6199,7 +7980,7 @@
                         <a:buNone/>
                       </a:pPr>
                       <a:r>
-                        <a:rPr lang="en-US" sz="1000" dirty="0">
+                        <a:rPr lang="en-US" sz="950" dirty="0">
                           <a:solidFill>
                             <a:srgbClr val="2C231C"/>
                           </a:solidFill>
@@ -6207,9 +7988,9 @@
                           <a:ea typeface="Sarabun" pitchFamily="34" charset="-122"/>
                           <a:cs typeface="Sarabun" pitchFamily="34" charset="-120"/>
                         </a:rPr>
-                        <a:t>Predicts CAMS, not the air. Retrain on station data first</a:t>
+                        <a:t>The data exists. The obstacle is an approval nobody has asked for</a:t>
                       </a:r>
-                      <a:endParaRPr lang="en-US" sz="1000" dirty="0">
+                      <a:endParaRPr lang="en-US" sz="950" dirty="0">
                         <a:latin typeface="Sarabun" charset="0"/>
                         <a:ea typeface="Sarabun" charset="0"/>
                         <a:cs typeface="Sarabun" charset="0"/>
@@ -6259,7 +8040,7 @@
                   </a:tcPr>
                 </a:tc>
               </a:tr>
-              <a:tr h="932688">
+              <a:tr h="731520">
                 <a:tc>
                   <a:txBody>
                     <a:bodyPr/>
@@ -6269,7 +8050,7 @@
                         <a:buNone/>
                       </a:pPr>
                       <a:r>
-                        <a:rPr lang="en-US" sz="1000" b="1" dirty="0">
+                        <a:rPr lang="en-US" sz="950" b="1" dirty="0">
                           <a:solidFill>
                             <a:srgbClr val="2C231C"/>
                           </a:solidFill>
@@ -6277,9 +8058,9 @@
                           <a:ea typeface="Sarabun" pitchFamily="34" charset="-122"/>
                           <a:cs typeface="Sarabun" pitchFamily="34" charset="-120"/>
                         </a:rPr>
-                        <a:t>Provincial PM2.5</a:t>
+                        <a:t>Health Center 1</a:t>
                       </a:r>
-                      <a:endParaRPr lang="en-US" sz="1000" dirty="0">
+                      <a:endParaRPr lang="en-US" sz="950" dirty="0">
                         <a:latin typeface="Sarabun" charset="0"/>
                         <a:ea typeface="Sarabun" charset="0"/>
                         <a:cs typeface="Sarabun" charset="0"/>
@@ -6290,7 +8071,7 @@
                         <a:buNone/>
                       </a:pPr>
                       <a:r>
-                        <a:rPr lang="en-US" sz="1000" b="1" dirty="0">
+                        <a:rPr lang="en-US" sz="950" b="1" dirty="0">
                           <a:solidFill>
                             <a:srgbClr val="2C231C"/>
                           </a:solidFill>
@@ -6298,9 +8079,9 @@
                           <a:ea typeface="Sarabun" pitchFamily="34" charset="-122"/>
                           <a:cs typeface="Sarabun" pitchFamily="34" charset="-120"/>
                         </a:rPr>
-                        <a:t>working group</a:t>
+                        <a:t>Chiang Mai</a:t>
                       </a:r>
-                      <a:endParaRPr lang="en-US" sz="1000" dirty="0">
+                      <a:endParaRPr lang="en-US" sz="950" dirty="0">
                         <a:latin typeface="Sarabun" charset="0"/>
                         <a:ea typeface="Sarabun" charset="0"/>
                         <a:cs typeface="Sarabun" charset="0"/>
@@ -6358,7 +8139,7 @@
                         <a:buNone/>
                       </a:pPr>
                       <a:r>
-                        <a:rPr lang="en-US" sz="1000" dirty="0">
+                        <a:rPr lang="en-US" sz="950" dirty="0">
                           <a:solidFill>
                             <a:srgbClr val="2C231C"/>
                           </a:solidFill>
@@ -6366,9 +8147,9 @@
                           <a:ea typeface="Sarabun" pitchFamily="34" charset="-122"/>
                           <a:cs typeface="Sarabun" pitchFamily="34" charset="-120"/>
                         </a:rPr>
-                        <a:t>Report a burning number and an exposure number side by side, not exceedance days alone</a:t>
+                        <a:t>Publish each evening the probability that tomorrow goes over 37.5, with the miss rate</a:t>
                       </a:r>
-                      <a:endParaRPr lang="en-US" sz="1000" dirty="0">
+                      <a:endParaRPr lang="en-US" sz="950" dirty="0">
                         <a:latin typeface="Sarabun" charset="0"/>
                         <a:ea typeface="Sarabun" charset="0"/>
                         <a:cs typeface="Sarabun" charset="0"/>
@@ -6426,7 +8207,7 @@
                         <a:buNone/>
                       </a:pPr>
                       <a:r>
-                        <a:rPr lang="en-US" sz="1000" dirty="0">
+                        <a:rPr lang="en-US" sz="950" dirty="0">
                           <a:solidFill>
                             <a:srgbClr val="BF5722"/>
                           </a:solidFill>
@@ -6434,9 +8215,9 @@
                           <a:ea typeface="Sarabun" pitchFamily="34" charset="-122"/>
                           <a:cs typeface="Sarabun" pitchFamily="34" charset="-120"/>
                         </a:rPr>
-                        <a:t>A bad-burning year can be told from a bad-weather year</a:t>
+                        <a:t>Days arriving unwarned fall from 8 to 4 in 454</a:t>
                       </a:r>
-                      <a:endParaRPr lang="en-US" sz="1000" dirty="0">
+                      <a:endParaRPr lang="en-US" sz="950" dirty="0">
                         <a:latin typeface="Sarabun" charset="0"/>
                         <a:ea typeface="Sarabun" charset="0"/>
                         <a:cs typeface="Sarabun" charset="0"/>
@@ -6494,7 +8275,7 @@
                         <a:buNone/>
                       </a:pPr>
                       <a:r>
-                        <a:rPr lang="en-US" sz="1000" dirty="0">
+                        <a:rPr lang="en-US" sz="950" dirty="0">
                           <a:solidFill>
                             <a:srgbClr val="2C231C"/>
                           </a:solidFill>
@@ -6502,9 +8283,9 @@
                           <a:ea typeface="Sarabun" pitchFamily="34" charset="-122"/>
                           <a:cs typeface="Sarabun" pitchFamily="34" charset="-120"/>
                         </a:rPr>
-                        <a:t>Does not say what the yearly variation does track</a:t>
+                        <a:t>Predicts CAMS, not the air, until the data above arrives</a:t>
                       </a:r>
-                      <a:endParaRPr lang="en-US" sz="1000" dirty="0">
+                      <a:endParaRPr lang="en-US" sz="950" dirty="0">
                         <a:latin typeface="Sarabun" charset="0"/>
                         <a:ea typeface="Sarabun" charset="0"/>
                         <a:cs typeface="Sarabun" charset="0"/>
@@ -6554,7 +8335,7 @@
                   </a:tcPr>
                 </a:tc>
               </a:tr>
-              <a:tr h="932688">
+              <a:tr h="731520">
                 <a:tc>
                   <a:txBody>
                     <a:bodyPr/>
@@ -6564,7 +8345,7 @@
                         <a:buNone/>
                       </a:pPr>
                       <a:r>
-                        <a:rPr lang="en-US" sz="1000" b="1" dirty="0">
+                        <a:rPr lang="en-US" sz="950" b="1" dirty="0">
                           <a:solidFill>
                             <a:srgbClr val="2C231C"/>
                           </a:solidFill>
@@ -6572,9 +8353,9 @@
                           <a:ea typeface="Sarabun" pitchFamily="34" charset="-122"/>
                           <a:cs typeface="Sarabun" pitchFamily="34" charset="-120"/>
                         </a:rPr>
-                        <a:t>Disaster Prevention</a:t>
+                        <a:t>Provincial PM2.5</a:t>
                       </a:r>
-                      <a:endParaRPr lang="en-US" sz="1000" dirty="0">
+                      <a:endParaRPr lang="en-US" sz="950" dirty="0">
                         <a:latin typeface="Sarabun" charset="0"/>
                         <a:ea typeface="Sarabun" charset="0"/>
                         <a:cs typeface="Sarabun" charset="0"/>
@@ -6585,7 +8366,7 @@
                         <a:buNone/>
                       </a:pPr>
                       <a:r>
-                        <a:rPr lang="en-US" sz="1000" b="1" dirty="0">
+                        <a:rPr lang="en-US" sz="950" b="1" dirty="0">
                           <a:solidFill>
                             <a:srgbClr val="2C231C"/>
                           </a:solidFill>
@@ -6593,9 +8374,9 @@
                           <a:ea typeface="Sarabun" pitchFamily="34" charset="-122"/>
                           <a:cs typeface="Sarabun" pitchFamily="34" charset="-120"/>
                         </a:rPr>
-                        <a:t>and Mitigation</a:t>
+                        <a:t>working group</a:t>
                       </a:r>
-                      <a:endParaRPr lang="en-US" sz="1000" dirty="0">
+                      <a:endParaRPr lang="en-US" sz="950" dirty="0">
                         <a:latin typeface="Sarabun" charset="0"/>
                         <a:ea typeface="Sarabun" charset="0"/>
                         <a:cs typeface="Sarabun" charset="0"/>
@@ -6653,7 +8434,7 @@
                         <a:buNone/>
                       </a:pPr>
                       <a:r>
-                        <a:rPr lang="en-US" sz="1000" dirty="0">
+                        <a:rPr lang="en-US" sz="950" dirty="0">
                           <a:solidFill>
                             <a:srgbClr val="2C231C"/>
                           </a:solidFill>
@@ -6661,9 +8442,9 @@
                           <a:ea typeface="Sarabun" pitchFamily="34" charset="-122"/>
                           <a:cs typeface="Sarabun" pitchFamily="34" charset="-120"/>
                         </a:rPr>
-                        <a:t>Add an air-pollution category to the national relief schedule, which has none</a:t>
+                        <a:t>Report a burning number and an exposure number side by side</a:t>
                       </a:r>
-                      <a:endParaRPr lang="en-US" sz="1000" dirty="0">
+                      <a:endParaRPr lang="en-US" sz="950" dirty="0">
                         <a:latin typeface="Sarabun" charset="0"/>
                         <a:ea typeface="Sarabun" charset="0"/>
                         <a:cs typeface="Sarabun" charset="0"/>
@@ -6721,7 +8502,7 @@
                         <a:buNone/>
                       </a:pPr>
                       <a:r>
-                        <a:rPr lang="en-US" sz="1000" dirty="0">
+                        <a:rPr lang="en-US" sz="950" dirty="0">
                           <a:solidFill>
                             <a:srgbClr val="BF5722"/>
                           </a:solidFill>
@@ -6729,9 +8510,9 @@
                           <a:ea typeface="Sarabun" pitchFamily="34" charset="-122"/>
                           <a:cs typeface="Sarabun" pitchFamily="34" charset="-120"/>
                         </a:rPr>
-                        <a:t>Relief triggers on exposure, not on catastrophe</a:t>
+                        <a:t>A bad-burning year can be told from a bad-weather year</a:t>
                       </a:r>
-                      <a:endParaRPr lang="en-US" sz="1000" dirty="0">
+                      <a:endParaRPr lang="en-US" sz="950" dirty="0">
                         <a:latin typeface="Sarabun" charset="0"/>
                         <a:ea typeface="Sarabun" charset="0"/>
                         <a:cs typeface="Sarabun" charset="0"/>
@@ -6789,7 +8570,302 @@
                         <a:buNone/>
                       </a:pPr>
                       <a:r>
-                        <a:rPr lang="en-US" sz="1000" dirty="0">
+                        <a:rPr lang="en-US" sz="950" dirty="0">
+                          <a:solidFill>
+                            <a:srgbClr val="2C231C"/>
+                          </a:solidFill>
+                          <a:latin typeface="Sarabun" pitchFamily="34" charset="0"/>
+                          <a:ea typeface="Sarabun" pitchFamily="34" charset="-122"/>
+                          <a:cs typeface="Sarabun" pitchFamily="34" charset="-120"/>
+                        </a:rPr>
+                        <a:t>Does not say what the yearly variation does track</a:t>
+                      </a:r>
+                      <a:endParaRPr lang="en-US" sz="950" dirty="0">
+                        <a:latin typeface="Sarabun" charset="0"/>
+                        <a:ea typeface="Sarabun" charset="0"/>
+                        <a:cs typeface="Sarabun" charset="0"/>
+                      </a:endParaRPr>
+                    </a:p>
+                  </a:txBody>
+                  <a:tcPr marL="101600" marR="101600" marT="50800" marB="50800" anchor="ctr">
+                    <a:lnL w="12700" cap="flat" cmpd="sng" algn="ctr">
+                      <a:solidFill>
+                        <a:srgbClr val="E3D8C8"/>
+                      </a:solidFill>
+                      <a:prstDash val="solid"/>
+                      <a:round/>
+                      <a:headEnd type="none" w="med" len="med"/>
+                      <a:tailEnd type="none" w="med" len="med"/>
+                    </a:lnL>
+                    <a:lnR w="12700" cap="flat" cmpd="sng" algn="ctr">
+                      <a:solidFill>
+                        <a:srgbClr val="E3D8C8"/>
+                      </a:solidFill>
+                      <a:prstDash val="solid"/>
+                      <a:round/>
+                      <a:headEnd type="none" w="med" len="med"/>
+                      <a:tailEnd type="none" w="med" len="med"/>
+                    </a:lnR>
+                    <a:lnT w="12700" cap="flat" cmpd="sng" algn="ctr">
+                      <a:solidFill>
+                        <a:srgbClr val="E3D8C8"/>
+                      </a:solidFill>
+                      <a:prstDash val="solid"/>
+                      <a:round/>
+                      <a:headEnd type="none" w="med" len="med"/>
+                      <a:tailEnd type="none" w="med" len="med"/>
+                    </a:lnT>
+                    <a:lnB w="12700" cap="flat" cmpd="sng" algn="ctr">
+                      <a:solidFill>
+                        <a:srgbClr val="E3D8C8"/>
+                      </a:solidFill>
+                      <a:prstDash val="solid"/>
+                      <a:round/>
+                      <a:headEnd type="none" w="med" len="med"/>
+                      <a:tailEnd type="none" w="med" len="med"/>
+                    </a:lnB>
+                    <a:solidFill>
+                      <a:srgbClr val="FFFDFA"/>
+                    </a:solidFill>
+                  </a:tcPr>
+                </a:tc>
+              </a:tr>
+              <a:tr h="731520">
+                <a:tc>
+                  <a:txBody>
+                    <a:bodyPr/>
+                    <a:lstStyle/>
+                    <a:p>
+                      <a:pPr algn="l" indent="0" marL="0">
+                        <a:buNone/>
+                      </a:pPr>
+                      <a:r>
+                        <a:rPr lang="en-US" sz="950" b="1" dirty="0">
+                          <a:solidFill>
+                            <a:srgbClr val="2C231C"/>
+                          </a:solidFill>
+                          <a:latin typeface="Sarabun" pitchFamily="34" charset="0"/>
+                          <a:ea typeface="Sarabun" pitchFamily="34" charset="-122"/>
+                          <a:cs typeface="Sarabun" pitchFamily="34" charset="-120"/>
+                        </a:rPr>
+                        <a:t>Disaster Prevention</a:t>
+                      </a:r>
+                      <a:endParaRPr lang="en-US" sz="950" dirty="0">
+                        <a:latin typeface="Sarabun" charset="0"/>
+                        <a:ea typeface="Sarabun" charset="0"/>
+                        <a:cs typeface="Sarabun" charset="0"/>
+                      </a:endParaRPr>
+                    </a:p>
+                    <a:p>
+                      <a:pPr algn="l" indent="0" marL="0">
+                        <a:buNone/>
+                      </a:pPr>
+                      <a:r>
+                        <a:rPr lang="en-US" sz="950" b="1" dirty="0">
+                          <a:solidFill>
+                            <a:srgbClr val="2C231C"/>
+                          </a:solidFill>
+                          <a:latin typeface="Sarabun" pitchFamily="34" charset="0"/>
+                          <a:ea typeface="Sarabun" pitchFamily="34" charset="-122"/>
+                          <a:cs typeface="Sarabun" pitchFamily="34" charset="-120"/>
+                        </a:rPr>
+                        <a:t>and Mitigation</a:t>
+                      </a:r>
+                      <a:endParaRPr lang="en-US" sz="950" dirty="0">
+                        <a:latin typeface="Sarabun" charset="0"/>
+                        <a:ea typeface="Sarabun" charset="0"/>
+                        <a:cs typeface="Sarabun" charset="0"/>
+                      </a:endParaRPr>
+                    </a:p>
+                  </a:txBody>
+                  <a:tcPr marL="101600" marR="101600" marT="50800" marB="50800" anchor="ctr">
+                    <a:lnL w="12700" cap="flat" cmpd="sng" algn="ctr">
+                      <a:solidFill>
+                        <a:srgbClr val="E3D8C8"/>
+                      </a:solidFill>
+                      <a:prstDash val="solid"/>
+                      <a:round/>
+                      <a:headEnd type="none" w="med" len="med"/>
+                      <a:tailEnd type="none" w="med" len="med"/>
+                    </a:lnL>
+                    <a:lnR w="12700" cap="flat" cmpd="sng" algn="ctr">
+                      <a:solidFill>
+                        <a:srgbClr val="E3D8C8"/>
+                      </a:solidFill>
+                      <a:prstDash val="solid"/>
+                      <a:round/>
+                      <a:headEnd type="none" w="med" len="med"/>
+                      <a:tailEnd type="none" w="med" len="med"/>
+                    </a:lnR>
+                    <a:lnT w="12700" cap="flat" cmpd="sng" algn="ctr">
+                      <a:solidFill>
+                        <a:srgbClr val="E3D8C8"/>
+                      </a:solidFill>
+                      <a:prstDash val="solid"/>
+                      <a:round/>
+                      <a:headEnd type="none" w="med" len="med"/>
+                      <a:tailEnd type="none" w="med" len="med"/>
+                    </a:lnT>
+                    <a:lnB w="12700" cap="flat" cmpd="sng" algn="ctr">
+                      <a:solidFill>
+                        <a:srgbClr val="E3D8C8"/>
+                      </a:solidFill>
+                      <a:prstDash val="solid"/>
+                      <a:round/>
+                      <a:headEnd type="none" w="med" len="med"/>
+                      <a:tailEnd type="none" w="med" len="med"/>
+                    </a:lnB>
+                    <a:solidFill>
+                      <a:srgbClr val="FFFDFA"/>
+                    </a:solidFill>
+                  </a:tcPr>
+                </a:tc>
+                <a:tc>
+                  <a:txBody>
+                    <a:bodyPr/>
+                    <a:lstStyle/>
+                    <a:p>
+                      <a:pPr algn="l" indent="0" marL="0">
+                        <a:buNone/>
+                      </a:pPr>
+                      <a:r>
+                        <a:rPr lang="en-US" sz="950" dirty="0">
+                          <a:solidFill>
+                            <a:srgbClr val="2C231C"/>
+                          </a:solidFill>
+                          <a:latin typeface="Sarabun" pitchFamily="34" charset="0"/>
+                          <a:ea typeface="Sarabun" pitchFamily="34" charset="-122"/>
+                          <a:cs typeface="Sarabun" pitchFamily="34" charset="-120"/>
+                        </a:rPr>
+                        <a:t>Add an air-pollution category to the national relief schedule</a:t>
+                      </a:r>
+                      <a:endParaRPr lang="en-US" sz="950" dirty="0">
+                        <a:latin typeface="Sarabun" charset="0"/>
+                        <a:ea typeface="Sarabun" charset="0"/>
+                        <a:cs typeface="Sarabun" charset="0"/>
+                      </a:endParaRPr>
+                    </a:p>
+                  </a:txBody>
+                  <a:tcPr marL="101600" marR="101600" marT="50800" marB="50800" anchor="ctr">
+                    <a:lnL w="12700" cap="flat" cmpd="sng" algn="ctr">
+                      <a:solidFill>
+                        <a:srgbClr val="E3D8C8"/>
+                      </a:solidFill>
+                      <a:prstDash val="solid"/>
+                      <a:round/>
+                      <a:headEnd type="none" w="med" len="med"/>
+                      <a:tailEnd type="none" w="med" len="med"/>
+                    </a:lnL>
+                    <a:lnR w="12700" cap="flat" cmpd="sng" algn="ctr">
+                      <a:solidFill>
+                        <a:srgbClr val="E3D8C8"/>
+                      </a:solidFill>
+                      <a:prstDash val="solid"/>
+                      <a:round/>
+                      <a:headEnd type="none" w="med" len="med"/>
+                      <a:tailEnd type="none" w="med" len="med"/>
+                    </a:lnR>
+                    <a:lnT w="12700" cap="flat" cmpd="sng" algn="ctr">
+                      <a:solidFill>
+                        <a:srgbClr val="E3D8C8"/>
+                      </a:solidFill>
+                      <a:prstDash val="solid"/>
+                      <a:round/>
+                      <a:headEnd type="none" w="med" len="med"/>
+                      <a:tailEnd type="none" w="med" len="med"/>
+                    </a:lnT>
+                    <a:lnB w="12700" cap="flat" cmpd="sng" algn="ctr">
+                      <a:solidFill>
+                        <a:srgbClr val="E3D8C8"/>
+                      </a:solidFill>
+                      <a:prstDash val="solid"/>
+                      <a:round/>
+                      <a:headEnd type="none" w="med" len="med"/>
+                      <a:tailEnd type="none" w="med" len="med"/>
+                    </a:lnB>
+                    <a:solidFill>
+                      <a:srgbClr val="FFFDFA"/>
+                    </a:solidFill>
+                  </a:tcPr>
+                </a:tc>
+                <a:tc>
+                  <a:txBody>
+                    <a:bodyPr/>
+                    <a:lstStyle/>
+                    <a:p>
+                      <a:pPr algn="l" indent="0" marL="0">
+                        <a:buNone/>
+                      </a:pPr>
+                      <a:r>
+                        <a:rPr lang="en-US" sz="950" dirty="0">
+                          <a:solidFill>
+                            <a:srgbClr val="BF5722"/>
+                          </a:solidFill>
+                          <a:latin typeface="Sarabun" pitchFamily="34" charset="0"/>
+                          <a:ea typeface="Sarabun" pitchFamily="34" charset="-122"/>
+                          <a:cs typeface="Sarabun" pitchFamily="34" charset="-120"/>
+                        </a:rPr>
+                        <a:t>Relief triggers on exposure, not on catastrophe</a:t>
+                      </a:r>
+                      <a:endParaRPr lang="en-US" sz="950" dirty="0">
+                        <a:latin typeface="Sarabun" charset="0"/>
+                        <a:ea typeface="Sarabun" charset="0"/>
+                        <a:cs typeface="Sarabun" charset="0"/>
+                      </a:endParaRPr>
+                    </a:p>
+                  </a:txBody>
+                  <a:tcPr marL="101600" marR="101600" marT="50800" marB="50800" anchor="ctr">
+                    <a:lnL w="12700" cap="flat" cmpd="sng" algn="ctr">
+                      <a:solidFill>
+                        <a:srgbClr val="E3D8C8"/>
+                      </a:solidFill>
+                      <a:prstDash val="solid"/>
+                      <a:round/>
+                      <a:headEnd type="none" w="med" len="med"/>
+                      <a:tailEnd type="none" w="med" len="med"/>
+                    </a:lnL>
+                    <a:lnR w="12700" cap="flat" cmpd="sng" algn="ctr">
+                      <a:solidFill>
+                        <a:srgbClr val="E3D8C8"/>
+                      </a:solidFill>
+                      <a:prstDash val="solid"/>
+                      <a:round/>
+                      <a:headEnd type="none" w="med" len="med"/>
+                      <a:tailEnd type="none" w="med" len="med"/>
+                    </a:lnR>
+                    <a:lnT w="12700" cap="flat" cmpd="sng" algn="ctr">
+                      <a:solidFill>
+                        <a:srgbClr val="E3D8C8"/>
+                      </a:solidFill>
+                      <a:prstDash val="solid"/>
+                      <a:round/>
+                      <a:headEnd type="none" w="med" len="med"/>
+                      <a:tailEnd type="none" w="med" len="med"/>
+                    </a:lnT>
+                    <a:lnB w="12700" cap="flat" cmpd="sng" algn="ctr">
+                      <a:solidFill>
+                        <a:srgbClr val="E3D8C8"/>
+                      </a:solidFill>
+                      <a:prstDash val="solid"/>
+                      <a:round/>
+                      <a:headEnd type="none" w="med" len="med"/>
+                      <a:tailEnd type="none" w="med" len="med"/>
+                    </a:lnB>
+                    <a:solidFill>
+                      <a:srgbClr val="FFFDFA"/>
+                    </a:solidFill>
+                  </a:tcPr>
+                </a:tc>
+                <a:tc>
+                  <a:txBody>
+                    <a:bodyPr/>
+                    <a:lstStyle/>
+                    <a:p>
+                      <a:pPr algn="l" indent="0" marL="0">
+                        <a:buNone/>
+                      </a:pPr>
+                      <a:r>
+                        <a:rPr lang="en-US" sz="950" dirty="0">
                           <a:solidFill>
                             <a:srgbClr val="2C231C"/>
                           </a:solidFill>
@@ -6799,7 +8875,7 @@
                         </a:rPr>
                         <a:t>Only the exposure counts come from this work</a:t>
                       </a:r>
-                      <a:endParaRPr lang="en-US" sz="1000" dirty="0">
+                      <a:endParaRPr lang="en-US" sz="950" dirty="0">
                         <a:latin typeface="Sarabun" charset="0"/>
                         <a:ea typeface="Sarabun" charset="0"/>
                         <a:cs typeface="Sarabun" charset="0"/>
@@ -6861,7 +8937,7 @@
         </p:nvSpPr>
         <p:spPr>
           <a:xfrm>
-            <a:off x="502920" y="4498848"/>
+            <a:off x="502920" y="4590288"/>
             <a:ext cx="8138160" cy="365760"/>
           </a:xfrm>
           <a:prstGeom prst="rect">
@@ -6878,7 +8954,7 @@
               <a:buNone/>
             </a:pPr>
             <a:r>
-              <a:rPr lang="en-US" sz="1050" i="1" dirty="0">
+              <a:rPr lang="en-US" sz="1000" i="1" dirty="0">
                 <a:solidFill>
                   <a:srgbClr val="7C6B5B"/>
                 </a:solidFill>
@@ -6886,9 +8962,9 @@
                 <a:ea typeface="Sarabun" pitchFamily="34" charset="-122"/>
                 <a:cs typeface="Sarabun" pitchFamily="34" charset="-120"/>
               </a:rPr>
-              <a:t>Written the way I write a roadmap: no recommendation without a named owner, and none without the thing that limits it.</a:t>
+              <a:t>The first one is not a caveat moved to the front. Three of the six checkpoints point at it, and the other three recommendations are waiting on it.</a:t>
             </a:r>
-            <a:endParaRPr lang="en-US" sz="1050" dirty="0"/>
+            <a:endParaRPr lang="en-US" sz="1000" dirty="0"/>
           </a:p>
         </p:txBody>
       </p:sp>
@@ -6900,9 +8976,9 @@
 </p:sld>
 </file>
 
-<file path=ppt/slides/slide13.xml><?xml version="1.0" encoding="utf-8"?>
+<file path=ppt/slides/slide14.xml><?xml version="1.0" encoding="utf-8"?>
 <p:sld xmlns:a="http://schemas.openxmlformats.org/drawingml/2006/main" xmlns:r="http://schemas.openxmlformats.org/officeDocument/2006/relationships" xmlns:p="http://schemas.openxmlformats.org/presentationml/2006/main">
-  <p:cSld name="Slide 13">
+  <p:cSld name="Slide 14">
     <p:bg>
       <p:bgPr>
         <a:solidFill>
@@ -7043,7 +9119,7 @@
       </p:sp>
       <p:graphicFrame>
         <p:nvGraphicFramePr>
-          <p:cNvPr id="14" name="Table 0"/>
+          <p:cNvPr id="15" name="Table 0"/>
           <p:cNvGraphicFramePr>
             <a:graphicFrameLocks noGrp="1"/>
           </p:cNvGraphicFramePr>
@@ -8111,9 +10187,9 @@
 </p:sld>
 </file>
 
-<file path=ppt/slides/slide14.xml><?xml version="1.0" encoding="utf-8"?>
+<file path=ppt/slides/slide15.xml><?xml version="1.0" encoding="utf-8"?>
 <p:sld xmlns:a="http://schemas.openxmlformats.org/drawingml/2006/main" xmlns:r="http://schemas.openxmlformats.org/officeDocument/2006/relationships" xmlns:p="http://schemas.openxmlformats.org/presentationml/2006/main">
-  <p:cSld name="Slide 14">
+  <p:cSld name="Slide 15">
     <p:bg>
       <p:bgPr>
         <a:solidFill>
@@ -8590,6 +10666,1605 @@
                 <a:ea typeface="Sarabun" pitchFamily="34" charset="-122"/>
                 <a:cs typeface="Sarabun" pitchFamily="34" charset="-120"/>
               </a:rPr>
+              <a:t>THE SHAPE OF THE PROBLEM</a:t>
+            </a:r>
+            <a:endParaRPr lang="en-US" sz="1050" dirty="0"/>
+          </a:p>
+        </p:txBody>
+      </p:sp>
+      <p:sp>
+        <p:nvSpPr>
+          <p:cNvPr id="3" name="Text 1"/>
+          <p:cNvSpPr txBox="1"/>
+          <p:nvPr/>
+        </p:nvSpPr>
+        <p:spPr>
+          <a:xfrm>
+            <a:off x="502920" y="493776"/>
+            <a:ext cx="8138160" cy="512064"/>
+          </a:xfrm>
+          <a:prstGeom prst="rect">
+            <a:avLst/>
+          </a:prstGeom>
+          <a:noFill/>
+          <a:ln/>
+        </p:spPr>
+        <p:txBody>
+          <a:bodyPr wrap="square" lIns="0" tIns="0" rIns="0" bIns="0" rtlCol="0" anchor="t"/>
+          <a:lstStyle/>
+          <a:p>
+            <a:pPr indent="0" marL="0">
+              <a:buNone/>
+            </a:pPr>
+            <a:r>
+              <a:rPr lang="en-US" sz="2500" b="1" dirty="0">
+                <a:solidFill>
+                  <a:srgbClr val="2C231C"/>
+                </a:solidFill>
+                <a:latin typeface="Sarabun" pitchFamily="34" charset="0"/>
+                <a:ea typeface="Sarabun" pitchFamily="34" charset="-122"/>
+                <a:cs typeface="Sarabun" pitchFamily="34" charset="-120"/>
+              </a:rPr>
+              <a:t>Three things can be done about the season</a:t>
+            </a:r>
+            <a:endParaRPr lang="en-US" sz="2500" dirty="0"/>
+          </a:p>
+        </p:txBody>
+      </p:sp>
+      <p:sp>
+        <p:nvSpPr>
+          <p:cNvPr id="4" name="Text 2"/>
+          <p:cNvSpPr txBox="1"/>
+          <p:nvPr/>
+        </p:nvSpPr>
+        <p:spPr>
+          <a:xfrm>
+            <a:off x="502920" y="1060704"/>
+            <a:ext cx="8138160" cy="310896"/>
+          </a:xfrm>
+          <a:prstGeom prst="rect">
+            <a:avLst/>
+          </a:prstGeom>
+          <a:noFill/>
+          <a:ln/>
+        </p:spPr>
+        <p:txBody>
+          <a:bodyPr wrap="square" lIns="0" tIns="0" rIns="0" bIns="0" rtlCol="0" anchor="t"/>
+          <a:lstStyle/>
+          <a:p>
+            <a:pPr indent="0" marL="0">
+              <a:buNone/>
+            </a:pPr>
+            <a:r>
+              <a:rPr lang="en-US" sz="1350" b="1" dirty="0">
+                <a:solidFill>
+                  <a:srgbClr val="2C231C"/>
+                </a:solidFill>
+                <a:latin typeface="Sarabun" pitchFamily="34" charset="0"/>
+                <a:ea typeface="Sarabun" pitchFamily="34" charset="-122"/>
+                <a:cs typeface="Sarabun" pitchFamily="34" charset="-120"/>
+              </a:rPr>
+              <a:t>This deck builds the first box out of its own data. The other two rest on published research and on regulation that already exists, and the table says which is which.</a:t>
+            </a:r>
+            <a:endParaRPr lang="en-US" sz="1350" dirty="0"/>
+          </a:p>
+        </p:txBody>
+      </p:sp>
+      <p:sp>
+        <p:nvSpPr>
+          <p:cNvPr id="5" name="Shape 3"/>
+          <p:cNvSpPr/>
+          <p:nvPr/>
+        </p:nvSpPr>
+        <p:spPr>
+          <a:xfrm>
+            <a:off x="502920" y="1572768"/>
+            <a:ext cx="1938528" cy="475488"/>
+          </a:xfrm>
+          <a:prstGeom prst="chevron">
+            <a:avLst/>
+          </a:prstGeom>
+          <a:solidFill>
+            <a:srgbClr val="2A2018"/>
+          </a:solidFill>
+          <a:ln w="12700">
+            <a:solidFill>
+              <a:srgbClr val="2A2018"/>
+            </a:solidFill>
+            <a:prstDash val="solid"/>
+          </a:ln>
+        </p:spPr>
+      </p:sp>
+      <p:sp>
+        <p:nvSpPr>
+          <p:cNvPr id="6" name="Text 4"/>
+          <p:cNvSpPr txBox="1"/>
+          <p:nvPr/>
+        </p:nvSpPr>
+        <p:spPr>
+          <a:xfrm>
+            <a:off x="594360" y="1572768"/>
+            <a:ext cx="1847088" cy="475488"/>
+          </a:xfrm>
+          <a:prstGeom prst="rect">
+            <a:avLst/>
+          </a:prstGeom>
+          <a:noFill/>
+          <a:ln/>
+        </p:spPr>
+        <p:txBody>
+          <a:bodyPr wrap="square" lIns="0" tIns="0" rIns="0" bIns="0" rtlCol="0" anchor="ctr"/>
+          <a:lstStyle/>
+          <a:p>
+            <a:pPr algn="ctr" indent="0" marL="0">
+              <a:buNone/>
+            </a:pPr>
+            <a:r>
+              <a:rPr lang="en-US" sz="1100" b="1" dirty="0">
+                <a:solidFill>
+                  <a:srgbClr val="FFFDFA"/>
+                </a:solidFill>
+                <a:latin typeface="Sarabun" pitchFamily="34" charset="0"/>
+                <a:ea typeface="Sarabun" pitchFamily="34" charset="-122"/>
+                <a:cs typeface="Sarabun" pitchFamily="34" charset="-120"/>
+              </a:rPr>
+              <a:t>PM2.5 season</a:t>
+            </a:r>
+            <a:endParaRPr lang="en-US" sz="1100" dirty="0"/>
+          </a:p>
+        </p:txBody>
+      </p:sp>
+      <p:sp>
+        <p:nvSpPr>
+          <p:cNvPr id="7" name="Shape 5"/>
+          <p:cNvSpPr/>
+          <p:nvPr/>
+        </p:nvSpPr>
+        <p:spPr>
+          <a:xfrm>
+            <a:off x="2569464" y="1572768"/>
+            <a:ext cx="1938528" cy="475488"/>
+          </a:xfrm>
+          <a:prstGeom prst="chevron">
+            <a:avLst/>
+          </a:prstGeom>
+          <a:solidFill>
+            <a:srgbClr val="BF5722"/>
+          </a:solidFill>
+          <a:ln w="12700">
+            <a:solidFill>
+              <a:srgbClr val="BF5722"/>
+            </a:solidFill>
+            <a:prstDash val="solid"/>
+          </a:ln>
+        </p:spPr>
+      </p:sp>
+      <p:sp>
+        <p:nvSpPr>
+          <p:cNvPr id="8" name="Text 6"/>
+          <p:cNvSpPr txBox="1"/>
+          <p:nvPr/>
+        </p:nvSpPr>
+        <p:spPr>
+          <a:xfrm>
+            <a:off x="2660904" y="1572768"/>
+            <a:ext cx="1847088" cy="475488"/>
+          </a:xfrm>
+          <a:prstGeom prst="rect">
+            <a:avLst/>
+          </a:prstGeom>
+          <a:noFill/>
+          <a:ln/>
+        </p:spPr>
+        <p:txBody>
+          <a:bodyPr wrap="square" lIns="0" tIns="0" rIns="0" bIns="0" rtlCol="0" anchor="ctr"/>
+          <a:lstStyle/>
+          <a:p>
+            <a:pPr algn="ctr" indent="0" marL="0">
+              <a:buNone/>
+            </a:pPr>
+            <a:r>
+              <a:rPr lang="en-US" sz="1200" b="1" spc="120" kern="0" dirty="0">
+                <a:solidFill>
+                  <a:srgbClr val="FFFDFA"/>
+                </a:solidFill>
+                <a:latin typeface="Sarabun" pitchFamily="34" charset="0"/>
+                <a:ea typeface="Sarabun" pitchFamily="34" charset="-122"/>
+                <a:cs typeface="Sarabun" pitchFamily="34" charset="-120"/>
+              </a:rPr>
+              <a:t>PREDICT</a:t>
+            </a:r>
+            <a:endParaRPr lang="en-US" sz="1200" dirty="0"/>
+          </a:p>
+        </p:txBody>
+      </p:sp>
+      <p:sp>
+        <p:nvSpPr>
+          <p:cNvPr id="9" name="Shape 7"/>
+          <p:cNvSpPr/>
+          <p:nvPr/>
+        </p:nvSpPr>
+        <p:spPr>
+          <a:xfrm>
+            <a:off x="4636008" y="1572768"/>
+            <a:ext cx="1938528" cy="475488"/>
+          </a:xfrm>
+          <a:prstGeom prst="chevron">
+            <a:avLst/>
+          </a:prstGeom>
+          <a:solidFill>
+            <a:srgbClr val="F5EDE1"/>
+          </a:solidFill>
+          <a:ln w="12700">
+            <a:solidFill>
+              <a:srgbClr val="E3D8C8"/>
+            </a:solidFill>
+            <a:prstDash val="solid"/>
+          </a:ln>
+        </p:spPr>
+      </p:sp>
+      <p:sp>
+        <p:nvSpPr>
+          <p:cNvPr id="10" name="Text 8"/>
+          <p:cNvSpPr txBox="1"/>
+          <p:nvPr/>
+        </p:nvSpPr>
+        <p:spPr>
+          <a:xfrm>
+            <a:off x="4727448" y="1572768"/>
+            <a:ext cx="1847088" cy="475488"/>
+          </a:xfrm>
+          <a:prstGeom prst="rect">
+            <a:avLst/>
+          </a:prstGeom>
+          <a:noFill/>
+          <a:ln/>
+        </p:spPr>
+        <p:txBody>
+          <a:bodyPr wrap="square" lIns="0" tIns="0" rIns="0" bIns="0" rtlCol="0" anchor="ctr"/>
+          <a:lstStyle/>
+          <a:p>
+            <a:pPr algn="ctr" indent="0" marL="0">
+              <a:buNone/>
+            </a:pPr>
+            <a:r>
+              <a:rPr lang="en-US" sz="1200" b="1" spc="120" kern="0" dirty="0">
+                <a:solidFill>
+                  <a:srgbClr val="2C231C"/>
+                </a:solidFill>
+                <a:latin typeface="Sarabun" pitchFamily="34" charset="0"/>
+                <a:ea typeface="Sarabun" pitchFamily="34" charset="-122"/>
+                <a:cs typeface="Sarabun" pitchFamily="34" charset="-120"/>
+              </a:rPr>
+              <a:t>PREVENT</a:t>
+            </a:r>
+            <a:endParaRPr lang="en-US" sz="1200" dirty="0"/>
+          </a:p>
+        </p:txBody>
+      </p:sp>
+      <p:sp>
+        <p:nvSpPr>
+          <p:cNvPr id="11" name="Shape 9"/>
+          <p:cNvSpPr/>
+          <p:nvPr/>
+        </p:nvSpPr>
+        <p:spPr>
+          <a:xfrm>
+            <a:off x="6702552" y="1572768"/>
+            <a:ext cx="1938528" cy="475488"/>
+          </a:xfrm>
+          <a:prstGeom prst="chevron">
+            <a:avLst/>
+          </a:prstGeom>
+          <a:solidFill>
+            <a:srgbClr val="F5EDE1"/>
+          </a:solidFill>
+          <a:ln w="12700">
+            <a:solidFill>
+              <a:srgbClr val="E3D8C8"/>
+            </a:solidFill>
+            <a:prstDash val="solid"/>
+          </a:ln>
+        </p:spPr>
+      </p:sp>
+      <p:sp>
+        <p:nvSpPr>
+          <p:cNvPr id="12" name="Text 10"/>
+          <p:cNvSpPr txBox="1"/>
+          <p:nvPr/>
+        </p:nvSpPr>
+        <p:spPr>
+          <a:xfrm>
+            <a:off x="6793992" y="1572768"/>
+            <a:ext cx="1847088" cy="475488"/>
+          </a:xfrm>
+          <a:prstGeom prst="rect">
+            <a:avLst/>
+          </a:prstGeom>
+          <a:noFill/>
+          <a:ln/>
+        </p:spPr>
+        <p:txBody>
+          <a:bodyPr wrap="square" lIns="0" tIns="0" rIns="0" bIns="0" rtlCol="0" anchor="ctr"/>
+          <a:lstStyle/>
+          <a:p>
+            <a:pPr algn="ctr" indent="0" marL="0">
+              <a:buNone/>
+            </a:pPr>
+            <a:r>
+              <a:rPr lang="en-US" sz="1200" b="1" spc="120" kern="0" dirty="0">
+                <a:solidFill>
+                  <a:srgbClr val="2C231C"/>
+                </a:solidFill>
+                <a:latin typeface="Sarabun" pitchFamily="34" charset="0"/>
+                <a:ea typeface="Sarabun" pitchFamily="34" charset="-122"/>
+                <a:cs typeface="Sarabun" pitchFamily="34" charset="-120"/>
+              </a:rPr>
+              <a:t>RECOVERY</a:t>
+            </a:r>
+            <a:endParaRPr lang="en-US" sz="1200" dirty="0"/>
+          </a:p>
+        </p:txBody>
+      </p:sp>
+      <p:graphicFrame>
+        <p:nvGraphicFramePr>
+          <p:cNvPr id="3" name="Table 0"/>
+          <p:cNvGraphicFramePr>
+            <a:graphicFrameLocks noGrp="1"/>
+          </p:cNvGraphicFramePr>
+          <p:nvPr>
+            <p:extLst>
+              <p:ext uri="{D42A27DB-BD31-4B8C-83A1-F6EECF244321}">
+                <p14:modId xmlns:p14="http://schemas.microsoft.com/office/powerpoint/2010/main" val="1579011935"/>
+              </p:ext>
+            </p:extLst>
+          </p:nvPr>
+        </p:nvGraphicFramePr>
+        <p:xfrm>
+          <a:off x="502920" y="2286000"/>
+          <a:ext cx="8138160" cy="914400"/>
+        </p:xfrm>
+        <a:graphic>
+          <a:graphicData uri="http://schemas.openxmlformats.org/drawingml/2006/table">
+            <a:tbl>
+              <a:tblPr/>
+              <a:tblGrid>
+                <a:gridCol w="1005840"/>
+                <a:gridCol w="2651760"/>
+                <a:gridCol w="2194560"/>
+                <a:gridCol w="2286000"/>
+              </a:tblGrid>
+              <a:tr h="274320">
+                <a:tc>
+                  <a:txBody>
+                    <a:bodyPr/>
+                    <a:lstStyle/>
+                    <a:p>
+                      <a:pPr algn="l" indent="0" marL="0">
+                        <a:buNone/>
+                      </a:pPr>
+                      <a:r>
+                        <a:rPr lang="en-US" sz="1050" b="1" dirty="0">
+                          <a:solidFill>
+                            <a:srgbClr val="7C6B5B"/>
+                          </a:solidFill>
+                          <a:latin typeface="Sarabun" pitchFamily="34" charset="0"/>
+                          <a:ea typeface="Sarabun" pitchFamily="34" charset="-122"/>
+                          <a:cs typeface="Sarabun" pitchFamily="34" charset="-120"/>
+                        </a:rPr>
+                        <a:t>Stage</a:t>
+                      </a:r>
+                      <a:endParaRPr lang="en-US" sz="1050" dirty="0">
+                        <a:latin typeface="Sarabun" charset="0"/>
+                        <a:ea typeface="Sarabun" charset="0"/>
+                        <a:cs typeface="Sarabun" charset="0"/>
+                      </a:endParaRPr>
+                    </a:p>
+                  </a:txBody>
+                  <a:tcPr marL="101600" marR="101600" marT="50800" marB="50800" anchor="ctr">
+                    <a:lnL w="12700" cap="flat" cmpd="sng" algn="ctr">
+                      <a:solidFill>
+                        <a:srgbClr val="E3D8C8"/>
+                      </a:solidFill>
+                      <a:prstDash val="solid"/>
+                      <a:round/>
+                      <a:headEnd type="none" w="med" len="med"/>
+                      <a:tailEnd type="none" w="med" len="med"/>
+                    </a:lnL>
+                    <a:lnR w="12700" cap="flat" cmpd="sng" algn="ctr">
+                      <a:solidFill>
+                        <a:srgbClr val="E3D8C8"/>
+                      </a:solidFill>
+                      <a:prstDash val="solid"/>
+                      <a:round/>
+                      <a:headEnd type="none" w="med" len="med"/>
+                      <a:tailEnd type="none" w="med" len="med"/>
+                    </a:lnR>
+                    <a:lnT w="12700" cap="flat" cmpd="sng" algn="ctr">
+                      <a:solidFill>
+                        <a:srgbClr val="E3D8C8"/>
+                      </a:solidFill>
+                      <a:prstDash val="solid"/>
+                      <a:round/>
+                      <a:headEnd type="none" w="med" len="med"/>
+                      <a:tailEnd type="none" w="med" len="med"/>
+                    </a:lnT>
+                    <a:lnB w="12700" cap="flat" cmpd="sng" algn="ctr">
+                      <a:solidFill>
+                        <a:srgbClr val="E3D8C8"/>
+                      </a:solidFill>
+                      <a:prstDash val="solid"/>
+                      <a:round/>
+                      <a:headEnd type="none" w="med" len="med"/>
+                      <a:tailEnd type="none" w="med" len="med"/>
+                    </a:lnB>
+                    <a:solidFill>
+                      <a:srgbClr val="F5EDE1"/>
+                    </a:solidFill>
+                  </a:tcPr>
+                </a:tc>
+                <a:tc>
+                  <a:txBody>
+                    <a:bodyPr/>
+                    <a:lstStyle/>
+                    <a:p>
+                      <a:pPr algn="l" indent="0" marL="0">
+                        <a:buNone/>
+                      </a:pPr>
+                      <a:r>
+                        <a:rPr lang="en-US" sz="1050" b="1" dirty="0">
+                          <a:solidFill>
+                            <a:srgbClr val="7C6B5B"/>
+                          </a:solidFill>
+                          <a:latin typeface="Sarabun" pitchFamily="34" charset="0"/>
+                          <a:ea typeface="Sarabun" pitchFamily="34" charset="-122"/>
+                          <a:cs typeface="Sarabun" pitchFamily="34" charset="-120"/>
+                        </a:rPr>
+                        <a:t>What it means</a:t>
+                      </a:r>
+                      <a:endParaRPr lang="en-US" sz="1050" dirty="0">
+                        <a:latin typeface="Sarabun" charset="0"/>
+                        <a:ea typeface="Sarabun" charset="0"/>
+                        <a:cs typeface="Sarabun" charset="0"/>
+                      </a:endParaRPr>
+                    </a:p>
+                  </a:txBody>
+                  <a:tcPr marL="101600" marR="101600" marT="50800" marB="50800" anchor="ctr">
+                    <a:lnL w="12700" cap="flat" cmpd="sng" algn="ctr">
+                      <a:solidFill>
+                        <a:srgbClr val="E3D8C8"/>
+                      </a:solidFill>
+                      <a:prstDash val="solid"/>
+                      <a:round/>
+                      <a:headEnd type="none" w="med" len="med"/>
+                      <a:tailEnd type="none" w="med" len="med"/>
+                    </a:lnL>
+                    <a:lnR w="12700" cap="flat" cmpd="sng" algn="ctr">
+                      <a:solidFill>
+                        <a:srgbClr val="E3D8C8"/>
+                      </a:solidFill>
+                      <a:prstDash val="solid"/>
+                      <a:round/>
+                      <a:headEnd type="none" w="med" len="med"/>
+                      <a:tailEnd type="none" w="med" len="med"/>
+                    </a:lnR>
+                    <a:lnT w="12700" cap="flat" cmpd="sng" algn="ctr">
+                      <a:solidFill>
+                        <a:srgbClr val="E3D8C8"/>
+                      </a:solidFill>
+                      <a:prstDash val="solid"/>
+                      <a:round/>
+                      <a:headEnd type="none" w="med" len="med"/>
+                      <a:tailEnd type="none" w="med" len="med"/>
+                    </a:lnT>
+                    <a:lnB w="12700" cap="flat" cmpd="sng" algn="ctr">
+                      <a:solidFill>
+                        <a:srgbClr val="E3D8C8"/>
+                      </a:solidFill>
+                      <a:prstDash val="solid"/>
+                      <a:round/>
+                      <a:headEnd type="none" w="med" len="med"/>
+                      <a:tailEnd type="none" w="med" len="med"/>
+                    </a:lnB>
+                    <a:solidFill>
+                      <a:srgbClr val="F5EDE1"/>
+                    </a:solidFill>
+                  </a:tcPr>
+                </a:tc>
+                <a:tc>
+                  <a:txBody>
+                    <a:bodyPr/>
+                    <a:lstStyle/>
+                    <a:p>
+                      <a:pPr algn="l" indent="0" marL="0">
+                        <a:buNone/>
+                      </a:pPr>
+                      <a:r>
+                        <a:rPr lang="en-US" sz="1050" b="1" dirty="0">
+                          <a:solidFill>
+                            <a:srgbClr val="7C6B5B"/>
+                          </a:solidFill>
+                          <a:latin typeface="Sarabun" pitchFamily="34" charset="0"/>
+                          <a:ea typeface="Sarabun" pitchFamily="34" charset="-122"/>
+                          <a:cs typeface="Sarabun" pitchFamily="34" charset="-120"/>
+                        </a:rPr>
+                        <a:t>Where it is in this deck</a:t>
+                      </a:r>
+                      <a:endParaRPr lang="en-US" sz="1050" dirty="0">
+                        <a:latin typeface="Sarabun" charset="0"/>
+                        <a:ea typeface="Sarabun" charset="0"/>
+                        <a:cs typeface="Sarabun" charset="0"/>
+                      </a:endParaRPr>
+                    </a:p>
+                  </a:txBody>
+                  <a:tcPr marL="101600" marR="101600" marT="50800" marB="50800" anchor="ctr">
+                    <a:lnL w="12700" cap="flat" cmpd="sng" algn="ctr">
+                      <a:solidFill>
+                        <a:srgbClr val="E3D8C8"/>
+                      </a:solidFill>
+                      <a:prstDash val="solid"/>
+                      <a:round/>
+                      <a:headEnd type="none" w="med" len="med"/>
+                      <a:tailEnd type="none" w="med" len="med"/>
+                    </a:lnL>
+                    <a:lnR w="12700" cap="flat" cmpd="sng" algn="ctr">
+                      <a:solidFill>
+                        <a:srgbClr val="E3D8C8"/>
+                      </a:solidFill>
+                      <a:prstDash val="solid"/>
+                      <a:round/>
+                      <a:headEnd type="none" w="med" len="med"/>
+                      <a:tailEnd type="none" w="med" len="med"/>
+                    </a:lnR>
+                    <a:lnT w="12700" cap="flat" cmpd="sng" algn="ctr">
+                      <a:solidFill>
+                        <a:srgbClr val="E3D8C8"/>
+                      </a:solidFill>
+                      <a:prstDash val="solid"/>
+                      <a:round/>
+                      <a:headEnd type="none" w="med" len="med"/>
+                      <a:tailEnd type="none" w="med" len="med"/>
+                    </a:lnT>
+                    <a:lnB w="12700" cap="flat" cmpd="sng" algn="ctr">
+                      <a:solidFill>
+                        <a:srgbClr val="E3D8C8"/>
+                      </a:solidFill>
+                      <a:prstDash val="solid"/>
+                      <a:round/>
+                      <a:headEnd type="none" w="med" len="med"/>
+                      <a:tailEnd type="none" w="med" len="med"/>
+                    </a:lnB>
+                    <a:solidFill>
+                      <a:srgbClr val="F5EDE1"/>
+                    </a:solidFill>
+                  </a:tcPr>
+                </a:tc>
+                <a:tc>
+                  <a:txBody>
+                    <a:bodyPr/>
+                    <a:lstStyle/>
+                    <a:p>
+                      <a:pPr algn="l" indent="0" marL="0">
+                        <a:buNone/>
+                      </a:pPr>
+                      <a:r>
+                        <a:rPr lang="en-US" sz="1050" b="1" dirty="0">
+                          <a:solidFill>
+                            <a:srgbClr val="7C6B5B"/>
+                          </a:solidFill>
+                          <a:latin typeface="Sarabun" pitchFamily="34" charset="0"/>
+                          <a:ea typeface="Sarabun" pitchFamily="34" charset="-122"/>
+                          <a:cs typeface="Sarabun" pitchFamily="34" charset="-120"/>
+                        </a:rPr>
+                        <a:t>What the claim rests on</a:t>
+                      </a:r>
+                      <a:endParaRPr lang="en-US" sz="1050" dirty="0">
+                        <a:latin typeface="Sarabun" charset="0"/>
+                        <a:ea typeface="Sarabun" charset="0"/>
+                        <a:cs typeface="Sarabun" charset="0"/>
+                      </a:endParaRPr>
+                    </a:p>
+                  </a:txBody>
+                  <a:tcPr marL="101600" marR="101600" marT="50800" marB="50800" anchor="ctr">
+                    <a:lnL w="12700" cap="flat" cmpd="sng" algn="ctr">
+                      <a:solidFill>
+                        <a:srgbClr val="E3D8C8"/>
+                      </a:solidFill>
+                      <a:prstDash val="solid"/>
+                      <a:round/>
+                      <a:headEnd type="none" w="med" len="med"/>
+                      <a:tailEnd type="none" w="med" len="med"/>
+                    </a:lnL>
+                    <a:lnR w="12700" cap="flat" cmpd="sng" algn="ctr">
+                      <a:solidFill>
+                        <a:srgbClr val="E3D8C8"/>
+                      </a:solidFill>
+                      <a:prstDash val="solid"/>
+                      <a:round/>
+                      <a:headEnd type="none" w="med" len="med"/>
+                      <a:tailEnd type="none" w="med" len="med"/>
+                    </a:lnR>
+                    <a:lnT w="12700" cap="flat" cmpd="sng" algn="ctr">
+                      <a:solidFill>
+                        <a:srgbClr val="E3D8C8"/>
+                      </a:solidFill>
+                      <a:prstDash val="solid"/>
+                      <a:round/>
+                      <a:headEnd type="none" w="med" len="med"/>
+                      <a:tailEnd type="none" w="med" len="med"/>
+                    </a:lnT>
+                    <a:lnB w="12700" cap="flat" cmpd="sng" algn="ctr">
+                      <a:solidFill>
+                        <a:srgbClr val="E3D8C8"/>
+                      </a:solidFill>
+                      <a:prstDash val="solid"/>
+                      <a:round/>
+                      <a:headEnd type="none" w="med" len="med"/>
+                      <a:tailEnd type="none" w="med" len="med"/>
+                    </a:lnB>
+                    <a:solidFill>
+                      <a:srgbClr val="F5EDE1"/>
+                    </a:solidFill>
+                  </a:tcPr>
+                </a:tc>
+              </a:tr>
+              <a:tr h="566928">
+                <a:tc>
+                  <a:txBody>
+                    <a:bodyPr/>
+                    <a:lstStyle/>
+                    <a:p>
+                      <a:pPr algn="l" indent="0" marL="0">
+                        <a:buNone/>
+                      </a:pPr>
+                      <a:r>
+                        <a:rPr lang="en-US" sz="1050" b="1" dirty="0">
+                          <a:solidFill>
+                            <a:srgbClr val="2C231C"/>
+                          </a:solidFill>
+                          <a:latin typeface="Sarabun" pitchFamily="34" charset="0"/>
+                          <a:ea typeface="Sarabun" pitchFamily="34" charset="-122"/>
+                          <a:cs typeface="Sarabun" pitchFamily="34" charset="-120"/>
+                        </a:rPr>
+                        <a:t>Predict</a:t>
+                      </a:r>
+                      <a:endParaRPr lang="en-US" sz="1050" dirty="0">
+                        <a:latin typeface="Sarabun" charset="0"/>
+                        <a:ea typeface="Sarabun" charset="0"/>
+                        <a:cs typeface="Sarabun" charset="0"/>
+                      </a:endParaRPr>
+                    </a:p>
+                  </a:txBody>
+                  <a:tcPr marL="101600" marR="101600" marT="50800" marB="50800" anchor="ctr">
+                    <a:lnL w="12700" cap="flat" cmpd="sng" algn="ctr">
+                      <a:solidFill>
+                        <a:srgbClr val="E3D8C8"/>
+                      </a:solidFill>
+                      <a:prstDash val="solid"/>
+                      <a:round/>
+                      <a:headEnd type="none" w="med" len="med"/>
+                      <a:tailEnd type="none" w="med" len="med"/>
+                    </a:lnL>
+                    <a:lnR w="12700" cap="flat" cmpd="sng" algn="ctr">
+                      <a:solidFill>
+                        <a:srgbClr val="E3D8C8"/>
+                      </a:solidFill>
+                      <a:prstDash val="solid"/>
+                      <a:round/>
+                      <a:headEnd type="none" w="med" len="med"/>
+                      <a:tailEnd type="none" w="med" len="med"/>
+                    </a:lnR>
+                    <a:lnT w="12700" cap="flat" cmpd="sng" algn="ctr">
+                      <a:solidFill>
+                        <a:srgbClr val="E3D8C8"/>
+                      </a:solidFill>
+                      <a:prstDash val="solid"/>
+                      <a:round/>
+                      <a:headEnd type="none" w="med" len="med"/>
+                      <a:tailEnd type="none" w="med" len="med"/>
+                    </a:lnT>
+                    <a:lnB w="12700" cap="flat" cmpd="sng" algn="ctr">
+                      <a:solidFill>
+                        <a:srgbClr val="E3D8C8"/>
+                      </a:solidFill>
+                      <a:prstDash val="solid"/>
+                      <a:round/>
+                      <a:headEnd type="none" w="med" len="med"/>
+                      <a:tailEnd type="none" w="med" len="med"/>
+                    </a:lnB>
+                    <a:solidFill>
+                      <a:srgbClr val="FFFDFA"/>
+                    </a:solidFill>
+                  </a:tcPr>
+                </a:tc>
+                <a:tc>
+                  <a:txBody>
+                    <a:bodyPr/>
+                    <a:lstStyle/>
+                    <a:p>
+                      <a:pPr algn="l" indent="0" marL="0">
+                        <a:buNone/>
+                      </a:pPr>
+                      <a:r>
+                        <a:rPr lang="en-US" sz="1050" dirty="0">
+                          <a:solidFill>
+                            <a:srgbClr val="2C231C"/>
+                          </a:solidFill>
+                          <a:latin typeface="Sarabun" pitchFamily="34" charset="0"/>
+                          <a:ea typeface="Sarabun" pitchFamily="34" charset="-122"/>
+                          <a:cs typeface="Sarabun" pitchFamily="34" charset="-120"/>
+                        </a:rPr>
+                        <a:t>Know tomorrow before tomorrow</a:t>
+                      </a:r>
+                      <a:endParaRPr lang="en-US" sz="1050" dirty="0">
+                        <a:latin typeface="Sarabun" charset="0"/>
+                        <a:ea typeface="Sarabun" charset="0"/>
+                        <a:cs typeface="Sarabun" charset="0"/>
+                      </a:endParaRPr>
+                    </a:p>
+                  </a:txBody>
+                  <a:tcPr marL="101600" marR="101600" marT="50800" marB="50800" anchor="ctr">
+                    <a:lnL w="12700" cap="flat" cmpd="sng" algn="ctr">
+                      <a:solidFill>
+                        <a:srgbClr val="E3D8C8"/>
+                      </a:solidFill>
+                      <a:prstDash val="solid"/>
+                      <a:round/>
+                      <a:headEnd type="none" w="med" len="med"/>
+                      <a:tailEnd type="none" w="med" len="med"/>
+                    </a:lnL>
+                    <a:lnR w="12700" cap="flat" cmpd="sng" algn="ctr">
+                      <a:solidFill>
+                        <a:srgbClr val="E3D8C8"/>
+                      </a:solidFill>
+                      <a:prstDash val="solid"/>
+                      <a:round/>
+                      <a:headEnd type="none" w="med" len="med"/>
+                      <a:tailEnd type="none" w="med" len="med"/>
+                    </a:lnR>
+                    <a:lnT w="12700" cap="flat" cmpd="sng" algn="ctr">
+                      <a:solidFill>
+                        <a:srgbClr val="E3D8C8"/>
+                      </a:solidFill>
+                      <a:prstDash val="solid"/>
+                      <a:round/>
+                      <a:headEnd type="none" w="med" len="med"/>
+                      <a:tailEnd type="none" w="med" len="med"/>
+                    </a:lnT>
+                    <a:lnB w="12700" cap="flat" cmpd="sng" algn="ctr">
+                      <a:solidFill>
+                        <a:srgbClr val="E3D8C8"/>
+                      </a:solidFill>
+                      <a:prstDash val="solid"/>
+                      <a:round/>
+                      <a:headEnd type="none" w="med" len="med"/>
+                      <a:tailEnd type="none" w="med" len="med"/>
+                    </a:lnB>
+                    <a:solidFill>
+                      <a:srgbClr val="FFFDFA"/>
+                    </a:solidFill>
+                  </a:tcPr>
+                </a:tc>
+                <a:tc>
+                  <a:txBody>
+                    <a:bodyPr/>
+                    <a:lstStyle/>
+                    <a:p>
+                      <a:pPr algn="l" indent="0" marL="0">
+                        <a:buNone/>
+                      </a:pPr>
+                      <a:r>
+                        <a:rPr lang="en-US" sz="1050" dirty="0">
+                          <a:solidFill>
+                            <a:srgbClr val="2C231C"/>
+                          </a:solidFill>
+                          <a:latin typeface="Sarabun" pitchFamily="34" charset="0"/>
+                          <a:ea typeface="Sarabun" pitchFamily="34" charset="-122"/>
+                          <a:cs typeface="Sarabun" pitchFamily="34" charset="-120"/>
+                        </a:rPr>
+                        <a:t>The model, and the first two recommendations</a:t>
+                      </a:r>
+                      <a:endParaRPr lang="en-US" sz="1050" dirty="0">
+                        <a:latin typeface="Sarabun" charset="0"/>
+                        <a:ea typeface="Sarabun" charset="0"/>
+                        <a:cs typeface="Sarabun" charset="0"/>
+                      </a:endParaRPr>
+                    </a:p>
+                  </a:txBody>
+                  <a:tcPr marL="101600" marR="101600" marT="50800" marB="50800" anchor="ctr">
+                    <a:lnL w="12700" cap="flat" cmpd="sng" algn="ctr">
+                      <a:solidFill>
+                        <a:srgbClr val="E3D8C8"/>
+                      </a:solidFill>
+                      <a:prstDash val="solid"/>
+                      <a:round/>
+                      <a:headEnd type="none" w="med" len="med"/>
+                      <a:tailEnd type="none" w="med" len="med"/>
+                    </a:lnL>
+                    <a:lnR w="12700" cap="flat" cmpd="sng" algn="ctr">
+                      <a:solidFill>
+                        <a:srgbClr val="E3D8C8"/>
+                      </a:solidFill>
+                      <a:prstDash val="solid"/>
+                      <a:round/>
+                      <a:headEnd type="none" w="med" len="med"/>
+                      <a:tailEnd type="none" w="med" len="med"/>
+                    </a:lnR>
+                    <a:lnT w="12700" cap="flat" cmpd="sng" algn="ctr">
+                      <a:solidFill>
+                        <a:srgbClr val="E3D8C8"/>
+                      </a:solidFill>
+                      <a:prstDash val="solid"/>
+                      <a:round/>
+                      <a:headEnd type="none" w="med" len="med"/>
+                      <a:tailEnd type="none" w="med" len="med"/>
+                    </a:lnT>
+                    <a:lnB w="12700" cap="flat" cmpd="sng" algn="ctr">
+                      <a:solidFill>
+                        <a:srgbClr val="E3D8C8"/>
+                      </a:solidFill>
+                      <a:prstDash val="solid"/>
+                      <a:round/>
+                      <a:headEnd type="none" w="med" len="med"/>
+                      <a:tailEnd type="none" w="med" len="med"/>
+                    </a:lnB>
+                    <a:solidFill>
+                      <a:srgbClr val="FFFDFA"/>
+                    </a:solidFill>
+                  </a:tcPr>
+                </a:tc>
+                <a:tc>
+                  <a:txBody>
+                    <a:bodyPr/>
+                    <a:lstStyle/>
+                    <a:p>
+                      <a:pPr algn="l" indent="0" marL="0">
+                        <a:buNone/>
+                      </a:pPr>
+                      <a:r>
+                        <a:rPr lang="en-US" sz="1050" dirty="0">
+                          <a:solidFill>
+                            <a:srgbClr val="2C231C"/>
+                          </a:solidFill>
+                          <a:latin typeface="Sarabun" pitchFamily="34" charset="0"/>
+                          <a:ea typeface="Sarabun" pitchFamily="34" charset="-122"/>
+                          <a:cs typeface="Sarabun" pitchFamily="34" charset="-120"/>
+                        </a:rPr>
+                        <a:t>My own test set, 454 days</a:t>
+                      </a:r>
+                      <a:endParaRPr lang="en-US" sz="1050" dirty="0">
+                        <a:latin typeface="Sarabun" charset="0"/>
+                        <a:ea typeface="Sarabun" charset="0"/>
+                        <a:cs typeface="Sarabun" charset="0"/>
+                      </a:endParaRPr>
+                    </a:p>
+                  </a:txBody>
+                  <a:tcPr marL="101600" marR="101600" marT="50800" marB="50800" anchor="ctr">
+                    <a:lnL w="12700" cap="flat" cmpd="sng" algn="ctr">
+                      <a:solidFill>
+                        <a:srgbClr val="E3D8C8"/>
+                      </a:solidFill>
+                      <a:prstDash val="solid"/>
+                      <a:round/>
+                      <a:headEnd type="none" w="med" len="med"/>
+                      <a:tailEnd type="none" w="med" len="med"/>
+                    </a:lnL>
+                    <a:lnR w="12700" cap="flat" cmpd="sng" algn="ctr">
+                      <a:solidFill>
+                        <a:srgbClr val="E3D8C8"/>
+                      </a:solidFill>
+                      <a:prstDash val="solid"/>
+                      <a:round/>
+                      <a:headEnd type="none" w="med" len="med"/>
+                      <a:tailEnd type="none" w="med" len="med"/>
+                    </a:lnR>
+                    <a:lnT w="12700" cap="flat" cmpd="sng" algn="ctr">
+                      <a:solidFill>
+                        <a:srgbClr val="E3D8C8"/>
+                      </a:solidFill>
+                      <a:prstDash val="solid"/>
+                      <a:round/>
+                      <a:headEnd type="none" w="med" len="med"/>
+                      <a:tailEnd type="none" w="med" len="med"/>
+                    </a:lnT>
+                    <a:lnB w="12700" cap="flat" cmpd="sng" algn="ctr">
+                      <a:solidFill>
+                        <a:srgbClr val="E3D8C8"/>
+                      </a:solidFill>
+                      <a:prstDash val="solid"/>
+                      <a:round/>
+                      <a:headEnd type="none" w="med" len="med"/>
+                      <a:tailEnd type="none" w="med" len="med"/>
+                    </a:lnB>
+                    <a:solidFill>
+                      <a:srgbClr val="FFFDFA"/>
+                    </a:solidFill>
+                  </a:tcPr>
+                </a:tc>
+              </a:tr>
+              <a:tr h="566928">
+                <a:tc>
+                  <a:txBody>
+                    <a:bodyPr/>
+                    <a:lstStyle/>
+                    <a:p>
+                      <a:pPr algn="l" indent="0" marL="0">
+                        <a:buNone/>
+                      </a:pPr>
+                      <a:r>
+                        <a:rPr lang="en-US" sz="1050" b="1" dirty="0">
+                          <a:solidFill>
+                            <a:srgbClr val="2C231C"/>
+                          </a:solidFill>
+                          <a:latin typeface="Sarabun" pitchFamily="34" charset="0"/>
+                          <a:ea typeface="Sarabun" pitchFamily="34" charset="-122"/>
+                          <a:cs typeface="Sarabun" pitchFamily="34" charset="-120"/>
+                        </a:rPr>
+                        <a:t>Prevent</a:t>
+                      </a:r>
+                      <a:endParaRPr lang="en-US" sz="1050" dirty="0">
+                        <a:latin typeface="Sarabun" charset="0"/>
+                        <a:ea typeface="Sarabun" charset="0"/>
+                        <a:cs typeface="Sarabun" charset="0"/>
+                      </a:endParaRPr>
+                    </a:p>
+                  </a:txBody>
+                  <a:tcPr marL="101600" marR="101600" marT="50800" marB="50800" anchor="ctr">
+                    <a:lnL w="12700" cap="flat" cmpd="sng" algn="ctr">
+                      <a:solidFill>
+                        <a:srgbClr val="E3D8C8"/>
+                      </a:solidFill>
+                      <a:prstDash val="solid"/>
+                      <a:round/>
+                      <a:headEnd type="none" w="med" len="med"/>
+                      <a:tailEnd type="none" w="med" len="med"/>
+                    </a:lnL>
+                    <a:lnR w="12700" cap="flat" cmpd="sng" algn="ctr">
+                      <a:solidFill>
+                        <a:srgbClr val="E3D8C8"/>
+                      </a:solidFill>
+                      <a:prstDash val="solid"/>
+                      <a:round/>
+                      <a:headEnd type="none" w="med" len="med"/>
+                      <a:tailEnd type="none" w="med" len="med"/>
+                    </a:lnR>
+                    <a:lnT w="12700" cap="flat" cmpd="sng" algn="ctr">
+                      <a:solidFill>
+                        <a:srgbClr val="E3D8C8"/>
+                      </a:solidFill>
+                      <a:prstDash val="solid"/>
+                      <a:round/>
+                      <a:headEnd type="none" w="med" len="med"/>
+                      <a:tailEnd type="none" w="med" len="med"/>
+                    </a:lnT>
+                    <a:lnB w="12700" cap="flat" cmpd="sng" algn="ctr">
+                      <a:solidFill>
+                        <a:srgbClr val="E3D8C8"/>
+                      </a:solidFill>
+                      <a:prstDash val="solid"/>
+                      <a:round/>
+                      <a:headEnd type="none" w="med" len="med"/>
+                      <a:tailEnd type="none" w="med" len="med"/>
+                    </a:lnB>
+                    <a:solidFill>
+                      <a:srgbClr val="FFFDFA"/>
+                    </a:solidFill>
+                  </a:tcPr>
+                </a:tc>
+                <a:tc>
+                  <a:txBody>
+                    <a:bodyPr/>
+                    <a:lstStyle/>
+                    <a:p>
+                      <a:pPr algn="l" indent="0" marL="0">
+                        <a:buNone/>
+                      </a:pPr>
+                      <a:r>
+                        <a:rPr lang="en-US" sz="1050" dirty="0">
+                          <a:solidFill>
+                            <a:srgbClr val="2C231C"/>
+                          </a:solidFill>
+                          <a:latin typeface="Sarabun" pitchFamily="34" charset="0"/>
+                          <a:ea typeface="Sarabun" pitchFamily="34" charset="-122"/>
+                          <a:cs typeface="Sarabun" pitchFamily="34" charset="-120"/>
+                        </a:rPr>
+                        <a:t>Open rooms and stop bad burning being scored as good</a:t>
+                      </a:r>
+                      <a:endParaRPr lang="en-US" sz="1050" dirty="0">
+                        <a:latin typeface="Sarabun" charset="0"/>
+                        <a:ea typeface="Sarabun" charset="0"/>
+                        <a:cs typeface="Sarabun" charset="0"/>
+                      </a:endParaRPr>
+                    </a:p>
+                  </a:txBody>
+                  <a:tcPr marL="101600" marR="101600" marT="50800" marB="50800" anchor="ctr">
+                    <a:lnL w="12700" cap="flat" cmpd="sng" algn="ctr">
+                      <a:solidFill>
+                        <a:srgbClr val="E3D8C8"/>
+                      </a:solidFill>
+                      <a:prstDash val="solid"/>
+                      <a:round/>
+                      <a:headEnd type="none" w="med" len="med"/>
+                      <a:tailEnd type="none" w="med" len="med"/>
+                    </a:lnL>
+                    <a:lnR w="12700" cap="flat" cmpd="sng" algn="ctr">
+                      <a:solidFill>
+                        <a:srgbClr val="E3D8C8"/>
+                      </a:solidFill>
+                      <a:prstDash val="solid"/>
+                      <a:round/>
+                      <a:headEnd type="none" w="med" len="med"/>
+                      <a:tailEnd type="none" w="med" len="med"/>
+                    </a:lnR>
+                    <a:lnT w="12700" cap="flat" cmpd="sng" algn="ctr">
+                      <a:solidFill>
+                        <a:srgbClr val="E3D8C8"/>
+                      </a:solidFill>
+                      <a:prstDash val="solid"/>
+                      <a:round/>
+                      <a:headEnd type="none" w="med" len="med"/>
+                      <a:tailEnd type="none" w="med" len="med"/>
+                    </a:lnT>
+                    <a:lnB w="12700" cap="flat" cmpd="sng" algn="ctr">
+                      <a:solidFill>
+                        <a:srgbClr val="E3D8C8"/>
+                      </a:solidFill>
+                      <a:prstDash val="solid"/>
+                      <a:round/>
+                      <a:headEnd type="none" w="med" len="med"/>
+                      <a:tailEnd type="none" w="med" len="med"/>
+                    </a:lnB>
+                    <a:solidFill>
+                      <a:srgbClr val="FFFDFA"/>
+                    </a:solidFill>
+                  </a:tcPr>
+                </a:tc>
+                <a:tc>
+                  <a:txBody>
+                    <a:bodyPr/>
+                    <a:lstStyle/>
+                    <a:p>
+                      <a:pPr algn="l" indent="0" marL="0">
+                        <a:buNone/>
+                      </a:pPr>
+                      <a:r>
+                        <a:rPr lang="en-US" sz="1050" dirty="0">
+                          <a:solidFill>
+                            <a:srgbClr val="2C231C"/>
+                          </a:solidFill>
+                          <a:latin typeface="Sarabun" pitchFamily="34" charset="0"/>
+                          <a:ea typeface="Sarabun" pitchFamily="34" charset="-122"/>
+                          <a:cs typeface="Sarabun" pitchFamily="34" charset="-120"/>
+                        </a:rPr>
+                        <a:t>The second and third recommendations</a:t>
+                      </a:r>
+                      <a:endParaRPr lang="en-US" sz="1050" dirty="0">
+                        <a:latin typeface="Sarabun" charset="0"/>
+                        <a:ea typeface="Sarabun" charset="0"/>
+                        <a:cs typeface="Sarabun" charset="0"/>
+                      </a:endParaRPr>
+                    </a:p>
+                  </a:txBody>
+                  <a:tcPr marL="101600" marR="101600" marT="50800" marB="50800" anchor="ctr">
+                    <a:lnL w="12700" cap="flat" cmpd="sng" algn="ctr">
+                      <a:solidFill>
+                        <a:srgbClr val="E3D8C8"/>
+                      </a:solidFill>
+                      <a:prstDash val="solid"/>
+                      <a:round/>
+                      <a:headEnd type="none" w="med" len="med"/>
+                      <a:tailEnd type="none" w="med" len="med"/>
+                    </a:lnL>
+                    <a:lnR w="12700" cap="flat" cmpd="sng" algn="ctr">
+                      <a:solidFill>
+                        <a:srgbClr val="E3D8C8"/>
+                      </a:solidFill>
+                      <a:prstDash val="solid"/>
+                      <a:round/>
+                      <a:headEnd type="none" w="med" len="med"/>
+                      <a:tailEnd type="none" w="med" len="med"/>
+                    </a:lnR>
+                    <a:lnT w="12700" cap="flat" cmpd="sng" algn="ctr">
+                      <a:solidFill>
+                        <a:srgbClr val="E3D8C8"/>
+                      </a:solidFill>
+                      <a:prstDash val="solid"/>
+                      <a:round/>
+                      <a:headEnd type="none" w="med" len="med"/>
+                      <a:tailEnd type="none" w="med" len="med"/>
+                    </a:lnT>
+                    <a:lnB w="12700" cap="flat" cmpd="sng" algn="ctr">
+                      <a:solidFill>
+                        <a:srgbClr val="E3D8C8"/>
+                      </a:solidFill>
+                      <a:prstDash val="solid"/>
+                      <a:round/>
+                      <a:headEnd type="none" w="med" len="med"/>
+                      <a:tailEnd type="none" w="med" len="med"/>
+                    </a:lnB>
+                    <a:solidFill>
+                      <a:srgbClr val="FFFDFA"/>
+                    </a:solidFill>
+                  </a:tcPr>
+                </a:tc>
+                <a:tc>
+                  <a:txBody>
+                    <a:bodyPr/>
+                    <a:lstStyle/>
+                    <a:p>
+                      <a:pPr algn="l" indent="0" marL="0">
+                        <a:buNone/>
+                      </a:pPr>
+                      <a:r>
+                        <a:rPr lang="en-US" sz="1050" dirty="0">
+                          <a:solidFill>
+                            <a:srgbClr val="2C231C"/>
+                          </a:solidFill>
+                          <a:latin typeface="Sarabun" pitchFamily="34" charset="0"/>
+                          <a:ea typeface="Sarabun" pitchFamily="34" charset="-122"/>
+                          <a:cs typeface="Sarabun" pitchFamily="34" charset="-120"/>
+                        </a:rPr>
+                        <a:t>My own data, plus the standard already in force</a:t>
+                      </a:r>
+                      <a:endParaRPr lang="en-US" sz="1050" dirty="0">
+                        <a:latin typeface="Sarabun" charset="0"/>
+                        <a:ea typeface="Sarabun" charset="0"/>
+                        <a:cs typeface="Sarabun" charset="0"/>
+                      </a:endParaRPr>
+                    </a:p>
+                  </a:txBody>
+                  <a:tcPr marL="101600" marR="101600" marT="50800" marB="50800" anchor="ctr">
+                    <a:lnL w="12700" cap="flat" cmpd="sng" algn="ctr">
+                      <a:solidFill>
+                        <a:srgbClr val="E3D8C8"/>
+                      </a:solidFill>
+                      <a:prstDash val="solid"/>
+                      <a:round/>
+                      <a:headEnd type="none" w="med" len="med"/>
+                      <a:tailEnd type="none" w="med" len="med"/>
+                    </a:lnL>
+                    <a:lnR w="12700" cap="flat" cmpd="sng" algn="ctr">
+                      <a:solidFill>
+                        <a:srgbClr val="E3D8C8"/>
+                      </a:solidFill>
+                      <a:prstDash val="solid"/>
+                      <a:round/>
+                      <a:headEnd type="none" w="med" len="med"/>
+                      <a:tailEnd type="none" w="med" len="med"/>
+                    </a:lnR>
+                    <a:lnT w="12700" cap="flat" cmpd="sng" algn="ctr">
+                      <a:solidFill>
+                        <a:srgbClr val="E3D8C8"/>
+                      </a:solidFill>
+                      <a:prstDash val="solid"/>
+                      <a:round/>
+                      <a:headEnd type="none" w="med" len="med"/>
+                      <a:tailEnd type="none" w="med" len="med"/>
+                    </a:lnT>
+                    <a:lnB w="12700" cap="flat" cmpd="sng" algn="ctr">
+                      <a:solidFill>
+                        <a:srgbClr val="E3D8C8"/>
+                      </a:solidFill>
+                      <a:prstDash val="solid"/>
+                      <a:round/>
+                      <a:headEnd type="none" w="med" len="med"/>
+                      <a:tailEnd type="none" w="med" len="med"/>
+                    </a:lnB>
+                    <a:solidFill>
+                      <a:srgbClr val="FFFDFA"/>
+                    </a:solidFill>
+                  </a:tcPr>
+                </a:tc>
+              </a:tr>
+              <a:tr h="566928">
+                <a:tc>
+                  <a:txBody>
+                    <a:bodyPr/>
+                    <a:lstStyle/>
+                    <a:p>
+                      <a:pPr algn="l" indent="0" marL="0">
+                        <a:buNone/>
+                      </a:pPr>
+                      <a:r>
+                        <a:rPr lang="en-US" sz="1050" b="1" dirty="0">
+                          <a:solidFill>
+                            <a:srgbClr val="2C231C"/>
+                          </a:solidFill>
+                          <a:latin typeface="Sarabun" pitchFamily="34" charset="0"/>
+                          <a:ea typeface="Sarabun" pitchFamily="34" charset="-122"/>
+                          <a:cs typeface="Sarabun" pitchFamily="34" charset="-120"/>
+                        </a:rPr>
+                        <a:t>Recovery</a:t>
+                      </a:r>
+                      <a:endParaRPr lang="en-US" sz="1050" dirty="0">
+                        <a:latin typeface="Sarabun" charset="0"/>
+                        <a:ea typeface="Sarabun" charset="0"/>
+                        <a:cs typeface="Sarabun" charset="0"/>
+                      </a:endParaRPr>
+                    </a:p>
+                  </a:txBody>
+                  <a:tcPr marL="101600" marR="101600" marT="50800" marB="50800" anchor="ctr">
+                    <a:lnL w="12700" cap="flat" cmpd="sng" algn="ctr">
+                      <a:solidFill>
+                        <a:srgbClr val="E3D8C8"/>
+                      </a:solidFill>
+                      <a:prstDash val="solid"/>
+                      <a:round/>
+                      <a:headEnd type="none" w="med" len="med"/>
+                      <a:tailEnd type="none" w="med" len="med"/>
+                    </a:lnL>
+                    <a:lnR w="12700" cap="flat" cmpd="sng" algn="ctr">
+                      <a:solidFill>
+                        <a:srgbClr val="E3D8C8"/>
+                      </a:solidFill>
+                      <a:prstDash val="solid"/>
+                      <a:round/>
+                      <a:headEnd type="none" w="med" len="med"/>
+                      <a:tailEnd type="none" w="med" len="med"/>
+                    </a:lnR>
+                    <a:lnT w="12700" cap="flat" cmpd="sng" algn="ctr">
+                      <a:solidFill>
+                        <a:srgbClr val="E3D8C8"/>
+                      </a:solidFill>
+                      <a:prstDash val="solid"/>
+                      <a:round/>
+                      <a:headEnd type="none" w="med" len="med"/>
+                      <a:tailEnd type="none" w="med" len="med"/>
+                    </a:lnT>
+                    <a:lnB w="12700" cap="flat" cmpd="sng" algn="ctr">
+                      <a:solidFill>
+                        <a:srgbClr val="E3D8C8"/>
+                      </a:solidFill>
+                      <a:prstDash val="solid"/>
+                      <a:round/>
+                      <a:headEnd type="none" w="med" len="med"/>
+                      <a:tailEnd type="none" w="med" len="med"/>
+                    </a:lnB>
+                    <a:solidFill>
+                      <a:srgbClr val="FFFDFA"/>
+                    </a:solidFill>
+                  </a:tcPr>
+                </a:tc>
+                <a:tc>
+                  <a:txBody>
+                    <a:bodyPr/>
+                    <a:lstStyle/>
+                    <a:p>
+                      <a:pPr algn="l" indent="0" marL="0">
+                        <a:buNone/>
+                      </a:pPr>
+                      <a:r>
+                        <a:rPr lang="en-US" sz="1050" dirty="0">
+                          <a:solidFill>
+                            <a:srgbClr val="2C231C"/>
+                          </a:solidFill>
+                          <a:latin typeface="Sarabun" pitchFamily="34" charset="0"/>
+                          <a:ea typeface="Sarabun" pitchFamily="34" charset="-122"/>
+                          <a:cs typeface="Sarabun" pitchFamily="34" charset="-120"/>
+                        </a:rPr>
+                        <a:t>Pay households the season already cost</a:t>
+                      </a:r>
+                      <a:endParaRPr lang="en-US" sz="1050" dirty="0">
+                        <a:latin typeface="Sarabun" charset="0"/>
+                        <a:ea typeface="Sarabun" charset="0"/>
+                        <a:cs typeface="Sarabun" charset="0"/>
+                      </a:endParaRPr>
+                    </a:p>
+                  </a:txBody>
+                  <a:tcPr marL="101600" marR="101600" marT="50800" marB="50800" anchor="ctr">
+                    <a:lnL w="12700" cap="flat" cmpd="sng" algn="ctr">
+                      <a:solidFill>
+                        <a:srgbClr val="E3D8C8"/>
+                      </a:solidFill>
+                      <a:prstDash val="solid"/>
+                      <a:round/>
+                      <a:headEnd type="none" w="med" len="med"/>
+                      <a:tailEnd type="none" w="med" len="med"/>
+                    </a:lnL>
+                    <a:lnR w="12700" cap="flat" cmpd="sng" algn="ctr">
+                      <a:solidFill>
+                        <a:srgbClr val="E3D8C8"/>
+                      </a:solidFill>
+                      <a:prstDash val="solid"/>
+                      <a:round/>
+                      <a:headEnd type="none" w="med" len="med"/>
+                      <a:tailEnd type="none" w="med" len="med"/>
+                    </a:lnR>
+                    <a:lnT w="12700" cap="flat" cmpd="sng" algn="ctr">
+                      <a:solidFill>
+                        <a:srgbClr val="E3D8C8"/>
+                      </a:solidFill>
+                      <a:prstDash val="solid"/>
+                      <a:round/>
+                      <a:headEnd type="none" w="med" len="med"/>
+                      <a:tailEnd type="none" w="med" len="med"/>
+                    </a:lnT>
+                    <a:lnB w="12700" cap="flat" cmpd="sng" algn="ctr">
+                      <a:solidFill>
+                        <a:srgbClr val="E3D8C8"/>
+                      </a:solidFill>
+                      <a:prstDash val="solid"/>
+                      <a:round/>
+                      <a:headEnd type="none" w="med" len="med"/>
+                      <a:tailEnd type="none" w="med" len="med"/>
+                    </a:lnB>
+                    <a:solidFill>
+                      <a:srgbClr val="FFFDFA"/>
+                    </a:solidFill>
+                  </a:tcPr>
+                </a:tc>
+                <a:tc>
+                  <a:txBody>
+                    <a:bodyPr/>
+                    <a:lstStyle/>
+                    <a:p>
+                      <a:pPr algn="l" indent="0" marL="0">
+                        <a:buNone/>
+                      </a:pPr>
+                      <a:r>
+                        <a:rPr lang="en-US" sz="1050" dirty="0">
+                          <a:solidFill>
+                            <a:srgbClr val="2C231C"/>
+                          </a:solidFill>
+                          <a:latin typeface="Sarabun" pitchFamily="34" charset="0"/>
+                          <a:ea typeface="Sarabun" pitchFamily="34" charset="-122"/>
+                          <a:cs typeface="Sarabun" pitchFamily="34" charset="-120"/>
+                        </a:rPr>
+                        <a:t>The fourth recommendation</a:t>
+                      </a:r>
+                      <a:endParaRPr lang="en-US" sz="1050" dirty="0">
+                        <a:latin typeface="Sarabun" charset="0"/>
+                        <a:ea typeface="Sarabun" charset="0"/>
+                        <a:cs typeface="Sarabun" charset="0"/>
+                      </a:endParaRPr>
+                    </a:p>
+                  </a:txBody>
+                  <a:tcPr marL="101600" marR="101600" marT="50800" marB="50800" anchor="ctr">
+                    <a:lnL w="12700" cap="flat" cmpd="sng" algn="ctr">
+                      <a:solidFill>
+                        <a:srgbClr val="E3D8C8"/>
+                      </a:solidFill>
+                      <a:prstDash val="solid"/>
+                      <a:round/>
+                      <a:headEnd type="none" w="med" len="med"/>
+                      <a:tailEnd type="none" w="med" len="med"/>
+                    </a:lnL>
+                    <a:lnR w="12700" cap="flat" cmpd="sng" algn="ctr">
+                      <a:solidFill>
+                        <a:srgbClr val="E3D8C8"/>
+                      </a:solidFill>
+                      <a:prstDash val="solid"/>
+                      <a:round/>
+                      <a:headEnd type="none" w="med" len="med"/>
+                      <a:tailEnd type="none" w="med" len="med"/>
+                    </a:lnR>
+                    <a:lnT w="12700" cap="flat" cmpd="sng" algn="ctr">
+                      <a:solidFill>
+                        <a:srgbClr val="E3D8C8"/>
+                      </a:solidFill>
+                      <a:prstDash val="solid"/>
+                      <a:round/>
+                      <a:headEnd type="none" w="med" len="med"/>
+                      <a:tailEnd type="none" w="med" len="med"/>
+                    </a:lnT>
+                    <a:lnB w="12700" cap="flat" cmpd="sng" algn="ctr">
+                      <a:solidFill>
+                        <a:srgbClr val="E3D8C8"/>
+                      </a:solidFill>
+                      <a:prstDash val="solid"/>
+                      <a:round/>
+                      <a:headEnd type="none" w="med" len="med"/>
+                      <a:tailEnd type="none" w="med" len="med"/>
+                    </a:lnB>
+                    <a:solidFill>
+                      <a:srgbClr val="FFFDFA"/>
+                    </a:solidFill>
+                  </a:tcPr>
+                </a:tc>
+                <a:tc>
+                  <a:txBody>
+                    <a:bodyPr/>
+                    <a:lstStyle/>
+                    <a:p>
+                      <a:pPr algn="l" indent="0" marL="0">
+                        <a:buNone/>
+                      </a:pPr>
+                      <a:r>
+                        <a:rPr lang="en-US" sz="1050" dirty="0">
+                          <a:solidFill>
+                            <a:srgbClr val="2C231C"/>
+                          </a:solidFill>
+                          <a:latin typeface="Sarabun" pitchFamily="34" charset="0"/>
+                          <a:ea typeface="Sarabun" pitchFamily="34" charset="-122"/>
+                          <a:cs typeface="Sarabun" pitchFamily="34" charset="-120"/>
+                        </a:rPr>
+                        <a:t>Published research and the national relief schedule</a:t>
+                      </a:r>
+                      <a:endParaRPr lang="en-US" sz="1050" dirty="0">
+                        <a:latin typeface="Sarabun" charset="0"/>
+                        <a:ea typeface="Sarabun" charset="0"/>
+                        <a:cs typeface="Sarabun" charset="0"/>
+                      </a:endParaRPr>
+                    </a:p>
+                  </a:txBody>
+                  <a:tcPr marL="101600" marR="101600" marT="50800" marB="50800" anchor="ctr">
+                    <a:lnL w="12700" cap="flat" cmpd="sng" algn="ctr">
+                      <a:solidFill>
+                        <a:srgbClr val="E3D8C8"/>
+                      </a:solidFill>
+                      <a:prstDash val="solid"/>
+                      <a:round/>
+                      <a:headEnd type="none" w="med" len="med"/>
+                      <a:tailEnd type="none" w="med" len="med"/>
+                    </a:lnL>
+                    <a:lnR w="12700" cap="flat" cmpd="sng" algn="ctr">
+                      <a:solidFill>
+                        <a:srgbClr val="E3D8C8"/>
+                      </a:solidFill>
+                      <a:prstDash val="solid"/>
+                      <a:round/>
+                      <a:headEnd type="none" w="med" len="med"/>
+                      <a:tailEnd type="none" w="med" len="med"/>
+                    </a:lnR>
+                    <a:lnT w="12700" cap="flat" cmpd="sng" algn="ctr">
+                      <a:solidFill>
+                        <a:srgbClr val="E3D8C8"/>
+                      </a:solidFill>
+                      <a:prstDash val="solid"/>
+                      <a:round/>
+                      <a:headEnd type="none" w="med" len="med"/>
+                      <a:tailEnd type="none" w="med" len="med"/>
+                    </a:lnT>
+                    <a:lnB w="12700" cap="flat" cmpd="sng" algn="ctr">
+                      <a:solidFill>
+                        <a:srgbClr val="E3D8C8"/>
+                      </a:solidFill>
+                      <a:prstDash val="solid"/>
+                      <a:round/>
+                      <a:headEnd type="none" w="med" len="med"/>
+                      <a:tailEnd type="none" w="med" len="med"/>
+                    </a:lnB>
+                    <a:solidFill>
+                      <a:srgbClr val="FFFDFA"/>
+                    </a:solidFill>
+                  </a:tcPr>
+                </a:tc>
+              </a:tr>
+            </a:tbl>
+          </a:graphicData>
+        </a:graphic>
+      </p:graphicFrame>
+      <p:sp>
+        <p:nvSpPr>
+          <p:cNvPr id="14" name="Shape 11"/>
+          <p:cNvSpPr/>
+          <p:nvPr/>
+        </p:nvSpPr>
+        <p:spPr>
+          <a:xfrm>
+            <a:off x="502920" y="4297680"/>
+            <a:ext cx="8138160" cy="640080"/>
+          </a:xfrm>
+          <a:prstGeom prst="roundRect">
+            <a:avLst>
+              <a:gd name="adj" fmla="val 11429"/>
+            </a:avLst>
+          </a:prstGeom>
+          <a:solidFill>
+            <a:srgbClr val="2A2018"/>
+          </a:solidFill>
+          <a:ln w="12700">
+            <a:solidFill>
+              <a:srgbClr val="2A2018"/>
+            </a:solidFill>
+            <a:prstDash val="solid"/>
+          </a:ln>
+        </p:spPr>
+      </p:sp>
+      <p:sp>
+        <p:nvSpPr>
+          <p:cNvPr id="15" name="Text 12"/>
+          <p:cNvSpPr txBox="1"/>
+          <p:nvPr/>
+        </p:nvSpPr>
+        <p:spPr>
+          <a:xfrm>
+            <a:off x="758952" y="4425696"/>
+            <a:ext cx="7626096" cy="347472"/>
+          </a:xfrm>
+          <a:prstGeom prst="rect">
+            <a:avLst/>
+          </a:prstGeom>
+          <a:noFill/>
+          <a:ln/>
+        </p:spPr>
+        <p:txBody>
+          <a:bodyPr wrap="square" lIns="0" tIns="0" rIns="0" bIns="0" rtlCol="0" anchor="ctr"/>
+          <a:lstStyle/>
+          <a:p>
+            <a:pPr indent="0" marL="0">
+              <a:buNone/>
+            </a:pPr>
+            <a:r>
+              <a:rPr lang="en-US" sz="1500" b="1" dirty="0">
+                <a:solidFill>
+                  <a:srgbClr val="FFFDFA"/>
+                </a:solidFill>
+                <a:latin typeface="Sarabun" pitchFamily="34" charset="0"/>
+                <a:ea typeface="Sarabun" pitchFamily="34" charset="-122"/>
+                <a:cs typeface="Sarabun" pitchFamily="34" charset="-120"/>
+              </a:rPr>
+              <a:t>All three wait on one thing: whether measured station data can be obtained. That is recommendation 1.</a:t>
+            </a:r>
+            <a:endParaRPr lang="en-US" sz="1500" dirty="0"/>
+          </a:p>
+        </p:txBody>
+      </p:sp>
+    </p:spTree>
+  </p:cSld>
+  <p:clrMapOvr>
+    <a:masterClrMapping/>
+  </p:clrMapOvr>
+</p:sld>
+</file>
+
+<file path=ppt/slides/slide3.xml><?xml version="1.0" encoding="utf-8"?>
+<p:sld xmlns:a="http://schemas.openxmlformats.org/drawingml/2006/main" xmlns:r="http://schemas.openxmlformats.org/officeDocument/2006/relationships" xmlns:p="http://schemas.openxmlformats.org/presentationml/2006/main">
+  <p:cSld name="Slide 3">
+    <p:bg>
+      <p:bgPr>
+        <a:solidFill>
+          <a:srgbClr val="FFFDFA"/>
+        </a:solidFill>
+      </p:bgPr>
+    </p:bg>
+    <p:spTree>
+      <p:nvGrpSpPr>
+        <p:cNvPr id="1" name=""/>
+        <p:cNvGrpSpPr/>
+        <p:nvPr/>
+      </p:nvGrpSpPr>
+      <p:grpSpPr>
+        <a:xfrm>
+          <a:off x="0" y="0"/>
+          <a:ext cx="0" cy="0"/>
+          <a:chOff x="0" y="0"/>
+          <a:chExt cx="0" cy="0"/>
+        </a:xfrm>
+      </p:grpSpPr>
+      <p:sp>
+        <p:nvSpPr>
+          <p:cNvPr id="2" name="Text 0"/>
+          <p:cNvSpPr txBox="1"/>
+          <p:nvPr/>
+        </p:nvSpPr>
+        <p:spPr>
+          <a:xfrm>
+            <a:off x="502920" y="274320"/>
+            <a:ext cx="8138160" cy="201168"/>
+          </a:xfrm>
+          <a:prstGeom prst="rect">
+            <a:avLst/>
+          </a:prstGeom>
+          <a:noFill/>
+          <a:ln/>
+        </p:spPr>
+        <p:txBody>
+          <a:bodyPr wrap="square" lIns="0" tIns="0" rIns="0" bIns="0" rtlCol="0" anchor="ctr"/>
+          <a:lstStyle/>
+          <a:p>
+            <a:pPr indent="0" marL="0">
+              <a:buNone/>
+            </a:pPr>
+            <a:r>
+              <a:rPr lang="en-US" sz="1050" b="1" spc="160" kern="0" dirty="0">
+                <a:solidFill>
+                  <a:srgbClr val="BF5722"/>
+                </a:solidFill>
+                <a:latin typeface="Sarabun" pitchFamily="34" charset="0"/>
+                <a:ea typeface="Sarabun" pitchFamily="34" charset="-122"/>
+                <a:cs typeface="Sarabun" pitchFamily="34" charset="-120"/>
+              </a:rPr>
               <a:t>THE QUESTION</a:t>
             </a:r>
             <a:endParaRPr lang="en-US" sz="1050" dirty="0"/>
@@ -8742,7 +12417,7 @@
       </p:sp>
       <p:graphicFrame>
         <p:nvGraphicFramePr>
-          <p:cNvPr id="3" name="Table 0"/>
+          <p:cNvPr id="4" name="Table 0"/>
           <p:cNvGraphicFramePr>
             <a:graphicFrameLocks noGrp="1"/>
           </p:cNvGraphicFramePr>
@@ -9192,9 +12867,9 @@
 </p:sld>
 </file>
 
-<file path=ppt/slides/slide3.xml><?xml version="1.0" encoding="utf-8"?>
+<file path=ppt/slides/slide4.xml><?xml version="1.0" encoding="utf-8"?>
 <p:sld xmlns:a="http://schemas.openxmlformats.org/drawingml/2006/main" xmlns:r="http://schemas.openxmlformats.org/officeDocument/2006/relationships" xmlns:p="http://schemas.openxmlformats.org/presentationml/2006/main">
-  <p:cSld name="Slide 3">
+  <p:cSld name="Slide 4">
     <p:bg>
       <p:bgPr>
         <a:solidFill>
@@ -9335,7 +13010,7 @@
       </p:sp>
       <p:graphicFrame>
         <p:nvGraphicFramePr>
-          <p:cNvPr id="4" name="Table 0"/>
+          <p:cNvPr id="5" name="Table 0"/>
           <p:cNvGraphicFramePr>
             <a:graphicFrameLocks noGrp="1"/>
           </p:cNvGraphicFramePr>
@@ -10787,9 +14462,9 @@
 </p:sld>
 </file>
 
-<file path=ppt/slides/slide4.xml><?xml version="1.0" encoding="utf-8"?>
+<file path=ppt/slides/slide5.xml><?xml version="1.0" encoding="utf-8"?>
 <p:sld xmlns:a="http://schemas.openxmlformats.org/drawingml/2006/main" xmlns:r="http://schemas.openxmlformats.org/officeDocument/2006/relationships" xmlns:p="http://schemas.openxmlformats.org/presentationml/2006/main">
-  <p:cSld name="Slide 4">
+  <p:cSld name="Slide 5">
     <p:bg>
       <p:bgPr>
         <a:solidFill>
@@ -10930,7 +14605,7 @@
       </p:sp>
       <p:graphicFrame>
         <p:nvGraphicFramePr>
-          <p:cNvPr id="5" name="Table 0"/>
+          <p:cNvPr id="6" name="Table 0"/>
           <p:cNvGraphicFramePr>
             <a:graphicFrameLocks noGrp="1"/>
           </p:cNvGraphicFramePr>
@@ -11656,9 +15331,9 @@
 </p:sld>
 </file>
 
-<file path=ppt/slides/slide5.xml><?xml version="1.0" encoding="utf-8"?>
+<file path=ppt/slides/slide6.xml><?xml version="1.0" encoding="utf-8"?>
 <p:sld xmlns:a="http://schemas.openxmlformats.org/drawingml/2006/main" xmlns:r="http://schemas.openxmlformats.org/officeDocument/2006/relationships" xmlns:p="http://schemas.openxmlformats.org/presentationml/2006/main">
-  <p:cSld name="Slide 5">
+  <p:cSld name="Slide 6">
     <p:bg>
       <p:bgPr>
         <a:solidFill>
@@ -12033,7 +15708,7 @@
       </p:sp>
       <p:graphicFrame>
         <p:nvGraphicFramePr>
-          <p:cNvPr id="6" name="Table 0"/>
+          <p:cNvPr id="7" name="Table 0"/>
           <p:cNvGraphicFramePr>
             <a:graphicFrameLocks noGrp="1"/>
           </p:cNvGraphicFramePr>
@@ -12483,9 +16158,9 @@
 </p:sld>
 </file>
 
-<file path=ppt/slides/slide6.xml><?xml version="1.0" encoding="utf-8"?>
+<file path=ppt/slides/slide7.xml><?xml version="1.0" encoding="utf-8"?>
 <p:sld xmlns:a="http://schemas.openxmlformats.org/drawingml/2006/main" xmlns:r="http://schemas.openxmlformats.org/officeDocument/2006/relationships" xmlns:p="http://schemas.openxmlformats.org/presentationml/2006/main">
-  <p:cSld name="Slide 6">
+  <p:cSld name="Slide 7">
     <p:bg>
       <p:bgPr>
         <a:solidFill>
@@ -12911,7 +16586,7 @@
       </p:sp>
       <p:graphicFrame>
         <p:nvGraphicFramePr>
-          <p:cNvPr id="7" name="Table 0"/>
+          <p:cNvPr id="8" name="Table 0"/>
           <p:cNvGraphicFramePr>
             <a:graphicFrameLocks noGrp="1"/>
           </p:cNvGraphicFramePr>
@@ -13361,9 +17036,9 @@
 </p:sld>
 </file>
 
-<file path=ppt/slides/slide7.xml><?xml version="1.0" encoding="utf-8"?>
+<file path=ppt/slides/slide8.xml><?xml version="1.0" encoding="utf-8"?>
 <p:sld xmlns:a="http://schemas.openxmlformats.org/drawingml/2006/main" xmlns:r="http://schemas.openxmlformats.org/officeDocument/2006/relationships" xmlns:p="http://schemas.openxmlformats.org/presentationml/2006/main">
-  <p:cSld name="Slide 7">
+  <p:cSld name="Slide 8">
     <p:bg>
       <p:bgPr>
         <a:solidFill>
@@ -13643,7 +17318,7 @@
       </p:sp>
       <p:graphicFrame>
         <p:nvGraphicFramePr>
-          <p:cNvPr id="8" name="Table 0"/>
+          <p:cNvPr id="9" name="Table 0"/>
           <p:cNvGraphicFramePr>
             <a:graphicFrameLocks noGrp="1"/>
           </p:cNvGraphicFramePr>
@@ -14231,9 +17906,9 @@
 </p:sld>
 </file>
 
-<file path=ppt/slides/slide8.xml><?xml version="1.0" encoding="utf-8"?>
+<file path=ppt/slides/slide9.xml><?xml version="1.0" encoding="utf-8"?>
 <p:sld xmlns:a="http://schemas.openxmlformats.org/drawingml/2006/main" xmlns:r="http://schemas.openxmlformats.org/officeDocument/2006/relationships" xmlns:p="http://schemas.openxmlformats.org/presentationml/2006/main">
-  <p:cSld name="Slide 8">
+  <p:cSld name="Slide 9">
     <p:bg>
       <p:bgPr>
         <a:solidFill>
@@ -14398,7 +18073,7 @@
       </p:pic>
       <p:graphicFrame>
         <p:nvGraphicFramePr>
-          <p:cNvPr id="9" name="Table 0"/>
+          <p:cNvPr id="10" name="Table 0"/>
           <p:cNvGraphicFramePr>
             <a:graphicFrameLocks noGrp="1"/>
           </p:cNvGraphicFramePr>
@@ -15045,1683 +18720,6 @@
           </a:graphicData>
         </a:graphic>
       </p:graphicFrame>
-    </p:spTree>
-  </p:cSld>
-  <p:clrMapOvr>
-    <a:masterClrMapping/>
-  </p:clrMapOvr>
-</p:sld>
-</file>
-
-<file path=ppt/slides/slide9.xml><?xml version="1.0" encoding="utf-8"?>
-<p:sld xmlns:a="http://schemas.openxmlformats.org/drawingml/2006/main" xmlns:r="http://schemas.openxmlformats.org/officeDocument/2006/relationships" xmlns:p="http://schemas.openxmlformats.org/presentationml/2006/main">
-  <p:cSld name="Slide 9">
-    <p:bg>
-      <p:bgPr>
-        <a:solidFill>
-          <a:srgbClr val="FFFDFA"/>
-        </a:solidFill>
-      </p:bgPr>
-    </p:bg>
-    <p:spTree>
-      <p:nvGrpSpPr>
-        <p:cNvPr id="1" name=""/>
-        <p:cNvGrpSpPr/>
-        <p:nvPr/>
-      </p:nvGrpSpPr>
-      <p:grpSpPr>
-        <a:xfrm>
-          <a:off x="0" y="0"/>
-          <a:ext cx="0" cy="0"/>
-          <a:chOff x="0" y="0"/>
-          <a:chExt cx="0" cy="0"/>
-        </a:xfrm>
-      </p:grpSpPr>
-      <p:sp>
-        <p:nvSpPr>
-          <p:cNvPr id="2" name="Text 0"/>
-          <p:cNvSpPr txBox="1"/>
-          <p:nvPr/>
-        </p:nvSpPr>
-        <p:spPr>
-          <a:xfrm>
-            <a:off x="502920" y="274320"/>
-            <a:ext cx="8138160" cy="201168"/>
-          </a:xfrm>
-          <a:prstGeom prst="rect">
-            <a:avLst/>
-          </a:prstGeom>
-          <a:noFill/>
-          <a:ln/>
-        </p:spPr>
-        <p:txBody>
-          <a:bodyPr wrap="square" lIns="0" tIns="0" rIns="0" bIns="0" rtlCol="0" anchor="ctr"/>
-          <a:lstStyle/>
-          <a:p>
-            <a:pPr indent="0" marL="0">
-              <a:buNone/>
-            </a:pPr>
-            <a:r>
-              <a:rPr lang="en-US" sz="1050" b="1" spc="160" kern="0" dirty="0">
-                <a:solidFill>
-                  <a:srgbClr val="BF5722"/>
-                </a:solidFill>
-                <a:latin typeface="Sarabun" pitchFamily="34" charset="0"/>
-                <a:ea typeface="Sarabun" pitchFamily="34" charset="-122"/>
-                <a:cs typeface="Sarabun" pitchFamily="34" charset="-120"/>
-              </a:rPr>
-              <a:t>MACHINE LEARNING  ·  2 OF 3</a:t>
-            </a:r>
-            <a:endParaRPr lang="en-US" sz="1050" dirty="0"/>
-          </a:p>
-        </p:txBody>
-      </p:sp>
-      <p:sp>
-        <p:nvSpPr>
-          <p:cNvPr id="3" name="Text 1"/>
-          <p:cNvSpPr txBox="1"/>
-          <p:nvPr/>
-        </p:nvSpPr>
-        <p:spPr>
-          <a:xfrm>
-            <a:off x="502920" y="493776"/>
-            <a:ext cx="8138160" cy="512064"/>
-          </a:xfrm>
-          <a:prstGeom prst="rect">
-            <a:avLst/>
-          </a:prstGeom>
-          <a:noFill/>
-          <a:ln/>
-        </p:spPr>
-        <p:txBody>
-          <a:bodyPr wrap="square" lIns="0" tIns="0" rIns="0" bIns="0" rtlCol="0" anchor="t"/>
-          <a:lstStyle/>
-          <a:p>
-            <a:pPr indent="0" marL="0">
-              <a:buNone/>
-            </a:pPr>
-            <a:r>
-              <a:rPr lang="en-US" sz="2500" b="1" dirty="0">
-                <a:solidFill>
-                  <a:srgbClr val="2C231C"/>
-                </a:solidFill>
-                <a:latin typeface="Sarabun" pitchFamily="34" charset="0"/>
-                <a:ea typeface="Sarabun" pitchFamily="34" charset="-122"/>
-                <a:cs typeface="Sarabun" pitchFamily="34" charset="-120"/>
-              </a:rPr>
-              <a:t>My model loses on average, and that is the finding</a:t>
-            </a:r>
-            <a:endParaRPr lang="en-US" sz="2500" dirty="0"/>
-          </a:p>
-        </p:txBody>
-      </p:sp>
-      <p:sp>
-        <p:nvSpPr>
-          <p:cNvPr id="4" name="Text 2"/>
-          <p:cNvSpPr txBox="1"/>
-          <p:nvPr/>
-        </p:nvSpPr>
-        <p:spPr>
-          <a:xfrm>
-            <a:off x="502920" y="1060704"/>
-            <a:ext cx="8138160" cy="310896"/>
-          </a:xfrm>
-          <a:prstGeom prst="rect">
-            <a:avLst/>
-          </a:prstGeom>
-          <a:noFill/>
-          <a:ln/>
-        </p:spPr>
-        <p:txBody>
-          <a:bodyPr wrap="square" lIns="0" tIns="0" rIns="0" bIns="0" rtlCol="0" anchor="t"/>
-          <a:lstStyle/>
-          <a:p>
-            <a:pPr indent="0" marL="0">
-              <a:buNone/>
-            </a:pPr>
-            <a:r>
-              <a:rPr lang="en-US" sz="1350" b="1" dirty="0">
-                <a:solidFill>
-                  <a:srgbClr val="2C231C"/>
-                </a:solidFill>
-                <a:latin typeface="Sarabun" pitchFamily="34" charset="0"/>
-                <a:ea typeface="Sarabun" pitchFamily="34" charset="-122"/>
-                <a:cs typeface="Sarabun" pitchFamily="34" charset="-120"/>
-              </a:rPr>
-              <a:t>The numbers are the average size of the miss, in µg/m³. Lower is better. Read the last column.</a:t>
-            </a:r>
-            <a:endParaRPr lang="en-US" sz="1350" dirty="0"/>
-          </a:p>
-        </p:txBody>
-      </p:sp>
-      <p:graphicFrame>
-        <p:nvGraphicFramePr>
-          <p:cNvPr id="10" name="Table 0"/>
-          <p:cNvGraphicFramePr>
-            <a:graphicFrameLocks noGrp="1"/>
-          </p:cNvGraphicFramePr>
-          <p:nvPr>
-            <p:extLst>
-              <p:ext uri="{D42A27DB-BD31-4B8C-83A1-F6EECF244321}">
-                <p14:modId xmlns:p14="http://schemas.microsoft.com/office/powerpoint/2010/main" val="1579011935"/>
-              </p:ext>
-            </p:extLst>
-          </p:nvPr>
-        </p:nvGraphicFramePr>
-        <p:xfrm>
-          <a:off x="502920" y="1536192"/>
-          <a:ext cx="8138160" cy="914400"/>
-        </p:xfrm>
-        <a:graphic>
-          <a:graphicData uri="http://schemas.openxmlformats.org/drawingml/2006/table">
-            <a:tbl>
-              <a:tblPr/>
-              <a:tblGrid>
-                <a:gridCol w="3017520"/>
-                <a:gridCol w="1554480"/>
-                <a:gridCol w="1737360"/>
-                <a:gridCol w="1828800"/>
-              </a:tblGrid>
-              <a:tr h="402336">
-                <a:tc>
-                  <a:txBody>
-                    <a:bodyPr/>
-                    <a:lstStyle/>
-                    <a:p>
-                      <a:pPr algn="l" indent="0" marL="0">
-                        <a:buNone/>
-                      </a:pPr>
-                      <a:endParaRPr lang="en-US" sz="1250" dirty="0">
-                        <a:latin typeface="Sarabun" charset="0"/>
-                        <a:ea typeface="Sarabun" charset="0"/>
-                        <a:cs typeface="Sarabun" charset="0"/>
-                      </a:endParaRPr>
-                    </a:p>
-                  </a:txBody>
-                  <a:tcPr marL="101600" marR="101600" marT="50800" marB="50800" anchor="ctr">
-                    <a:lnL w="12700" cap="flat" cmpd="sng" algn="ctr">
-                      <a:solidFill>
-                        <a:srgbClr val="E3D8C8"/>
-                      </a:solidFill>
-                      <a:prstDash val="solid"/>
-                      <a:round/>
-                      <a:headEnd type="none" w="med" len="med"/>
-                      <a:tailEnd type="none" w="med" len="med"/>
-                    </a:lnL>
-                    <a:lnR w="12700" cap="flat" cmpd="sng" algn="ctr">
-                      <a:solidFill>
-                        <a:srgbClr val="E3D8C8"/>
-                      </a:solidFill>
-                      <a:prstDash val="solid"/>
-                      <a:round/>
-                      <a:headEnd type="none" w="med" len="med"/>
-                      <a:tailEnd type="none" w="med" len="med"/>
-                    </a:lnR>
-                    <a:lnT w="12700" cap="flat" cmpd="sng" algn="ctr">
-                      <a:solidFill>
-                        <a:srgbClr val="E3D8C8"/>
-                      </a:solidFill>
-                      <a:prstDash val="solid"/>
-                      <a:round/>
-                      <a:headEnd type="none" w="med" len="med"/>
-                      <a:tailEnd type="none" w="med" len="med"/>
-                    </a:lnT>
-                    <a:lnB w="12700" cap="flat" cmpd="sng" algn="ctr">
-                      <a:solidFill>
-                        <a:srgbClr val="E3D8C8"/>
-                      </a:solidFill>
-                      <a:prstDash val="solid"/>
-                      <a:round/>
-                      <a:headEnd type="none" w="med" len="med"/>
-                      <a:tailEnd type="none" w="med" len="med"/>
-                    </a:lnB>
-                    <a:solidFill>
-                      <a:srgbClr val="F5EDE1"/>
-                    </a:solidFill>
-                  </a:tcPr>
-                </a:tc>
-                <a:tc>
-                  <a:txBody>
-                    <a:bodyPr/>
-                    <a:lstStyle/>
-                    <a:p>
-                      <a:pPr algn="r" indent="0" marL="0">
-                        <a:buNone/>
-                      </a:pPr>
-                      <a:r>
-                        <a:rPr lang="en-US" sz="1250" b="1" dirty="0">
-                          <a:solidFill>
-                            <a:srgbClr val="7C6B5B"/>
-                          </a:solidFill>
-                          <a:latin typeface="Sarabun" pitchFamily="34" charset="0"/>
-                          <a:ea typeface="Sarabun" pitchFamily="34" charset="-122"/>
-                          <a:cs typeface="Sarabun" pitchFamily="34" charset="-120"/>
-                        </a:rPr>
-                        <a:t>Ordinary days</a:t>
-                      </a:r>
-                      <a:endParaRPr lang="en-US" sz="1250" dirty="0">
-                        <a:latin typeface="Sarabun" charset="0"/>
-                        <a:ea typeface="Sarabun" charset="0"/>
-                        <a:cs typeface="Sarabun" charset="0"/>
-                      </a:endParaRPr>
-                    </a:p>
-                  </a:txBody>
-                  <a:tcPr marL="101600" marR="101600" marT="50800" marB="50800" anchor="ctr">
-                    <a:lnL w="12700" cap="flat" cmpd="sng" algn="ctr">
-                      <a:solidFill>
-                        <a:srgbClr val="E3D8C8"/>
-                      </a:solidFill>
-                      <a:prstDash val="solid"/>
-                      <a:round/>
-                      <a:headEnd type="none" w="med" len="med"/>
-                      <a:tailEnd type="none" w="med" len="med"/>
-                    </a:lnL>
-                    <a:lnR w="12700" cap="flat" cmpd="sng" algn="ctr">
-                      <a:solidFill>
-                        <a:srgbClr val="E3D8C8"/>
-                      </a:solidFill>
-                      <a:prstDash val="solid"/>
-                      <a:round/>
-                      <a:headEnd type="none" w="med" len="med"/>
-                      <a:tailEnd type="none" w="med" len="med"/>
-                    </a:lnR>
-                    <a:lnT w="12700" cap="flat" cmpd="sng" algn="ctr">
-                      <a:solidFill>
-                        <a:srgbClr val="E3D8C8"/>
-                      </a:solidFill>
-                      <a:prstDash val="solid"/>
-                      <a:round/>
-                      <a:headEnd type="none" w="med" len="med"/>
-                      <a:tailEnd type="none" w="med" len="med"/>
-                    </a:lnT>
-                    <a:lnB w="12700" cap="flat" cmpd="sng" algn="ctr">
-                      <a:solidFill>
-                        <a:srgbClr val="E3D8C8"/>
-                      </a:solidFill>
-                      <a:prstDash val="solid"/>
-                      <a:round/>
-                      <a:headEnd type="none" w="med" len="med"/>
-                      <a:tailEnd type="none" w="med" len="med"/>
-                    </a:lnB>
-                    <a:solidFill>
-                      <a:srgbClr val="F5EDE1"/>
-                    </a:solidFill>
-                  </a:tcPr>
-                </a:tc>
-                <a:tc>
-                  <a:txBody>
-                    <a:bodyPr/>
-                    <a:lstStyle/>
-                    <a:p>
-                      <a:pPr algn="r" indent="0" marL="0">
-                        <a:buNone/>
-                      </a:pPr>
-                      <a:r>
-                        <a:rPr lang="en-US" sz="1250" b="1" dirty="0">
-                          <a:solidFill>
-                            <a:srgbClr val="7C6B5B"/>
-                          </a:solidFill>
-                          <a:latin typeface="Sarabun" pitchFamily="34" charset="0"/>
-                          <a:ea typeface="Sarabun" pitchFamily="34" charset="-122"/>
-                          <a:cs typeface="Sarabun" pitchFamily="34" charset="-120"/>
-                        </a:rPr>
-                        <a:t>Burning season</a:t>
-                      </a:r>
-                      <a:endParaRPr lang="en-US" sz="1250" dirty="0">
-                        <a:latin typeface="Sarabun" charset="0"/>
-                        <a:ea typeface="Sarabun" charset="0"/>
-                        <a:cs typeface="Sarabun" charset="0"/>
-                      </a:endParaRPr>
-                    </a:p>
-                  </a:txBody>
-                  <a:tcPr marL="101600" marR="101600" marT="50800" marB="50800" anchor="ctr">
-                    <a:lnL w="12700" cap="flat" cmpd="sng" algn="ctr">
-                      <a:solidFill>
-                        <a:srgbClr val="E3D8C8"/>
-                      </a:solidFill>
-                      <a:prstDash val="solid"/>
-                      <a:round/>
-                      <a:headEnd type="none" w="med" len="med"/>
-                      <a:tailEnd type="none" w="med" len="med"/>
-                    </a:lnL>
-                    <a:lnR w="12700" cap="flat" cmpd="sng" algn="ctr">
-                      <a:solidFill>
-                        <a:srgbClr val="E3D8C8"/>
-                      </a:solidFill>
-                      <a:prstDash val="solid"/>
-                      <a:round/>
-                      <a:headEnd type="none" w="med" len="med"/>
-                      <a:tailEnd type="none" w="med" len="med"/>
-                    </a:lnR>
-                    <a:lnT w="12700" cap="flat" cmpd="sng" algn="ctr">
-                      <a:solidFill>
-                        <a:srgbClr val="E3D8C8"/>
-                      </a:solidFill>
-                      <a:prstDash val="solid"/>
-                      <a:round/>
-                      <a:headEnd type="none" w="med" len="med"/>
-                      <a:tailEnd type="none" w="med" len="med"/>
-                    </a:lnT>
-                    <a:lnB w="12700" cap="flat" cmpd="sng" algn="ctr">
-                      <a:solidFill>
-                        <a:srgbClr val="E3D8C8"/>
-                      </a:solidFill>
-                      <a:prstDash val="solid"/>
-                      <a:round/>
-                      <a:headEnd type="none" w="med" len="med"/>
-                      <a:tailEnd type="none" w="med" len="med"/>
-                    </a:lnB>
-                    <a:solidFill>
-                      <a:srgbClr val="F5EDE1"/>
-                    </a:solidFill>
-                  </a:tcPr>
-                </a:tc>
-                <a:tc>
-                  <a:txBody>
-                    <a:bodyPr/>
-                    <a:lstStyle/>
-                    <a:p>
-                      <a:pPr algn="r" indent="0" marL="0">
-                        <a:buNone/>
-                      </a:pPr>
-                      <a:r>
-                        <a:rPr lang="en-US" sz="1250" b="1" dirty="0">
-                          <a:solidFill>
-                            <a:srgbClr val="7C6B5B"/>
-                          </a:solidFill>
-                          <a:latin typeface="Sarabun" pitchFamily="34" charset="0"/>
-                          <a:ea typeface="Sarabun" pitchFamily="34" charset="-122"/>
-                          <a:cs typeface="Sarabun" pitchFamily="34" charset="-120"/>
-                        </a:rPr>
-                        <a:t>Days the air changes</a:t>
-                      </a:r>
-                      <a:endParaRPr lang="en-US" sz="1250" dirty="0">
-                        <a:latin typeface="Sarabun" charset="0"/>
-                        <a:ea typeface="Sarabun" charset="0"/>
-                        <a:cs typeface="Sarabun" charset="0"/>
-                      </a:endParaRPr>
-                    </a:p>
-                  </a:txBody>
-                  <a:tcPr marL="101600" marR="101600" marT="50800" marB="50800" anchor="ctr">
-                    <a:lnL w="12700" cap="flat" cmpd="sng" algn="ctr">
-                      <a:solidFill>
-                        <a:srgbClr val="E3D8C8"/>
-                      </a:solidFill>
-                      <a:prstDash val="solid"/>
-                      <a:round/>
-                      <a:headEnd type="none" w="med" len="med"/>
-                      <a:tailEnd type="none" w="med" len="med"/>
-                    </a:lnL>
-                    <a:lnR w="12700" cap="flat" cmpd="sng" algn="ctr">
-                      <a:solidFill>
-                        <a:srgbClr val="E3D8C8"/>
-                      </a:solidFill>
-                      <a:prstDash val="solid"/>
-                      <a:round/>
-                      <a:headEnd type="none" w="med" len="med"/>
-                      <a:tailEnd type="none" w="med" len="med"/>
-                    </a:lnR>
-                    <a:lnT w="12700" cap="flat" cmpd="sng" algn="ctr">
-                      <a:solidFill>
-                        <a:srgbClr val="E3D8C8"/>
-                      </a:solidFill>
-                      <a:prstDash val="solid"/>
-                      <a:round/>
-                      <a:headEnd type="none" w="med" len="med"/>
-                      <a:tailEnd type="none" w="med" len="med"/>
-                    </a:lnT>
-                    <a:lnB w="12700" cap="flat" cmpd="sng" algn="ctr">
-                      <a:solidFill>
-                        <a:srgbClr val="E3D8C8"/>
-                      </a:solidFill>
-                      <a:prstDash val="solid"/>
-                      <a:round/>
-                      <a:headEnd type="none" w="med" len="med"/>
-                      <a:tailEnd type="none" w="med" len="med"/>
-                    </a:lnB>
-                    <a:solidFill>
-                      <a:srgbClr val="F5EDE1"/>
-                    </a:solidFill>
-                  </a:tcPr>
-                </a:tc>
-              </a:tr>
-              <a:tr h="402336">
-                <a:tc>
-                  <a:txBody>
-                    <a:bodyPr/>
-                    <a:lstStyle/>
-                    <a:p>
-                      <a:pPr algn="l" indent="0" marL="0">
-                        <a:buNone/>
-                      </a:pPr>
-                      <a:r>
-                        <a:rPr lang="en-US" sz="1250" b="1" dirty="0">
-                          <a:solidFill>
-                            <a:srgbClr val="2C231C"/>
-                          </a:solidFill>
-                          <a:latin typeface="Sarabun" pitchFamily="34" charset="0"/>
-                          <a:ea typeface="Sarabun" pitchFamily="34" charset="-122"/>
-                          <a:cs typeface="Sarabun" pitchFamily="34" charset="-120"/>
-                        </a:rPr>
-                        <a:t>Guessing "tomorrow = today"</a:t>
-                      </a:r>
-                      <a:endParaRPr lang="en-US" sz="1250" dirty="0">
-                        <a:latin typeface="Sarabun" charset="0"/>
-                        <a:ea typeface="Sarabun" charset="0"/>
-                        <a:cs typeface="Sarabun" charset="0"/>
-                      </a:endParaRPr>
-                    </a:p>
-                  </a:txBody>
-                  <a:tcPr marL="101600" marR="101600" marT="50800" marB="50800" anchor="ctr">
-                    <a:lnL w="12700" cap="flat" cmpd="sng" algn="ctr">
-                      <a:solidFill>
-                        <a:srgbClr val="E3D8C8"/>
-                      </a:solidFill>
-                      <a:prstDash val="solid"/>
-                      <a:round/>
-                      <a:headEnd type="none" w="med" len="med"/>
-                      <a:tailEnd type="none" w="med" len="med"/>
-                    </a:lnL>
-                    <a:lnR w="12700" cap="flat" cmpd="sng" algn="ctr">
-                      <a:solidFill>
-                        <a:srgbClr val="E3D8C8"/>
-                      </a:solidFill>
-                      <a:prstDash val="solid"/>
-                      <a:round/>
-                      <a:headEnd type="none" w="med" len="med"/>
-                      <a:tailEnd type="none" w="med" len="med"/>
-                    </a:lnR>
-                    <a:lnT w="12700" cap="flat" cmpd="sng" algn="ctr">
-                      <a:solidFill>
-                        <a:srgbClr val="E3D8C8"/>
-                      </a:solidFill>
-                      <a:prstDash val="solid"/>
-                      <a:round/>
-                      <a:headEnd type="none" w="med" len="med"/>
-                      <a:tailEnd type="none" w="med" len="med"/>
-                    </a:lnT>
-                    <a:lnB w="12700" cap="flat" cmpd="sng" algn="ctr">
-                      <a:solidFill>
-                        <a:srgbClr val="E3D8C8"/>
-                      </a:solidFill>
-                      <a:prstDash val="solid"/>
-                      <a:round/>
-                      <a:headEnd type="none" w="med" len="med"/>
-                      <a:tailEnd type="none" w="med" len="med"/>
-                    </a:lnB>
-                    <a:solidFill>
-                      <a:srgbClr val="FFFDFA"/>
-                    </a:solidFill>
-                  </a:tcPr>
-                </a:tc>
-                <a:tc>
-                  <a:txBody>
-                    <a:bodyPr/>
-                    <a:lstStyle/>
-                    <a:p>
-                      <a:pPr algn="r" indent="0" marL="0">
-                        <a:buNone/>
-                      </a:pPr>
-                      <a:r>
-                        <a:rPr lang="en-US" sz="1250" dirty="0">
-                          <a:solidFill>
-                            <a:srgbClr val="2C231C"/>
-                          </a:solidFill>
-                          <a:latin typeface="Sarabun" pitchFamily="34" charset="0"/>
-                          <a:ea typeface="Sarabun" pitchFamily="34" charset="-122"/>
-                          <a:cs typeface="Sarabun" pitchFamily="34" charset="-120"/>
-                        </a:rPr>
-                        <a:t>4.118</a:t>
-                      </a:r>
-                      <a:endParaRPr lang="en-US" sz="1250" dirty="0">
-                        <a:latin typeface="Sarabun" charset="0"/>
-                        <a:ea typeface="Sarabun" charset="0"/>
-                        <a:cs typeface="Sarabun" charset="0"/>
-                      </a:endParaRPr>
-                    </a:p>
-                  </a:txBody>
-                  <a:tcPr marL="101600" marR="101600" marT="50800" marB="50800" anchor="ctr">
-                    <a:lnL w="12700" cap="flat" cmpd="sng" algn="ctr">
-                      <a:solidFill>
-                        <a:srgbClr val="E3D8C8"/>
-                      </a:solidFill>
-                      <a:prstDash val="solid"/>
-                      <a:round/>
-                      <a:headEnd type="none" w="med" len="med"/>
-                      <a:tailEnd type="none" w="med" len="med"/>
-                    </a:lnL>
-                    <a:lnR w="12700" cap="flat" cmpd="sng" algn="ctr">
-                      <a:solidFill>
-                        <a:srgbClr val="E3D8C8"/>
-                      </a:solidFill>
-                      <a:prstDash val="solid"/>
-                      <a:round/>
-                      <a:headEnd type="none" w="med" len="med"/>
-                      <a:tailEnd type="none" w="med" len="med"/>
-                    </a:lnR>
-                    <a:lnT w="12700" cap="flat" cmpd="sng" algn="ctr">
-                      <a:solidFill>
-                        <a:srgbClr val="E3D8C8"/>
-                      </a:solidFill>
-                      <a:prstDash val="solid"/>
-                      <a:round/>
-                      <a:headEnd type="none" w="med" len="med"/>
-                      <a:tailEnd type="none" w="med" len="med"/>
-                    </a:lnT>
-                    <a:lnB w="12700" cap="flat" cmpd="sng" algn="ctr">
-                      <a:solidFill>
-                        <a:srgbClr val="E3D8C8"/>
-                      </a:solidFill>
-                      <a:prstDash val="solid"/>
-                      <a:round/>
-                      <a:headEnd type="none" w="med" len="med"/>
-                      <a:tailEnd type="none" w="med" len="med"/>
-                    </a:lnB>
-                    <a:solidFill>
-                      <a:srgbClr val="FFFDFA"/>
-                    </a:solidFill>
-                  </a:tcPr>
-                </a:tc>
-                <a:tc>
-                  <a:txBody>
-                    <a:bodyPr/>
-                    <a:lstStyle/>
-                    <a:p>
-                      <a:pPr algn="r" indent="0" marL="0">
-                        <a:buNone/>
-                      </a:pPr>
-                      <a:r>
-                        <a:rPr lang="en-US" sz="1250" dirty="0">
-                          <a:solidFill>
-                            <a:srgbClr val="2C231C"/>
-                          </a:solidFill>
-                          <a:latin typeface="Sarabun" pitchFamily="34" charset="0"/>
-                          <a:ea typeface="Sarabun" pitchFamily="34" charset="-122"/>
-                          <a:cs typeface="Sarabun" pitchFamily="34" charset="-120"/>
-                        </a:rPr>
-                        <a:t>6.846</a:t>
-                      </a:r>
-                      <a:endParaRPr lang="en-US" sz="1250" dirty="0">
-                        <a:latin typeface="Sarabun" charset="0"/>
-                        <a:ea typeface="Sarabun" charset="0"/>
-                        <a:cs typeface="Sarabun" charset="0"/>
-                      </a:endParaRPr>
-                    </a:p>
-                  </a:txBody>
-                  <a:tcPr marL="101600" marR="101600" marT="50800" marB="50800" anchor="ctr">
-                    <a:lnL w="12700" cap="flat" cmpd="sng" algn="ctr">
-                      <a:solidFill>
-                        <a:srgbClr val="E3D8C8"/>
-                      </a:solidFill>
-                      <a:prstDash val="solid"/>
-                      <a:round/>
-                      <a:headEnd type="none" w="med" len="med"/>
-                      <a:tailEnd type="none" w="med" len="med"/>
-                    </a:lnL>
-                    <a:lnR w="12700" cap="flat" cmpd="sng" algn="ctr">
-                      <a:solidFill>
-                        <a:srgbClr val="E3D8C8"/>
-                      </a:solidFill>
-                      <a:prstDash val="solid"/>
-                      <a:round/>
-                      <a:headEnd type="none" w="med" len="med"/>
-                      <a:tailEnd type="none" w="med" len="med"/>
-                    </a:lnR>
-                    <a:lnT w="12700" cap="flat" cmpd="sng" algn="ctr">
-                      <a:solidFill>
-                        <a:srgbClr val="E3D8C8"/>
-                      </a:solidFill>
-                      <a:prstDash val="solid"/>
-                      <a:round/>
-                      <a:headEnd type="none" w="med" len="med"/>
-                      <a:tailEnd type="none" w="med" len="med"/>
-                    </a:lnT>
-                    <a:lnB w="12700" cap="flat" cmpd="sng" algn="ctr">
-                      <a:solidFill>
-                        <a:srgbClr val="E3D8C8"/>
-                      </a:solidFill>
-                      <a:prstDash val="solid"/>
-                      <a:round/>
-                      <a:headEnd type="none" w="med" len="med"/>
-                      <a:tailEnd type="none" w="med" len="med"/>
-                    </a:lnB>
-                    <a:solidFill>
-                      <a:srgbClr val="FFFDFA"/>
-                    </a:solidFill>
-                  </a:tcPr>
-                </a:tc>
-                <a:tc>
-                  <a:txBody>
-                    <a:bodyPr/>
-                    <a:lstStyle/>
-                    <a:p>
-                      <a:pPr algn="r" indent="0" marL="0">
-                        <a:buNone/>
-                      </a:pPr>
-                      <a:r>
-                        <a:rPr lang="en-US" sz="1250" dirty="0">
-                          <a:solidFill>
-                            <a:srgbClr val="BF5722"/>
-                          </a:solidFill>
-                          <a:latin typeface="Sarabun" pitchFamily="34" charset="0"/>
-                          <a:ea typeface="Sarabun" pitchFamily="34" charset="-122"/>
-                          <a:cs typeface="Sarabun" pitchFamily="34" charset="-120"/>
-                        </a:rPr>
-                        <a:t>14.079</a:t>
-                      </a:r>
-                      <a:endParaRPr lang="en-US" sz="1250" dirty="0">
-                        <a:latin typeface="Sarabun" charset="0"/>
-                        <a:ea typeface="Sarabun" charset="0"/>
-                        <a:cs typeface="Sarabun" charset="0"/>
-                      </a:endParaRPr>
-                    </a:p>
-                  </a:txBody>
-                  <a:tcPr marL="101600" marR="101600" marT="50800" marB="50800" anchor="ctr">
-                    <a:lnL w="12700" cap="flat" cmpd="sng" algn="ctr">
-                      <a:solidFill>
-                        <a:srgbClr val="E3D8C8"/>
-                      </a:solidFill>
-                      <a:prstDash val="solid"/>
-                      <a:round/>
-                      <a:headEnd type="none" w="med" len="med"/>
-                      <a:tailEnd type="none" w="med" len="med"/>
-                    </a:lnL>
-                    <a:lnR w="12700" cap="flat" cmpd="sng" algn="ctr">
-                      <a:solidFill>
-                        <a:srgbClr val="E3D8C8"/>
-                      </a:solidFill>
-                      <a:prstDash val="solid"/>
-                      <a:round/>
-                      <a:headEnd type="none" w="med" len="med"/>
-                      <a:tailEnd type="none" w="med" len="med"/>
-                    </a:lnR>
-                    <a:lnT w="12700" cap="flat" cmpd="sng" algn="ctr">
-                      <a:solidFill>
-                        <a:srgbClr val="E3D8C8"/>
-                      </a:solidFill>
-                      <a:prstDash val="solid"/>
-                      <a:round/>
-                      <a:headEnd type="none" w="med" len="med"/>
-                      <a:tailEnd type="none" w="med" len="med"/>
-                    </a:lnT>
-                    <a:lnB w="12700" cap="flat" cmpd="sng" algn="ctr">
-                      <a:solidFill>
-                        <a:srgbClr val="E3D8C8"/>
-                      </a:solidFill>
-                      <a:prstDash val="solid"/>
-                      <a:round/>
-                      <a:headEnd type="none" w="med" len="med"/>
-                      <a:tailEnd type="none" w="med" len="med"/>
-                    </a:lnB>
-                    <a:solidFill>
-                      <a:srgbClr val="FFFDFA"/>
-                    </a:solidFill>
-                  </a:tcPr>
-                </a:tc>
-              </a:tr>
-              <a:tr h="402336">
-                <a:tc>
-                  <a:txBody>
-                    <a:bodyPr/>
-                    <a:lstStyle/>
-                    <a:p>
-                      <a:pPr algn="l" indent="0" marL="0">
-                        <a:buNone/>
-                      </a:pPr>
-                      <a:r>
-                        <a:rPr lang="en-US" sz="1250" b="1" dirty="0">
-                          <a:solidFill>
-                            <a:srgbClr val="2C231C"/>
-                          </a:solidFill>
-                          <a:latin typeface="Sarabun" pitchFamily="34" charset="0"/>
-                          <a:ea typeface="Sarabun" pitchFamily="34" charset="-122"/>
-                          <a:cs typeface="Sarabun" pitchFamily="34" charset="-120"/>
-                        </a:rPr>
-                        <a:t>Ridge regression</a:t>
-                      </a:r>
-                      <a:endParaRPr lang="en-US" sz="1250" dirty="0">
-                        <a:latin typeface="Sarabun" charset="0"/>
-                        <a:ea typeface="Sarabun" charset="0"/>
-                        <a:cs typeface="Sarabun" charset="0"/>
-                      </a:endParaRPr>
-                    </a:p>
-                  </a:txBody>
-                  <a:tcPr marL="101600" marR="101600" marT="50800" marB="50800" anchor="ctr">
-                    <a:lnL w="12700" cap="flat" cmpd="sng" algn="ctr">
-                      <a:solidFill>
-                        <a:srgbClr val="E3D8C8"/>
-                      </a:solidFill>
-                      <a:prstDash val="solid"/>
-                      <a:round/>
-                      <a:headEnd type="none" w="med" len="med"/>
-                      <a:tailEnd type="none" w="med" len="med"/>
-                    </a:lnL>
-                    <a:lnR w="12700" cap="flat" cmpd="sng" algn="ctr">
-                      <a:solidFill>
-                        <a:srgbClr val="E3D8C8"/>
-                      </a:solidFill>
-                      <a:prstDash val="solid"/>
-                      <a:round/>
-                      <a:headEnd type="none" w="med" len="med"/>
-                      <a:tailEnd type="none" w="med" len="med"/>
-                    </a:lnR>
-                    <a:lnT w="12700" cap="flat" cmpd="sng" algn="ctr">
-                      <a:solidFill>
-                        <a:srgbClr val="E3D8C8"/>
-                      </a:solidFill>
-                      <a:prstDash val="solid"/>
-                      <a:round/>
-                      <a:headEnd type="none" w="med" len="med"/>
-                      <a:tailEnd type="none" w="med" len="med"/>
-                    </a:lnT>
-                    <a:lnB w="12700" cap="flat" cmpd="sng" algn="ctr">
-                      <a:solidFill>
-                        <a:srgbClr val="E3D8C8"/>
-                      </a:solidFill>
-                      <a:prstDash val="solid"/>
-                      <a:round/>
-                      <a:headEnd type="none" w="med" len="med"/>
-                      <a:tailEnd type="none" w="med" len="med"/>
-                    </a:lnB>
-                    <a:solidFill>
-                      <a:srgbClr val="FFFDFA"/>
-                    </a:solidFill>
-                  </a:tcPr>
-                </a:tc>
-                <a:tc>
-                  <a:txBody>
-                    <a:bodyPr/>
-                    <a:lstStyle/>
-                    <a:p>
-                      <a:pPr algn="r" indent="0" marL="0">
-                        <a:buNone/>
-                      </a:pPr>
-                      <a:r>
-                        <a:rPr lang="en-US" sz="1250" dirty="0">
-                          <a:solidFill>
-                            <a:srgbClr val="2C231C"/>
-                          </a:solidFill>
-                          <a:latin typeface="Sarabun" pitchFamily="34" charset="0"/>
-                          <a:ea typeface="Sarabun" pitchFamily="34" charset="-122"/>
-                          <a:cs typeface="Sarabun" pitchFamily="34" charset="-120"/>
-                        </a:rPr>
-                        <a:t>4.303</a:t>
-                      </a:r>
-                      <a:endParaRPr lang="en-US" sz="1250" dirty="0">
-                        <a:latin typeface="Sarabun" charset="0"/>
-                        <a:ea typeface="Sarabun" charset="0"/>
-                        <a:cs typeface="Sarabun" charset="0"/>
-                      </a:endParaRPr>
-                    </a:p>
-                  </a:txBody>
-                  <a:tcPr marL="101600" marR="101600" marT="50800" marB="50800" anchor="ctr">
-                    <a:lnL w="12700" cap="flat" cmpd="sng" algn="ctr">
-                      <a:solidFill>
-                        <a:srgbClr val="E3D8C8"/>
-                      </a:solidFill>
-                      <a:prstDash val="solid"/>
-                      <a:round/>
-                      <a:headEnd type="none" w="med" len="med"/>
-                      <a:tailEnd type="none" w="med" len="med"/>
-                    </a:lnL>
-                    <a:lnR w="12700" cap="flat" cmpd="sng" algn="ctr">
-                      <a:solidFill>
-                        <a:srgbClr val="E3D8C8"/>
-                      </a:solidFill>
-                      <a:prstDash val="solid"/>
-                      <a:round/>
-                      <a:headEnd type="none" w="med" len="med"/>
-                      <a:tailEnd type="none" w="med" len="med"/>
-                    </a:lnR>
-                    <a:lnT w="12700" cap="flat" cmpd="sng" algn="ctr">
-                      <a:solidFill>
-                        <a:srgbClr val="E3D8C8"/>
-                      </a:solidFill>
-                      <a:prstDash val="solid"/>
-                      <a:round/>
-                      <a:headEnd type="none" w="med" len="med"/>
-                      <a:tailEnd type="none" w="med" len="med"/>
-                    </a:lnT>
-                    <a:lnB w="12700" cap="flat" cmpd="sng" algn="ctr">
-                      <a:solidFill>
-                        <a:srgbClr val="E3D8C8"/>
-                      </a:solidFill>
-                      <a:prstDash val="solid"/>
-                      <a:round/>
-                      <a:headEnd type="none" w="med" len="med"/>
-                      <a:tailEnd type="none" w="med" len="med"/>
-                    </a:lnB>
-                    <a:solidFill>
-                      <a:srgbClr val="FFFDFA"/>
-                    </a:solidFill>
-                  </a:tcPr>
-                </a:tc>
-                <a:tc>
-                  <a:txBody>
-                    <a:bodyPr/>
-                    <a:lstStyle/>
-                    <a:p>
-                      <a:pPr algn="r" indent="0" marL="0">
-                        <a:buNone/>
-                      </a:pPr>
-                      <a:r>
-                        <a:rPr lang="en-US" sz="1250" dirty="0">
-                          <a:solidFill>
-                            <a:srgbClr val="2C231C"/>
-                          </a:solidFill>
-                          <a:latin typeface="Sarabun" pitchFamily="34" charset="0"/>
-                          <a:ea typeface="Sarabun" pitchFamily="34" charset="-122"/>
-                          <a:cs typeface="Sarabun" pitchFamily="34" charset="-120"/>
-                        </a:rPr>
-                        <a:t>6.529</a:t>
-                      </a:r>
-                      <a:endParaRPr lang="en-US" sz="1250" dirty="0">
-                        <a:latin typeface="Sarabun" charset="0"/>
-                        <a:ea typeface="Sarabun" charset="0"/>
-                        <a:cs typeface="Sarabun" charset="0"/>
-                      </a:endParaRPr>
-                    </a:p>
-                  </a:txBody>
-                  <a:tcPr marL="101600" marR="101600" marT="50800" marB="50800" anchor="ctr">
-                    <a:lnL w="12700" cap="flat" cmpd="sng" algn="ctr">
-                      <a:solidFill>
-                        <a:srgbClr val="E3D8C8"/>
-                      </a:solidFill>
-                      <a:prstDash val="solid"/>
-                      <a:round/>
-                      <a:headEnd type="none" w="med" len="med"/>
-                      <a:tailEnd type="none" w="med" len="med"/>
-                    </a:lnL>
-                    <a:lnR w="12700" cap="flat" cmpd="sng" algn="ctr">
-                      <a:solidFill>
-                        <a:srgbClr val="E3D8C8"/>
-                      </a:solidFill>
-                      <a:prstDash val="solid"/>
-                      <a:round/>
-                      <a:headEnd type="none" w="med" len="med"/>
-                      <a:tailEnd type="none" w="med" len="med"/>
-                    </a:lnR>
-                    <a:lnT w="12700" cap="flat" cmpd="sng" algn="ctr">
-                      <a:solidFill>
-                        <a:srgbClr val="E3D8C8"/>
-                      </a:solidFill>
-                      <a:prstDash val="solid"/>
-                      <a:round/>
-                      <a:headEnd type="none" w="med" len="med"/>
-                      <a:tailEnd type="none" w="med" len="med"/>
-                    </a:lnT>
-                    <a:lnB w="12700" cap="flat" cmpd="sng" algn="ctr">
-                      <a:solidFill>
-                        <a:srgbClr val="E3D8C8"/>
-                      </a:solidFill>
-                      <a:prstDash val="solid"/>
-                      <a:round/>
-                      <a:headEnd type="none" w="med" len="med"/>
-                      <a:tailEnd type="none" w="med" len="med"/>
-                    </a:lnB>
-                    <a:solidFill>
-                      <a:srgbClr val="FFFDFA"/>
-                    </a:solidFill>
-                  </a:tcPr>
-                </a:tc>
-                <a:tc>
-                  <a:txBody>
-                    <a:bodyPr/>
-                    <a:lstStyle/>
-                    <a:p>
-                      <a:pPr algn="r" indent="0" marL="0">
-                        <a:buNone/>
-                      </a:pPr>
-                      <a:r>
-                        <a:rPr lang="en-US" sz="1250" dirty="0">
-                          <a:solidFill>
-                            <a:srgbClr val="BF5722"/>
-                          </a:solidFill>
-                          <a:latin typeface="Sarabun" pitchFamily="34" charset="0"/>
-                          <a:ea typeface="Sarabun" pitchFamily="34" charset="-122"/>
-                          <a:cs typeface="Sarabun" pitchFamily="34" charset="-120"/>
-                        </a:rPr>
-                        <a:t>11.791</a:t>
-                      </a:r>
-                      <a:endParaRPr lang="en-US" sz="1250" dirty="0">
-                        <a:latin typeface="Sarabun" charset="0"/>
-                        <a:ea typeface="Sarabun" charset="0"/>
-                        <a:cs typeface="Sarabun" charset="0"/>
-                      </a:endParaRPr>
-                    </a:p>
-                  </a:txBody>
-                  <a:tcPr marL="101600" marR="101600" marT="50800" marB="50800" anchor="ctr">
-                    <a:lnL w="12700" cap="flat" cmpd="sng" algn="ctr">
-                      <a:solidFill>
-                        <a:srgbClr val="E3D8C8"/>
-                      </a:solidFill>
-                      <a:prstDash val="solid"/>
-                      <a:round/>
-                      <a:headEnd type="none" w="med" len="med"/>
-                      <a:tailEnd type="none" w="med" len="med"/>
-                    </a:lnL>
-                    <a:lnR w="12700" cap="flat" cmpd="sng" algn="ctr">
-                      <a:solidFill>
-                        <a:srgbClr val="E3D8C8"/>
-                      </a:solidFill>
-                      <a:prstDash val="solid"/>
-                      <a:round/>
-                      <a:headEnd type="none" w="med" len="med"/>
-                      <a:tailEnd type="none" w="med" len="med"/>
-                    </a:lnR>
-                    <a:lnT w="12700" cap="flat" cmpd="sng" algn="ctr">
-                      <a:solidFill>
-                        <a:srgbClr val="E3D8C8"/>
-                      </a:solidFill>
-                      <a:prstDash val="solid"/>
-                      <a:round/>
-                      <a:headEnd type="none" w="med" len="med"/>
-                      <a:tailEnd type="none" w="med" len="med"/>
-                    </a:lnT>
-                    <a:lnB w="12700" cap="flat" cmpd="sng" algn="ctr">
-                      <a:solidFill>
-                        <a:srgbClr val="E3D8C8"/>
-                      </a:solidFill>
-                      <a:prstDash val="solid"/>
-                      <a:round/>
-                      <a:headEnd type="none" w="med" len="med"/>
-                      <a:tailEnd type="none" w="med" len="med"/>
-                    </a:lnB>
-                    <a:solidFill>
-                      <a:srgbClr val="FFFDFA"/>
-                    </a:solidFill>
-                  </a:tcPr>
-                </a:tc>
-              </a:tr>
-              <a:tr h="402336">
-                <a:tc>
-                  <a:txBody>
-                    <a:bodyPr/>
-                    <a:lstStyle/>
-                    <a:p>
-                      <a:pPr algn="l" indent="0" marL="0">
-                        <a:buNone/>
-                      </a:pPr>
-                      <a:r>
-                        <a:rPr lang="en-US" sz="1250" b="1" dirty="0">
-                          <a:solidFill>
-                            <a:srgbClr val="2C231C"/>
-                          </a:solidFill>
-                          <a:latin typeface="Sarabun" pitchFamily="34" charset="0"/>
-                          <a:ea typeface="Sarabun" pitchFamily="34" charset="-122"/>
-                          <a:cs typeface="Sarabun" pitchFamily="34" charset="-120"/>
-                        </a:rPr>
-                        <a:t>Gradient boosting</a:t>
-                      </a:r>
-                      <a:endParaRPr lang="en-US" sz="1250" dirty="0">
-                        <a:latin typeface="Sarabun" charset="0"/>
-                        <a:ea typeface="Sarabun" charset="0"/>
-                        <a:cs typeface="Sarabun" charset="0"/>
-                      </a:endParaRPr>
-                    </a:p>
-                  </a:txBody>
-                  <a:tcPr marL="101600" marR="101600" marT="50800" marB="50800" anchor="ctr">
-                    <a:lnL w="12700" cap="flat" cmpd="sng" algn="ctr">
-                      <a:solidFill>
-                        <a:srgbClr val="E3D8C8"/>
-                      </a:solidFill>
-                      <a:prstDash val="solid"/>
-                      <a:round/>
-                      <a:headEnd type="none" w="med" len="med"/>
-                      <a:tailEnd type="none" w="med" len="med"/>
-                    </a:lnL>
-                    <a:lnR w="12700" cap="flat" cmpd="sng" algn="ctr">
-                      <a:solidFill>
-                        <a:srgbClr val="E3D8C8"/>
-                      </a:solidFill>
-                      <a:prstDash val="solid"/>
-                      <a:round/>
-                      <a:headEnd type="none" w="med" len="med"/>
-                      <a:tailEnd type="none" w="med" len="med"/>
-                    </a:lnR>
-                    <a:lnT w="12700" cap="flat" cmpd="sng" algn="ctr">
-                      <a:solidFill>
-                        <a:srgbClr val="E3D8C8"/>
-                      </a:solidFill>
-                      <a:prstDash val="solid"/>
-                      <a:round/>
-                      <a:headEnd type="none" w="med" len="med"/>
-                      <a:tailEnd type="none" w="med" len="med"/>
-                    </a:lnT>
-                    <a:lnB w="12700" cap="flat" cmpd="sng" algn="ctr">
-                      <a:solidFill>
-                        <a:srgbClr val="E3D8C8"/>
-                      </a:solidFill>
-                      <a:prstDash val="solid"/>
-                      <a:round/>
-                      <a:headEnd type="none" w="med" len="med"/>
-                      <a:tailEnd type="none" w="med" len="med"/>
-                    </a:lnB>
-                    <a:solidFill>
-                      <a:srgbClr val="FFFDFA"/>
-                    </a:solidFill>
-                  </a:tcPr>
-                </a:tc>
-                <a:tc>
-                  <a:txBody>
-                    <a:bodyPr/>
-                    <a:lstStyle/>
-                    <a:p>
-                      <a:pPr algn="r" indent="0" marL="0">
-                        <a:buNone/>
-                      </a:pPr>
-                      <a:r>
-                        <a:rPr lang="en-US" sz="1250" dirty="0">
-                          <a:solidFill>
-                            <a:srgbClr val="2C231C"/>
-                          </a:solidFill>
-                          <a:latin typeface="Sarabun" pitchFamily="34" charset="0"/>
-                          <a:ea typeface="Sarabun" pitchFamily="34" charset="-122"/>
-                          <a:cs typeface="Sarabun" pitchFamily="34" charset="-120"/>
-                        </a:rPr>
-                        <a:t>3.946</a:t>
-                      </a:r>
-                      <a:endParaRPr lang="en-US" sz="1250" dirty="0">
-                        <a:latin typeface="Sarabun" charset="0"/>
-                        <a:ea typeface="Sarabun" charset="0"/>
-                        <a:cs typeface="Sarabun" charset="0"/>
-                      </a:endParaRPr>
-                    </a:p>
-                  </a:txBody>
-                  <a:tcPr marL="101600" marR="101600" marT="50800" marB="50800" anchor="ctr">
-                    <a:lnL w="12700" cap="flat" cmpd="sng" algn="ctr">
-                      <a:solidFill>
-                        <a:srgbClr val="E3D8C8"/>
-                      </a:solidFill>
-                      <a:prstDash val="solid"/>
-                      <a:round/>
-                      <a:headEnd type="none" w="med" len="med"/>
-                      <a:tailEnd type="none" w="med" len="med"/>
-                    </a:lnL>
-                    <a:lnR w="12700" cap="flat" cmpd="sng" algn="ctr">
-                      <a:solidFill>
-                        <a:srgbClr val="E3D8C8"/>
-                      </a:solidFill>
-                      <a:prstDash val="solid"/>
-                      <a:round/>
-                      <a:headEnd type="none" w="med" len="med"/>
-                      <a:tailEnd type="none" w="med" len="med"/>
-                    </a:lnR>
-                    <a:lnT w="12700" cap="flat" cmpd="sng" algn="ctr">
-                      <a:solidFill>
-                        <a:srgbClr val="E3D8C8"/>
-                      </a:solidFill>
-                      <a:prstDash val="solid"/>
-                      <a:round/>
-                      <a:headEnd type="none" w="med" len="med"/>
-                      <a:tailEnd type="none" w="med" len="med"/>
-                    </a:lnT>
-                    <a:lnB w="12700" cap="flat" cmpd="sng" algn="ctr">
-                      <a:solidFill>
-                        <a:srgbClr val="E3D8C8"/>
-                      </a:solidFill>
-                      <a:prstDash val="solid"/>
-                      <a:round/>
-                      <a:headEnd type="none" w="med" len="med"/>
-                      <a:tailEnd type="none" w="med" len="med"/>
-                    </a:lnB>
-                    <a:solidFill>
-                      <a:srgbClr val="FFFDFA"/>
-                    </a:solidFill>
-                  </a:tcPr>
-                </a:tc>
-                <a:tc>
-                  <a:txBody>
-                    <a:bodyPr/>
-                    <a:lstStyle/>
-                    <a:p>
-                      <a:pPr algn="r" indent="0" marL="0">
-                        <a:buNone/>
-                      </a:pPr>
-                      <a:r>
-                        <a:rPr lang="en-US" sz="1250" dirty="0">
-                          <a:solidFill>
-                            <a:srgbClr val="2C231C"/>
-                          </a:solidFill>
-                          <a:latin typeface="Sarabun" pitchFamily="34" charset="0"/>
-                          <a:ea typeface="Sarabun" pitchFamily="34" charset="-122"/>
-                          <a:cs typeface="Sarabun" pitchFamily="34" charset="-120"/>
-                        </a:rPr>
-                        <a:t>6.424</a:t>
-                      </a:r>
-                      <a:endParaRPr lang="en-US" sz="1250" dirty="0">
-                        <a:latin typeface="Sarabun" charset="0"/>
-                        <a:ea typeface="Sarabun" charset="0"/>
-                        <a:cs typeface="Sarabun" charset="0"/>
-                      </a:endParaRPr>
-                    </a:p>
-                  </a:txBody>
-                  <a:tcPr marL="101600" marR="101600" marT="50800" marB="50800" anchor="ctr">
-                    <a:lnL w="12700" cap="flat" cmpd="sng" algn="ctr">
-                      <a:solidFill>
-                        <a:srgbClr val="E3D8C8"/>
-                      </a:solidFill>
-                      <a:prstDash val="solid"/>
-                      <a:round/>
-                      <a:headEnd type="none" w="med" len="med"/>
-                      <a:tailEnd type="none" w="med" len="med"/>
-                    </a:lnL>
-                    <a:lnR w="12700" cap="flat" cmpd="sng" algn="ctr">
-                      <a:solidFill>
-                        <a:srgbClr val="E3D8C8"/>
-                      </a:solidFill>
-                      <a:prstDash val="solid"/>
-                      <a:round/>
-                      <a:headEnd type="none" w="med" len="med"/>
-                      <a:tailEnd type="none" w="med" len="med"/>
-                    </a:lnR>
-                    <a:lnT w="12700" cap="flat" cmpd="sng" algn="ctr">
-                      <a:solidFill>
-                        <a:srgbClr val="E3D8C8"/>
-                      </a:solidFill>
-                      <a:prstDash val="solid"/>
-                      <a:round/>
-                      <a:headEnd type="none" w="med" len="med"/>
-                      <a:tailEnd type="none" w="med" len="med"/>
-                    </a:lnT>
-                    <a:lnB w="12700" cap="flat" cmpd="sng" algn="ctr">
-                      <a:solidFill>
-                        <a:srgbClr val="E3D8C8"/>
-                      </a:solidFill>
-                      <a:prstDash val="solid"/>
-                      <a:round/>
-                      <a:headEnd type="none" w="med" len="med"/>
-                      <a:tailEnd type="none" w="med" len="med"/>
-                    </a:lnB>
-                    <a:solidFill>
-                      <a:srgbClr val="FFFDFA"/>
-                    </a:solidFill>
-                  </a:tcPr>
-                </a:tc>
-                <a:tc>
-                  <a:txBody>
-                    <a:bodyPr/>
-                    <a:lstStyle/>
-                    <a:p>
-                      <a:pPr algn="r" indent="0" marL="0">
-                        <a:buNone/>
-                      </a:pPr>
-                      <a:r>
-                        <a:rPr lang="en-US" sz="1250" dirty="0">
-                          <a:solidFill>
-                            <a:srgbClr val="BF5722"/>
-                          </a:solidFill>
-                          <a:latin typeface="Sarabun" pitchFamily="34" charset="0"/>
-                          <a:ea typeface="Sarabun" pitchFamily="34" charset="-122"/>
-                          <a:cs typeface="Sarabun" pitchFamily="34" charset="-120"/>
-                        </a:rPr>
-                        <a:t>12.098</a:t>
-                      </a:r>
-                      <a:endParaRPr lang="en-US" sz="1250" dirty="0">
-                        <a:latin typeface="Sarabun" charset="0"/>
-                        <a:ea typeface="Sarabun" charset="0"/>
-                        <a:cs typeface="Sarabun" charset="0"/>
-                      </a:endParaRPr>
-                    </a:p>
-                  </a:txBody>
-                  <a:tcPr marL="101600" marR="101600" marT="50800" marB="50800" anchor="ctr">
-                    <a:lnL w="12700" cap="flat" cmpd="sng" algn="ctr">
-                      <a:solidFill>
-                        <a:srgbClr val="E3D8C8"/>
-                      </a:solidFill>
-                      <a:prstDash val="solid"/>
-                      <a:round/>
-                      <a:headEnd type="none" w="med" len="med"/>
-                      <a:tailEnd type="none" w="med" len="med"/>
-                    </a:lnL>
-                    <a:lnR w="12700" cap="flat" cmpd="sng" algn="ctr">
-                      <a:solidFill>
-                        <a:srgbClr val="E3D8C8"/>
-                      </a:solidFill>
-                      <a:prstDash val="solid"/>
-                      <a:round/>
-                      <a:headEnd type="none" w="med" len="med"/>
-                      <a:tailEnd type="none" w="med" len="med"/>
-                    </a:lnR>
-                    <a:lnT w="12700" cap="flat" cmpd="sng" algn="ctr">
-                      <a:solidFill>
-                        <a:srgbClr val="E3D8C8"/>
-                      </a:solidFill>
-                      <a:prstDash val="solid"/>
-                      <a:round/>
-                      <a:headEnd type="none" w="med" len="med"/>
-                      <a:tailEnd type="none" w="med" len="med"/>
-                    </a:lnT>
-                    <a:lnB w="12700" cap="flat" cmpd="sng" algn="ctr">
-                      <a:solidFill>
-                        <a:srgbClr val="E3D8C8"/>
-                      </a:solidFill>
-                      <a:prstDash val="solid"/>
-                      <a:round/>
-                      <a:headEnd type="none" w="med" len="med"/>
-                      <a:tailEnd type="none" w="med" len="med"/>
-                    </a:lnB>
-                    <a:solidFill>
-                      <a:srgbClr val="FFFDFA"/>
-                    </a:solidFill>
-                  </a:tcPr>
-                </a:tc>
-              </a:tr>
-            </a:tbl>
-          </a:graphicData>
-        </a:graphic>
-      </p:graphicFrame>
-      <p:graphicFrame>
-        <p:nvGraphicFramePr>
-          <p:cNvPr id="19" name="Table 1"/>
-          <p:cNvGraphicFramePr>
-            <a:graphicFrameLocks noGrp="1"/>
-          </p:cNvGraphicFramePr>
-          <p:nvPr>
-            <p:extLst>
-              <p:ext uri="{D42A27DB-BD31-4B8C-83A1-F6EECF244321}">
-                <p14:modId xmlns:p14="http://schemas.microsoft.com/office/powerpoint/2010/main" val="1579011935"/>
-              </p:ext>
-            </p:extLst>
-          </p:nvPr>
-        </p:nvGraphicFramePr>
-        <p:xfrm>
-          <a:off x="502920" y="3163824"/>
-          <a:ext cx="8138160" cy="914400"/>
-        </p:xfrm>
-        <a:graphic>
-          <a:graphicData uri="http://schemas.openxmlformats.org/drawingml/2006/table">
-            <a:tbl>
-              <a:tblPr/>
-              <a:tblGrid>
-                <a:gridCol w="3017520"/>
-                <a:gridCol w="5120640"/>
-              </a:tblGrid>
-              <a:tr h="365760">
-                <a:tc>
-                  <a:txBody>
-                    <a:bodyPr/>
-                    <a:lstStyle/>
-                    <a:p>
-                      <a:pPr algn="l" indent="0" marL="0">
-                        <a:buNone/>
-                      </a:pPr>
-                      <a:r>
-                        <a:rPr lang="en-US" sz="1100" b="1" dirty="0">
-                          <a:solidFill>
-                            <a:srgbClr val="2C231C"/>
-                          </a:solidFill>
-                          <a:latin typeface="Sarabun" pitchFamily="34" charset="0"/>
-                          <a:ea typeface="Sarabun" pitchFamily="34" charset="-122"/>
-                          <a:cs typeface="Sarabun" pitchFamily="34" charset="-120"/>
-                        </a:rPr>
-                        <a:t>On ordinary days it barely wins</a:t>
-                      </a:r>
-                      <a:endParaRPr lang="en-US" sz="1100" dirty="0">
-                        <a:latin typeface="Sarabun" charset="0"/>
-                        <a:ea typeface="Sarabun" charset="0"/>
-                        <a:cs typeface="Sarabun" charset="0"/>
-                      </a:endParaRPr>
-                    </a:p>
-                  </a:txBody>
-                  <a:tcPr marL="101600" marR="101600" marT="50800" marB="50800" anchor="ctr">
-                    <a:lnL w="12700" cap="flat" cmpd="sng" algn="ctr">
-                      <a:solidFill>
-                        <a:srgbClr val="E3D8C8"/>
-                      </a:solidFill>
-                      <a:prstDash val="solid"/>
-                      <a:round/>
-                      <a:headEnd type="none" w="med" len="med"/>
-                      <a:tailEnd type="none" w="med" len="med"/>
-                    </a:lnL>
-                    <a:lnR w="12700" cap="flat" cmpd="sng" algn="ctr">
-                      <a:solidFill>
-                        <a:srgbClr val="E3D8C8"/>
-                      </a:solidFill>
-                      <a:prstDash val="solid"/>
-                      <a:round/>
-                      <a:headEnd type="none" w="med" len="med"/>
-                      <a:tailEnd type="none" w="med" len="med"/>
-                    </a:lnR>
-                    <a:lnT w="12700" cap="flat" cmpd="sng" algn="ctr">
-                      <a:solidFill>
-                        <a:srgbClr val="E3D8C8"/>
-                      </a:solidFill>
-                      <a:prstDash val="solid"/>
-                      <a:round/>
-                      <a:headEnd type="none" w="med" len="med"/>
-                      <a:tailEnd type="none" w="med" len="med"/>
-                    </a:lnT>
-                    <a:lnB w="12700" cap="flat" cmpd="sng" algn="ctr">
-                      <a:solidFill>
-                        <a:srgbClr val="E3D8C8"/>
-                      </a:solidFill>
-                      <a:prstDash val="solid"/>
-                      <a:round/>
-                      <a:headEnd type="none" w="med" len="med"/>
-                      <a:tailEnd type="none" w="med" len="med"/>
-                    </a:lnB>
-                    <a:solidFill>
-                      <a:srgbClr val="FFFDFA"/>
-                    </a:solidFill>
-                  </a:tcPr>
-                </a:tc>
-                <a:tc>
-                  <a:txBody>
-                    <a:bodyPr/>
-                    <a:lstStyle/>
-                    <a:p>
-                      <a:pPr algn="l" indent="0" marL="0">
-                        <a:buNone/>
-                      </a:pPr>
-                      <a:r>
-                        <a:rPr lang="en-US" sz="1100" dirty="0">
-                          <a:solidFill>
-                            <a:srgbClr val="2C231C"/>
-                          </a:solidFill>
-                          <a:latin typeface="Sarabun" pitchFamily="34" charset="0"/>
-                          <a:ea typeface="Sarabun" pitchFamily="34" charset="-122"/>
-                          <a:cs typeface="Sarabun" pitchFamily="34" charset="-120"/>
-                        </a:rPr>
-                        <a:t>3.95 against 3.98, which is smaller than the 5.38 gap the data itself carries. Not worth claiming</a:t>
-                      </a:r>
-                      <a:endParaRPr lang="en-US" sz="1100" dirty="0">
-                        <a:latin typeface="Sarabun" charset="0"/>
-                        <a:ea typeface="Sarabun" charset="0"/>
-                        <a:cs typeface="Sarabun" charset="0"/>
-                      </a:endParaRPr>
-                    </a:p>
-                  </a:txBody>
-                  <a:tcPr marL="101600" marR="101600" marT="50800" marB="50800" anchor="ctr">
-                    <a:lnL w="12700" cap="flat" cmpd="sng" algn="ctr">
-                      <a:solidFill>
-                        <a:srgbClr val="E3D8C8"/>
-                      </a:solidFill>
-                      <a:prstDash val="solid"/>
-                      <a:round/>
-                      <a:headEnd type="none" w="med" len="med"/>
-                      <a:tailEnd type="none" w="med" len="med"/>
-                    </a:lnL>
-                    <a:lnR w="12700" cap="flat" cmpd="sng" algn="ctr">
-                      <a:solidFill>
-                        <a:srgbClr val="E3D8C8"/>
-                      </a:solidFill>
-                      <a:prstDash val="solid"/>
-                      <a:round/>
-                      <a:headEnd type="none" w="med" len="med"/>
-                      <a:tailEnd type="none" w="med" len="med"/>
-                    </a:lnR>
-                    <a:lnT w="12700" cap="flat" cmpd="sng" algn="ctr">
-                      <a:solidFill>
-                        <a:srgbClr val="E3D8C8"/>
-                      </a:solidFill>
-                      <a:prstDash val="solid"/>
-                      <a:round/>
-                      <a:headEnd type="none" w="med" len="med"/>
-                      <a:tailEnd type="none" w="med" len="med"/>
-                    </a:lnT>
-                    <a:lnB w="12700" cap="flat" cmpd="sng" algn="ctr">
-                      <a:solidFill>
-                        <a:srgbClr val="E3D8C8"/>
-                      </a:solidFill>
-                      <a:prstDash val="solid"/>
-                      <a:round/>
-                      <a:headEnd type="none" w="med" len="med"/>
-                      <a:tailEnd type="none" w="med" len="med"/>
-                    </a:lnB>
-                    <a:solidFill>
-                      <a:srgbClr val="FFFDFA"/>
-                    </a:solidFill>
-                  </a:tcPr>
-                </a:tc>
-              </a:tr>
-              <a:tr h="365760">
-                <a:tc>
-                  <a:txBody>
-                    <a:bodyPr/>
-                    <a:lstStyle/>
-                    <a:p>
-                      <a:pPr algn="l" indent="0" marL="0">
-                        <a:buNone/>
-                      </a:pPr>
-                      <a:r>
-                        <a:rPr lang="en-US" sz="1100" b="1" dirty="0">
-                          <a:solidFill>
-                            <a:srgbClr val="2C231C"/>
-                          </a:solidFill>
-                          <a:latin typeface="Sarabun" pitchFamily="34" charset="0"/>
-                          <a:ea typeface="Sarabun" pitchFamily="34" charset="-122"/>
-                          <a:cs typeface="Sarabun" pitchFamily="34" charset="-120"/>
-                        </a:rPr>
-                        <a:t>On the days that matter it wins clearly</a:t>
-                      </a:r>
-                      <a:endParaRPr lang="en-US" sz="1100" dirty="0">
-                        <a:latin typeface="Sarabun" charset="0"/>
-                        <a:ea typeface="Sarabun" charset="0"/>
-                        <a:cs typeface="Sarabun" charset="0"/>
-                      </a:endParaRPr>
-                    </a:p>
-                  </a:txBody>
-                  <a:tcPr marL="101600" marR="101600" marT="50800" marB="50800" anchor="ctr">
-                    <a:lnL w="12700" cap="flat" cmpd="sng" algn="ctr">
-                      <a:solidFill>
-                        <a:srgbClr val="E3D8C8"/>
-                      </a:solidFill>
-                      <a:prstDash val="solid"/>
-                      <a:round/>
-                      <a:headEnd type="none" w="med" len="med"/>
-                      <a:tailEnd type="none" w="med" len="med"/>
-                    </a:lnL>
-                    <a:lnR w="12700" cap="flat" cmpd="sng" algn="ctr">
-                      <a:solidFill>
-                        <a:srgbClr val="E3D8C8"/>
-                      </a:solidFill>
-                      <a:prstDash val="solid"/>
-                      <a:round/>
-                      <a:headEnd type="none" w="med" len="med"/>
-                      <a:tailEnd type="none" w="med" len="med"/>
-                    </a:lnR>
-                    <a:lnT w="12700" cap="flat" cmpd="sng" algn="ctr">
-                      <a:solidFill>
-                        <a:srgbClr val="E3D8C8"/>
-                      </a:solidFill>
-                      <a:prstDash val="solid"/>
-                      <a:round/>
-                      <a:headEnd type="none" w="med" len="med"/>
-                      <a:tailEnd type="none" w="med" len="med"/>
-                    </a:lnT>
-                    <a:lnB w="12700" cap="flat" cmpd="sng" algn="ctr">
-                      <a:solidFill>
-                        <a:srgbClr val="E3D8C8"/>
-                      </a:solidFill>
-                      <a:prstDash val="solid"/>
-                      <a:round/>
-                      <a:headEnd type="none" w="med" len="med"/>
-                      <a:tailEnd type="none" w="med" len="med"/>
-                    </a:lnB>
-                    <a:solidFill>
-                      <a:srgbClr val="FFFDFA"/>
-                    </a:solidFill>
-                  </a:tcPr>
-                </a:tc>
-                <a:tc>
-                  <a:txBody>
-                    <a:bodyPr/>
-                    <a:lstStyle/>
-                    <a:p>
-                      <a:pPr algn="l" indent="0" marL="0">
-                        <a:buNone/>
-                      </a:pPr>
-                      <a:r>
-                        <a:rPr lang="en-US" sz="1100" dirty="0">
-                          <a:solidFill>
-                            <a:srgbClr val="2C231C"/>
-                          </a:solidFill>
-                          <a:latin typeface="Sarabun" pitchFamily="34" charset="0"/>
-                          <a:ea typeface="Sarabun" pitchFamily="34" charset="-122"/>
-                          <a:cs typeface="Sarabun" pitchFamily="34" charset="-120"/>
-                        </a:rPr>
-                        <a:t>14.1 down to 11.8, a 16% cut, and both models manage it</a:t>
-                      </a:r>
-                      <a:endParaRPr lang="en-US" sz="1100" dirty="0">
-                        <a:latin typeface="Sarabun" charset="0"/>
-                        <a:ea typeface="Sarabun" charset="0"/>
-                        <a:cs typeface="Sarabun" charset="0"/>
-                      </a:endParaRPr>
-                    </a:p>
-                  </a:txBody>
-                  <a:tcPr marL="101600" marR="101600" marT="50800" marB="50800" anchor="ctr">
-                    <a:lnL w="12700" cap="flat" cmpd="sng" algn="ctr">
-                      <a:solidFill>
-                        <a:srgbClr val="E3D8C8"/>
-                      </a:solidFill>
-                      <a:prstDash val="solid"/>
-                      <a:round/>
-                      <a:headEnd type="none" w="med" len="med"/>
-                      <a:tailEnd type="none" w="med" len="med"/>
-                    </a:lnL>
-                    <a:lnR w="12700" cap="flat" cmpd="sng" algn="ctr">
-                      <a:solidFill>
-                        <a:srgbClr val="E3D8C8"/>
-                      </a:solidFill>
-                      <a:prstDash val="solid"/>
-                      <a:round/>
-                      <a:headEnd type="none" w="med" len="med"/>
-                      <a:tailEnd type="none" w="med" len="med"/>
-                    </a:lnR>
-                    <a:lnT w="12700" cap="flat" cmpd="sng" algn="ctr">
-                      <a:solidFill>
-                        <a:srgbClr val="E3D8C8"/>
-                      </a:solidFill>
-                      <a:prstDash val="solid"/>
-                      <a:round/>
-                      <a:headEnd type="none" w="med" len="med"/>
-                      <a:tailEnd type="none" w="med" len="med"/>
-                    </a:lnT>
-                    <a:lnB w="12700" cap="flat" cmpd="sng" algn="ctr">
-                      <a:solidFill>
-                        <a:srgbClr val="E3D8C8"/>
-                      </a:solidFill>
-                      <a:prstDash val="solid"/>
-                      <a:round/>
-                      <a:headEnd type="none" w="med" len="med"/>
-                      <a:tailEnd type="none" w="med" len="med"/>
-                    </a:lnB>
-                    <a:solidFill>
-                      <a:srgbClr val="FFFDFA"/>
-                    </a:solidFill>
-                  </a:tcPr>
-                </a:tc>
-              </a:tr>
-            </a:tbl>
-          </a:graphicData>
-        </a:graphic>
-      </p:graphicFrame>
-      <p:sp>
-        <p:nvSpPr>
-          <p:cNvPr id="7" name="Shape 3"/>
-          <p:cNvSpPr/>
-          <p:nvPr/>
-        </p:nvSpPr>
-        <p:spPr>
-          <a:xfrm>
-            <a:off x="502920" y="4114800"/>
-            <a:ext cx="8138160" cy="932688"/>
-          </a:xfrm>
-          <a:prstGeom prst="roundRect">
-            <a:avLst>
-              <a:gd name="adj" fmla="val 7843"/>
-            </a:avLst>
-          </a:prstGeom>
-          <a:solidFill>
-            <a:srgbClr val="2A2018"/>
-          </a:solidFill>
-          <a:ln w="12700">
-            <a:solidFill>
-              <a:srgbClr val="2A2018"/>
-            </a:solidFill>
-            <a:prstDash val="solid"/>
-          </a:ln>
-        </p:spPr>
-      </p:sp>
-      <p:sp>
-        <p:nvSpPr>
-          <p:cNvPr id="8" name="Text 4"/>
-          <p:cNvSpPr txBox="1"/>
-          <p:nvPr/>
-        </p:nvSpPr>
-        <p:spPr>
-          <a:xfrm>
-            <a:off x="758952" y="4242816"/>
-            <a:ext cx="7626096" cy="347472"/>
-          </a:xfrm>
-          <a:prstGeom prst="rect">
-            <a:avLst/>
-          </a:prstGeom>
-          <a:noFill/>
-          <a:ln/>
-        </p:spPr>
-        <p:txBody>
-          <a:bodyPr wrap="square" lIns="0" tIns="0" rIns="0" bIns="0" rtlCol="0" anchor="ctr"/>
-          <a:lstStyle/>
-          <a:p>
-            <a:pPr indent="0" marL="0">
-              <a:buNone/>
-            </a:pPr>
-            <a:r>
-              <a:rPr lang="en-US" sz="1500" b="1" dirty="0">
-                <a:solidFill>
-                  <a:srgbClr val="FFFDFA"/>
-                </a:solidFill>
-                <a:latin typeface="Sarabun" pitchFamily="34" charset="0"/>
-                <a:ea typeface="Sarabun" pitchFamily="34" charset="-122"/>
-                <a:cs typeface="Sarabun" pitchFamily="34" charset="-120"/>
-              </a:rPr>
-              <a:t>The useful output is a warning that tomorrow changes, not tomorrow's number.</a:t>
-            </a:r>
-            <a:endParaRPr lang="en-US" sz="1500" dirty="0"/>
-          </a:p>
-        </p:txBody>
-      </p:sp>
-      <p:sp>
-        <p:nvSpPr>
-          <p:cNvPr id="9" name="Text 5"/>
-          <p:cNvSpPr txBox="1"/>
-          <p:nvPr/>
-        </p:nvSpPr>
-        <p:spPr>
-          <a:xfrm>
-            <a:off x="758952" y="4626864"/>
-            <a:ext cx="7626096" cy="329184"/>
-          </a:xfrm>
-          <a:prstGeom prst="rect">
-            <a:avLst/>
-          </a:prstGeom>
-          <a:noFill/>
-          <a:ln/>
-        </p:spPr>
-        <p:txBody>
-          <a:bodyPr wrap="square" lIns="0" tIns="0" rIns="0" bIns="0" rtlCol="0" anchor="ctr"/>
-          <a:lstStyle/>
-          <a:p>
-            <a:pPr indent="0" marL="0">
-              <a:buNone/>
-            </a:pPr>
-            <a:r>
-              <a:rPr lang="en-US" sz="1150" dirty="0">
-                <a:solidFill>
-                  <a:srgbClr val="E9A56B"/>
-                </a:solidFill>
-                <a:latin typeface="Sarabun" pitchFamily="34" charset="0"/>
-                <a:ea typeface="Sarabun" pitchFamily="34" charset="-122"/>
-                <a:cs typeface="Sarabun" pitchFamily="34" charset="-120"/>
-              </a:rPr>
-              <a:t>That is what the next slide predicts, and what the first recommendation asks the province to publish.</a:t>
-            </a:r>
-            <a:endParaRPr lang="en-US" sz="1150" dirty="0"/>
-          </a:p>
-        </p:txBody>
-      </p:sp>
     </p:spTree>
   </p:cSld>
   <p:clrMapOvr>
